--- a/public/wedding-mentor-files/S6_Experiencia_Portal.pptx
+++ b/public/wedding-mentor-files/S6_Experiencia_Portal.pptx
@@ -2548,7 +2548,7 @@
     <p:bg>
       <p:bgPr>
         <a:solidFill>
-          <a:srgbClr val="0B1D33"/>
+          <a:srgbClr val="F8F6F3"/>
         </a:solidFill>
       </p:bgPr>
     </p:bg>
@@ -2566,223 +2566,164 @@
           <a:chExt cx="0" cy="0"/>
         </a:xfrm>
       </p:grpSpPr>
-      <p:sp>
-        <p:nvSpPr>
-          <p:cNvPr id="2" name="Shape 0"/>
-          <p:cNvSpPr/>
-          <p:nvPr/>
-        </p:nvSpPr>
-        <p:spPr>
-          <a:xfrm>
-            <a:off x="8046720" y="-1645920"/>
-            <a:ext cx="5943600" cy="5943600"/>
-          </a:xfrm>
-          <a:prstGeom prst="ellipse">
-            <a:avLst/>
-          </a:prstGeom>
-          <a:solidFill>
-            <a:srgbClr val="4A9EFF">
-              <a:alpha val="14000"/>
-            </a:srgbClr>
-          </a:solidFill>
-          <a:ln/>
-        </p:spPr>
-      </p:sp>
-      <p:sp>
-        <p:nvSpPr>
-          <p:cNvPr id="3" name="Shape 1"/>
-          <p:cNvSpPr/>
-          <p:nvPr/>
-        </p:nvSpPr>
-        <p:spPr>
-          <a:xfrm>
-            <a:off x="-1828800" y="4389120"/>
-            <a:ext cx="5029200" cy="5029200"/>
-          </a:xfrm>
-          <a:prstGeom prst="ellipse">
-            <a:avLst/>
-          </a:prstGeom>
-          <a:solidFill>
-            <a:srgbClr val="C9A961">
-              <a:alpha val="10000"/>
-            </a:srgbClr>
-          </a:solidFill>
-          <a:ln/>
-        </p:spPr>
-      </p:sp>
-      <p:sp>
-        <p:nvSpPr>
-          <p:cNvPr id="4" name="Text 2"/>
-          <p:cNvSpPr/>
-          <p:nvPr/>
-        </p:nvSpPr>
-        <p:spPr>
-          <a:xfrm>
-            <a:off x="640080" y="548640"/>
-            <a:ext cx="7315200" cy="365760"/>
-          </a:xfrm>
-          <a:prstGeom prst="rect">
-            <a:avLst/>
-          </a:prstGeom>
-          <a:noFill/>
-          <a:ln/>
-        </p:spPr>
-        <p:txBody>
-          <a:bodyPr wrap="square" lIns="0" tIns="0" rIns="0" bIns="0" rtlCol="0" anchor="ctr"/>
-          <a:lstStyle/>
-          <a:p>
-            <a:pPr indent="0" marL="0">
-              <a:buNone/>
-            </a:pPr>
-            <a:r>
-              <a:rPr lang="en-US" sz="1300" b="1" spc="500" kern="0" dirty="0">
-                <a:solidFill>
-                  <a:srgbClr val="9FB2C9"/>
+      <p:pic>
+        <p:nvPicPr>
+          <p:cNvPr id="2" name="Image 0" descr="preencoded.png">    </p:cNvPr>
+          <p:cNvPicPr>
+            <a:picLocks noChangeAspect="1"/>
+          </p:cNvPicPr>
+          <p:nvPr/>
+        </p:nvPicPr>
+        <p:blipFill>
+          <a:blip r:embed="rId1"/>
+          <a:stretch>
+            <a:fillRect/>
+          </a:stretch>
+        </p:blipFill>
+        <p:spPr>
+          <a:xfrm>
+            <a:off x="603504" y="457200"/>
+            <a:ext cx="1371600" cy="1415143"/>
+          </a:xfrm>
+          <a:prstGeom prst="rect">
+            <a:avLst/>
+          </a:prstGeom>
+        </p:spPr>
+      </p:pic>
+      <p:sp>
+        <p:nvSpPr>
+          <p:cNvPr id="3" name="Text 0"/>
+          <p:cNvSpPr/>
+          <p:nvPr/>
+        </p:nvSpPr>
+        <p:spPr>
+          <a:xfrm>
+            <a:off x="640080" y="2286000"/>
+            <a:ext cx="5486400" cy="457200"/>
+          </a:xfrm>
+          <a:prstGeom prst="rect">
+            <a:avLst/>
+          </a:prstGeom>
+          <a:noFill/>
+          <a:ln/>
+        </p:spPr>
+        <p:txBody>
+          <a:bodyPr wrap="square" lIns="0" tIns="0" rIns="0" bIns="0" rtlCol="0" anchor="ctr"/>
+          <a:lstStyle/>
+          <a:p>
+            <a:pPr indent="0" marL="0">
+              <a:buNone/>
+            </a:pPr>
+            <a:r>
+              <a:rPr lang="en-US" sz="1500" b="1" spc="600" kern="0" dirty="0">
+                <a:solidFill>
+                  <a:srgbClr val="B1937E"/>
                 </a:solidFill>
                 <a:latin typeface="Calibri" pitchFamily="34" charset="0"/>
                 <a:ea typeface="Calibri" pitchFamily="34" charset="-122"/>
                 <a:cs typeface="Calibri" pitchFamily="34" charset="-120"/>
               </a:rPr>
-              <a:t>MENTORIA · RL</a:t>
-            </a:r>
-            <a:endParaRPr lang="en-US" sz="1300" dirty="0"/>
-          </a:p>
-        </p:txBody>
-      </p:sp>
-      <p:sp>
-        <p:nvSpPr>
-          <p:cNvPr id="5" name="Text 3"/>
-          <p:cNvSpPr/>
-          <p:nvPr/>
-        </p:nvSpPr>
-        <p:spPr>
-          <a:xfrm>
-            <a:off x="640080" y="2286000"/>
-            <a:ext cx="5486400" cy="457200"/>
-          </a:xfrm>
-          <a:prstGeom prst="rect">
-            <a:avLst/>
-          </a:prstGeom>
-          <a:noFill/>
-          <a:ln/>
-        </p:spPr>
-        <p:txBody>
-          <a:bodyPr wrap="square" lIns="0" tIns="0" rIns="0" bIns="0" rtlCol="0" anchor="ctr"/>
-          <a:lstStyle/>
-          <a:p>
-            <a:pPr indent="0" marL="0">
-              <a:buNone/>
-            </a:pPr>
-            <a:r>
-              <a:rPr lang="en-US" sz="1500" b="1" spc="600" kern="0" dirty="0">
-                <a:solidFill>
-                  <a:srgbClr val="C9A961"/>
+              <a:t>SESSÃO 06</a:t>
+            </a:r>
+            <a:endParaRPr lang="en-US" sz="1500" dirty="0"/>
+          </a:p>
+        </p:txBody>
+      </p:sp>
+      <p:sp>
+        <p:nvSpPr>
+          <p:cNvPr id="4" name="Text 1"/>
+          <p:cNvSpPr/>
+          <p:nvPr/>
+        </p:nvSpPr>
+        <p:spPr>
+          <a:xfrm>
+            <a:off x="603504" y="2724912"/>
+            <a:ext cx="10058400" cy="2011680"/>
+          </a:xfrm>
+          <a:prstGeom prst="rect">
+            <a:avLst/>
+          </a:prstGeom>
+          <a:noFill/>
+          <a:ln/>
+        </p:spPr>
+        <p:txBody>
+          <a:bodyPr wrap="square" lIns="0" tIns="0" rIns="0" bIns="0" rtlCol="0" anchor="ctr"/>
+          <a:lstStyle/>
+          <a:p>
+            <a:pPr indent="0" marL="0">
+              <a:lnSpc>
+                <a:spcPct val="100000"/>
+              </a:lnSpc>
+              <a:buNone/>
+            </a:pPr>
+            <a:r>
+              <a:rPr lang="en-US" sz="4400" b="1" dirty="0">
+                <a:solidFill>
+                  <a:srgbClr val="33302B"/>
+                </a:solidFill>
+                <a:latin typeface="Georgia" pitchFamily="34" charset="0"/>
+                <a:ea typeface="Georgia" pitchFamily="34" charset="-122"/>
+                <a:cs typeface="Georgia" pitchFamily="34" charset="-120"/>
+              </a:rPr>
+              <a:t>Experiência e Portal</a:t>
+            </a:r>
+            <a:endParaRPr lang="en-US" sz="4400" dirty="0"/>
+          </a:p>
+          <a:p>
+            <a:pPr indent="0" marL="0">
+              <a:lnSpc>
+                <a:spcPct val="100000"/>
+              </a:lnSpc>
+              <a:buNone/>
+            </a:pPr>
+            <a:r>
+              <a:rPr lang="en-US" sz="4400" b="1" dirty="0">
+                <a:solidFill>
+                  <a:srgbClr val="33302B"/>
+                </a:solidFill>
+                <a:latin typeface="Georgia" pitchFamily="34" charset="0"/>
+                <a:ea typeface="Georgia" pitchFamily="34" charset="-122"/>
+                <a:cs typeface="Georgia" pitchFamily="34" charset="-120"/>
+              </a:rPr>
+              <a:t>de Cliente</a:t>
+            </a:r>
+            <a:endParaRPr lang="en-US" sz="4400" dirty="0"/>
+          </a:p>
+        </p:txBody>
+      </p:sp>
+      <p:sp>
+        <p:nvSpPr>
+          <p:cNvPr id="5" name="Text 2"/>
+          <p:cNvSpPr/>
+          <p:nvPr/>
+        </p:nvSpPr>
+        <p:spPr>
+          <a:xfrm>
+            <a:off x="640080" y="4983480"/>
+            <a:ext cx="8229600" cy="822960"/>
+          </a:xfrm>
+          <a:prstGeom prst="rect">
+            <a:avLst/>
+          </a:prstGeom>
+          <a:noFill/>
+          <a:ln/>
+        </p:spPr>
+        <p:txBody>
+          <a:bodyPr wrap="square" lIns="0" tIns="0" rIns="0" bIns="0" rtlCol="0" anchor="ctr"/>
+          <a:lstStyle/>
+          <a:p>
+            <a:pPr indent="0" marL="0">
+              <a:buNone/>
+            </a:pPr>
+            <a:r>
+              <a:rPr lang="en-US" sz="1700" dirty="0">
+                <a:solidFill>
+                  <a:srgbClr val="8A7E72"/>
                 </a:solidFill>
                 <a:latin typeface="Calibri" pitchFamily="34" charset="0"/>
                 <a:ea typeface="Calibri" pitchFamily="34" charset="-122"/>
                 <a:cs typeface="Calibri" pitchFamily="34" charset="-120"/>
               </a:rPr>
-              <a:t>SESSÃO 06</a:t>
-            </a:r>
-            <a:endParaRPr lang="en-US" sz="1500" dirty="0"/>
-          </a:p>
-        </p:txBody>
-      </p:sp>
-      <p:sp>
-        <p:nvSpPr>
-          <p:cNvPr id="6" name="Text 4"/>
-          <p:cNvSpPr/>
-          <p:nvPr/>
-        </p:nvSpPr>
-        <p:spPr>
-          <a:xfrm>
-            <a:off x="603504" y="2724912"/>
-            <a:ext cx="10058400" cy="2011680"/>
-          </a:xfrm>
-          <a:prstGeom prst="rect">
-            <a:avLst/>
-          </a:prstGeom>
-          <a:noFill/>
-          <a:ln/>
-        </p:spPr>
-        <p:txBody>
-          <a:bodyPr wrap="square" lIns="0" tIns="0" rIns="0" bIns="0" rtlCol="0" anchor="ctr"/>
-          <a:lstStyle/>
-          <a:p>
-            <a:pPr indent="0" marL="0">
-              <a:lnSpc>
-                <a:spcPct val="100000"/>
-              </a:lnSpc>
-              <a:buNone/>
-            </a:pPr>
-            <a:r>
-              <a:rPr lang="en-US" sz="5000" b="1" dirty="0">
-                <a:solidFill>
-                  <a:srgbClr val="EAF1FA"/>
-                </a:solidFill>
-                <a:latin typeface="Bookman Old Style" pitchFamily="34" charset="0"/>
-                <a:ea typeface="Bookman Old Style" pitchFamily="34" charset="-122"/>
-                <a:cs typeface="Bookman Old Style" pitchFamily="34" charset="-120"/>
-              </a:rPr>
-              <a:t>Experiência e Portal</a:t>
-            </a:r>
-            <a:endParaRPr lang="en-US" sz="5000" dirty="0"/>
-          </a:p>
-          <a:p>
-            <a:pPr indent="0" marL="0">
-              <a:lnSpc>
-                <a:spcPct val="100000"/>
-              </a:lnSpc>
-              <a:buNone/>
-            </a:pPr>
-            <a:r>
-              <a:rPr lang="en-US" sz="5000" b="1" dirty="0">
-                <a:solidFill>
-                  <a:srgbClr val="EAF1FA"/>
-                </a:solidFill>
-                <a:latin typeface="Bookman Old Style" pitchFamily="34" charset="0"/>
-                <a:ea typeface="Bookman Old Style" pitchFamily="34" charset="-122"/>
-                <a:cs typeface="Bookman Old Style" pitchFamily="34" charset="-120"/>
-              </a:rPr>
-              <a:t>de Cliente</a:t>
-            </a:r>
-            <a:endParaRPr lang="en-US" sz="5000" dirty="0"/>
-          </a:p>
-        </p:txBody>
-      </p:sp>
-      <p:sp>
-        <p:nvSpPr>
-          <p:cNvPr id="7" name="Text 5"/>
-          <p:cNvSpPr/>
-          <p:nvPr/>
-        </p:nvSpPr>
-        <p:spPr>
-          <a:xfrm>
-            <a:off x="640080" y="4983480"/>
-            <a:ext cx="8229600" cy="822960"/>
-          </a:xfrm>
-          <a:prstGeom prst="rect">
-            <a:avLst/>
-          </a:prstGeom>
-          <a:noFill/>
-          <a:ln/>
-        </p:spPr>
-        <p:txBody>
-          <a:bodyPr wrap="square" lIns="0" tIns="0" rIns="0" bIns="0" rtlCol="0" anchor="ctr"/>
-          <a:lstStyle/>
-          <a:p>
-            <a:pPr indent="0" marL="0">
-              <a:buNone/>
-            </a:pPr>
-            <a:r>
-              <a:rPr lang="en-US" sz="1700" dirty="0">
-                <a:solidFill>
-                  <a:srgbClr val="9FB2C9"/>
-                </a:solidFill>
-                <a:latin typeface="Calibri" pitchFamily="34" charset="0"/>
-                <a:ea typeface="Calibri" pitchFamily="34" charset="-122"/>
-                <a:cs typeface="Calibri" pitchFamily="34" charset="-120"/>
-              </a:rPr>
               <a:t>Uma experiência tão cuidada que o casal se torna fã, com um portal de cliente diferenciador.</a:t>
             </a:r>
             <a:endParaRPr lang="en-US" sz="1700" dirty="0"/>
@@ -2791,7 +2732,7 @@
       </p:sp>
       <p:sp>
         <p:nvSpPr>
-          <p:cNvPr id="8" name="Text 6"/>
+          <p:cNvPr id="6" name="Text 3"/>
           <p:cNvSpPr/>
           <p:nvPr/>
         </p:nvSpPr>
@@ -2816,11 +2757,11 @@
             <a:r>
               <a:rPr lang="en-US" sz="12000" b="1" dirty="0">
                 <a:solidFill>
-                  <a:srgbClr val="16314F"/>
-                </a:solidFill>
-                <a:latin typeface="Bookman Old Style" pitchFamily="34" charset="0"/>
-                <a:ea typeface="Bookman Old Style" pitchFamily="34" charset="-122"/>
-                <a:cs typeface="Bookman Old Style" pitchFamily="34" charset="-120"/>
+                  <a:srgbClr val="EADFD0"/>
+                </a:solidFill>
+                <a:latin typeface="Georgia" pitchFamily="34" charset="0"/>
+                <a:ea typeface="Georgia" pitchFamily="34" charset="-122"/>
+                <a:cs typeface="Georgia" pitchFamily="34" charset="-120"/>
               </a:rPr>
               <a:t>06</a:t>
             </a:r>
@@ -2830,7 +2771,7 @@
       </p:sp>
       <p:sp>
         <p:nvSpPr>
-          <p:cNvPr id="9" name="Shape 7"/>
+          <p:cNvPr id="7" name="Shape 4"/>
           <p:cNvSpPr/>
           <p:nvPr/>
         </p:nvSpPr>
@@ -2845,7 +2786,7 @@
           <a:noFill/>
           <a:ln w="31750">
             <a:solidFill>
-              <a:srgbClr val="C9A961"/>
+              <a:srgbClr val="B1937E"/>
             </a:solidFill>
             <a:prstDash val="solid"/>
           </a:ln>
@@ -2865,7 +2806,7 @@
     <p:bg>
       <p:bgPr>
         <a:solidFill>
-          <a:srgbClr val="0B1D33"/>
+          <a:srgbClr val="F8F6F3"/>
         </a:solidFill>
       </p:bgPr>
     </p:bg>
@@ -2910,7 +2851,7 @@
             <a:r>
               <a:rPr lang="en-US" sz="1200" b="1" spc="300" kern="0" dirty="0">
                 <a:solidFill>
-                  <a:srgbClr val="4A9EFF"/>
+                  <a:srgbClr val="9A7B66"/>
                 </a:solidFill>
                 <a:latin typeface="Calibri" pitchFamily="34" charset="0"/>
                 <a:ea typeface="Calibri" pitchFamily="34" charset="-122"/>
@@ -2952,11 +2893,11 @@
             <a:r>
               <a:rPr lang="en-US" sz="3200" b="1" dirty="0">
                 <a:solidFill>
-                  <a:srgbClr val="EAF1FA"/>
-                </a:solidFill>
-                <a:latin typeface="Bookman Old Style" pitchFamily="34" charset="0"/>
-                <a:ea typeface="Bookman Old Style" pitchFamily="34" charset="-122"/>
-                <a:cs typeface="Bookman Old Style" pitchFamily="34" charset="-120"/>
+                  <a:srgbClr val="33302B"/>
+                </a:solidFill>
+                <a:latin typeface="Georgia" pitchFamily="34" charset="0"/>
+                <a:ea typeface="Georgia" pitchFamily="34" charset="-122"/>
+                <a:cs typeface="Georgia" pitchFamily="34" charset="-120"/>
               </a:rPr>
               <a:t>A revista de pré-reunião</a:t>
             </a:r>
@@ -2981,13 +2922,18 @@
             </a:avLst>
           </a:prstGeom>
           <a:solidFill>
-            <a:srgbClr val="13283F"/>
+            <a:srgbClr val="FFFFFF"/>
           </a:solidFill>
-          <a:ln/>
+          <a:ln w="12700">
+            <a:solidFill>
+              <a:srgbClr val="E3D9CC"/>
+            </a:solidFill>
+            <a:prstDash val="solid"/>
+          </a:ln>
           <a:effectLst>
-            <a:outerShdw sx="100000" sy="100000" kx="0" ky="0" algn="bl" rotWithShape="0" blurRad="127000" dist="38100" dir="5400000">
-              <a:srgbClr val="000000">
-                <a:alpha val="28000"/>
+            <a:outerShdw sx="100000" sy="100000" kx="0" ky="0" algn="bl" rotWithShape="0" blurRad="114300" dist="38100" dir="5400000">
+              <a:srgbClr val="7A6A55">
+                <a:alpha val="12000"/>
               </a:srgbClr>
             </a:outerShdw>
           </a:effectLst>
@@ -3008,9 +2954,14 @@
             <a:avLst/>
           </a:prstGeom>
           <a:solidFill>
-            <a:srgbClr val="16314F"/>
+            <a:srgbClr val="EADFD0"/>
           </a:solidFill>
-          <a:ln/>
+          <a:ln w="9525">
+            <a:solidFill>
+              <a:srgbClr val="E3D9CC"/>
+            </a:solidFill>
+            <a:prstDash val="solid"/>
+          </a:ln>
         </p:spPr>
       </p:sp>
       <p:pic>
@@ -3064,11 +3015,11 @@
             <a:r>
               <a:rPr lang="en-US" sz="1900" b="1" dirty="0">
                 <a:solidFill>
-                  <a:srgbClr val="C9A961"/>
-                </a:solidFill>
-                <a:latin typeface="Bookman Old Style" pitchFamily="34" charset="0"/>
-                <a:ea typeface="Bookman Old Style" pitchFamily="34" charset="-122"/>
-                <a:cs typeface="Bookman Old Style" pitchFamily="34" charset="-120"/>
+                  <a:srgbClr val="B1937E"/>
+                </a:solidFill>
+                <a:latin typeface="Georgia" pitchFamily="34" charset="0"/>
+                <a:ea typeface="Georgia" pitchFamily="34" charset="-122"/>
+                <a:cs typeface="Georgia" pitchFamily="34" charset="-120"/>
               </a:rPr>
               <a:t>Educa</a:t>
             </a:r>
@@ -3103,7 +3054,7 @@
             <a:r>
               <a:rPr lang="en-US" sz="1400" dirty="0">
                 <a:solidFill>
-                  <a:srgbClr val="9FB2C9"/>
+                  <a:srgbClr val="8A7E72"/>
                 </a:solidFill>
                 <a:latin typeface="Calibri" pitchFamily="34" charset="0"/>
                 <a:ea typeface="Calibri" pitchFamily="34" charset="-122"/>
@@ -3132,13 +3083,18 @@
             </a:avLst>
           </a:prstGeom>
           <a:solidFill>
-            <a:srgbClr val="13283F"/>
+            <a:srgbClr val="FFFFFF"/>
           </a:solidFill>
-          <a:ln/>
+          <a:ln w="12700">
+            <a:solidFill>
+              <a:srgbClr val="E3D9CC"/>
+            </a:solidFill>
+            <a:prstDash val="solid"/>
+          </a:ln>
           <a:effectLst>
-            <a:outerShdw sx="100000" sy="100000" kx="0" ky="0" algn="bl" rotWithShape="0" blurRad="127000" dist="38100" dir="5400000">
-              <a:srgbClr val="000000">
-                <a:alpha val="28000"/>
+            <a:outerShdw sx="100000" sy="100000" kx="0" ky="0" algn="bl" rotWithShape="0" blurRad="114300" dist="38100" dir="5400000">
+              <a:srgbClr val="7A6A55">
+                <a:alpha val="12000"/>
               </a:srgbClr>
             </a:outerShdw>
           </a:effectLst>
@@ -3159,9 +3115,14 @@
             <a:avLst/>
           </a:prstGeom>
           <a:solidFill>
-            <a:srgbClr val="16314F"/>
+            <a:srgbClr val="EADFD0"/>
           </a:solidFill>
-          <a:ln/>
+          <a:ln w="9525">
+            <a:solidFill>
+              <a:srgbClr val="E3D9CC"/>
+            </a:solidFill>
+            <a:prstDash val="solid"/>
+          </a:ln>
         </p:spPr>
       </p:sp>
       <p:pic>
@@ -3215,11 +3176,11 @@
             <a:r>
               <a:rPr lang="en-US" sz="1900" b="1" dirty="0">
                 <a:solidFill>
-                  <a:srgbClr val="C9A961"/>
-                </a:solidFill>
-                <a:latin typeface="Bookman Old Style" pitchFamily="34" charset="0"/>
-                <a:ea typeface="Bookman Old Style" pitchFamily="34" charset="-122"/>
-                <a:cs typeface="Bookman Old Style" pitchFamily="34" charset="-120"/>
+                  <a:srgbClr val="B1937E"/>
+                </a:solidFill>
+                <a:latin typeface="Georgia" pitchFamily="34" charset="0"/>
+                <a:ea typeface="Georgia" pitchFamily="34" charset="-122"/>
+                <a:cs typeface="Georgia" pitchFamily="34" charset="-120"/>
               </a:rPr>
               <a:t>Eleva o ticket</a:t>
             </a:r>
@@ -3254,7 +3215,7 @@
             <a:r>
               <a:rPr lang="en-US" sz="1400" dirty="0">
                 <a:solidFill>
-                  <a:srgbClr val="9FB2C9"/>
+                  <a:srgbClr val="8A7E72"/>
                 </a:solidFill>
                 <a:latin typeface="Calibri" pitchFamily="34" charset="0"/>
                 <a:ea typeface="Calibri" pitchFamily="34" charset="-122"/>
@@ -3283,13 +3244,18 @@
             </a:avLst>
           </a:prstGeom>
           <a:solidFill>
-            <a:srgbClr val="13283F"/>
+            <a:srgbClr val="FFFFFF"/>
           </a:solidFill>
-          <a:ln/>
+          <a:ln w="12700">
+            <a:solidFill>
+              <a:srgbClr val="E3D9CC"/>
+            </a:solidFill>
+            <a:prstDash val="solid"/>
+          </a:ln>
           <a:effectLst>
-            <a:outerShdw sx="100000" sy="100000" kx="0" ky="0" algn="bl" rotWithShape="0" blurRad="127000" dist="38100" dir="5400000">
-              <a:srgbClr val="000000">
-                <a:alpha val="28000"/>
+            <a:outerShdw sx="100000" sy="100000" kx="0" ky="0" algn="bl" rotWithShape="0" blurRad="114300" dist="38100" dir="5400000">
+              <a:srgbClr val="7A6A55">
+                <a:alpha val="12000"/>
               </a:srgbClr>
             </a:outerShdw>
           </a:effectLst>
@@ -3310,9 +3276,14 @@
             <a:avLst/>
           </a:prstGeom>
           <a:solidFill>
-            <a:srgbClr val="16314F"/>
+            <a:srgbClr val="EADFD0"/>
           </a:solidFill>
-          <a:ln/>
+          <a:ln w="9525">
+            <a:solidFill>
+              <a:srgbClr val="E3D9CC"/>
+            </a:solidFill>
+            <a:prstDash val="solid"/>
+          </a:ln>
         </p:spPr>
       </p:sp>
       <p:pic>
@@ -3366,11 +3337,11 @@
             <a:r>
               <a:rPr lang="en-US" sz="1900" b="1" dirty="0">
                 <a:solidFill>
-                  <a:srgbClr val="C9A961"/>
-                </a:solidFill>
-                <a:latin typeface="Bookman Old Style" pitchFamily="34" charset="0"/>
-                <a:ea typeface="Bookman Old Style" pitchFamily="34" charset="-122"/>
-                <a:cs typeface="Bookman Old Style" pitchFamily="34" charset="-120"/>
+                  <a:srgbClr val="B1937E"/>
+                </a:solidFill>
+                <a:latin typeface="Georgia" pitchFamily="34" charset="0"/>
+                <a:ea typeface="Georgia" pitchFamily="34" charset="-122"/>
+                <a:cs typeface="Georgia" pitchFamily="34" charset="-120"/>
               </a:rPr>
               <a:t>Antecipa upsells</a:t>
             </a:r>
@@ -3405,7 +3376,7 @@
             <a:r>
               <a:rPr lang="en-US" sz="1400" dirty="0">
                 <a:solidFill>
-                  <a:srgbClr val="9FB2C9"/>
+                  <a:srgbClr val="8A7E72"/>
                 </a:solidFill>
                 <a:latin typeface="Calibri" pitchFamily="34" charset="0"/>
                 <a:ea typeface="Calibri" pitchFamily="34" charset="-122"/>
@@ -3434,7 +3405,7 @@
           <a:noFill/>
           <a:ln w="9525">
             <a:solidFill>
-              <a:srgbClr val="5C708A">
+              <a:srgbClr val="A89A86">
                 <a:alpha val="60000"/>
               </a:srgbClr>
             </a:solidFill>
@@ -3469,7 +3440,7 @@
             <a:r>
               <a:rPr lang="en-US" sz="900" dirty="0">
                 <a:solidFill>
-                  <a:srgbClr val="5C708A"/>
+                  <a:srgbClr val="A89A86"/>
                 </a:solidFill>
                 <a:latin typeface="Calibri" pitchFamily="34" charset="0"/>
                 <a:ea typeface="Calibri" pitchFamily="34" charset="-122"/>
@@ -3508,7 +3479,7 @@
             <a:r>
               <a:rPr lang="en-US" sz="900" dirty="0">
                 <a:solidFill>
-                  <a:srgbClr val="5C708A"/>
+                  <a:srgbClr val="A89A86"/>
                 </a:solidFill>
                 <a:latin typeface="Calibri" pitchFamily="34" charset="0"/>
                 <a:ea typeface="Calibri" pitchFamily="34" charset="-122"/>
@@ -3534,7 +3505,7 @@
     <p:bg>
       <p:bgPr>
         <a:solidFill>
-          <a:srgbClr val="0B1D33"/>
+          <a:srgbClr val="F8F6F3"/>
         </a:solidFill>
       </p:bgPr>
     </p:bg>
@@ -3579,7 +3550,7 @@
             <a:r>
               <a:rPr lang="en-US" sz="1200" b="1" spc="300" kern="0" dirty="0">
                 <a:solidFill>
-                  <a:srgbClr val="4A9EFF"/>
+                  <a:srgbClr val="9A7B66"/>
                 </a:solidFill>
                 <a:latin typeface="Calibri" pitchFamily="34" charset="0"/>
                 <a:ea typeface="Calibri" pitchFamily="34" charset="-122"/>
@@ -3621,11 +3592,11 @@
             <a:r>
               <a:rPr lang="en-US" sz="3200" b="1" dirty="0">
                 <a:solidFill>
-                  <a:srgbClr val="EAF1FA"/>
-                </a:solidFill>
-                <a:latin typeface="Bookman Old Style" pitchFamily="34" charset="0"/>
-                <a:ea typeface="Bookman Old Style" pitchFamily="34" charset="-122"/>
-                <a:cs typeface="Bookman Old Style" pitchFamily="34" charset="-120"/>
+                  <a:srgbClr val="33302B"/>
+                </a:solidFill>
+                <a:latin typeface="Georgia" pitchFamily="34" charset="0"/>
+                <a:ea typeface="Georgia" pitchFamily="34" charset="-122"/>
+                <a:cs typeface="Georgia" pitchFamily="34" charset="-120"/>
               </a:rPr>
               <a:t>Momentos uau planeados</a:t>
             </a:r>
@@ -3650,13 +3621,18 @@
             </a:avLst>
           </a:prstGeom>
           <a:solidFill>
-            <a:srgbClr val="13283F"/>
+            <a:srgbClr val="FFFFFF"/>
           </a:solidFill>
-          <a:ln/>
+          <a:ln w="12700">
+            <a:solidFill>
+              <a:srgbClr val="E3D9CC"/>
+            </a:solidFill>
+            <a:prstDash val="solid"/>
+          </a:ln>
           <a:effectLst>
-            <a:outerShdw sx="100000" sy="100000" kx="0" ky="0" algn="bl" rotWithShape="0" blurRad="127000" dist="38100" dir="5400000">
-              <a:srgbClr val="000000">
-                <a:alpha val="28000"/>
+            <a:outerShdw sx="100000" sy="100000" kx="0" ky="0" algn="bl" rotWithShape="0" blurRad="114300" dist="38100" dir="5400000">
+              <a:srgbClr val="7A6A55">
+                <a:alpha val="12000"/>
               </a:srgbClr>
             </a:outerShdw>
           </a:effectLst>
@@ -3677,9 +3653,14 @@
             <a:avLst/>
           </a:prstGeom>
           <a:solidFill>
-            <a:srgbClr val="16314F"/>
+            <a:srgbClr val="EADFD0"/>
           </a:solidFill>
-          <a:ln/>
+          <a:ln w="9525">
+            <a:solidFill>
+              <a:srgbClr val="E3D9CC"/>
+            </a:solidFill>
+            <a:prstDash val="solid"/>
+          </a:ln>
         </p:spPr>
       </p:sp>
       <p:pic>
@@ -3733,11 +3714,11 @@
             <a:r>
               <a:rPr lang="en-US" sz="1800" b="1" dirty="0">
                 <a:solidFill>
-                  <a:srgbClr val="C9A961"/>
-                </a:solidFill>
-                <a:latin typeface="Bookman Old Style" pitchFamily="34" charset="0"/>
-                <a:ea typeface="Bookman Old Style" pitchFamily="34" charset="-122"/>
-                <a:cs typeface="Bookman Old Style" pitchFamily="34" charset="-120"/>
+                  <a:srgbClr val="B1937E"/>
+                </a:solidFill>
+                <a:latin typeface="Georgia" pitchFamily="34" charset="0"/>
+                <a:ea typeface="Georgia" pitchFamily="34" charset="-122"/>
+                <a:cs typeface="Georgia" pitchFamily="34" charset="-120"/>
               </a:rPr>
               <a:t>Na véspera</a:t>
             </a:r>
@@ -3772,7 +3753,7 @@
             <a:r>
               <a:rPr lang="en-US" sz="1350" dirty="0">
                 <a:solidFill>
-                  <a:srgbClr val="9FB2C9"/>
+                  <a:srgbClr val="8A7E72"/>
                 </a:solidFill>
                 <a:latin typeface="Calibri" pitchFamily="34" charset="0"/>
                 <a:ea typeface="Calibri" pitchFamily="34" charset="-122"/>
@@ -3801,13 +3782,18 @@
             </a:avLst>
           </a:prstGeom>
           <a:solidFill>
-            <a:srgbClr val="13283F"/>
+            <a:srgbClr val="FFFFFF"/>
           </a:solidFill>
-          <a:ln/>
+          <a:ln w="12700">
+            <a:solidFill>
+              <a:srgbClr val="E3D9CC"/>
+            </a:solidFill>
+            <a:prstDash val="solid"/>
+          </a:ln>
           <a:effectLst>
-            <a:outerShdw sx="100000" sy="100000" kx="0" ky="0" algn="bl" rotWithShape="0" blurRad="127000" dist="38100" dir="5400000">
-              <a:srgbClr val="000000">
-                <a:alpha val="28000"/>
+            <a:outerShdw sx="100000" sy="100000" kx="0" ky="0" algn="bl" rotWithShape="0" blurRad="114300" dist="38100" dir="5400000">
+              <a:srgbClr val="7A6A55">
+                <a:alpha val="12000"/>
               </a:srgbClr>
             </a:outerShdw>
           </a:effectLst>
@@ -3828,9 +3814,14 @@
             <a:avLst/>
           </a:prstGeom>
           <a:solidFill>
-            <a:srgbClr val="16314F"/>
+            <a:srgbClr val="EADFD0"/>
           </a:solidFill>
-          <a:ln/>
+          <a:ln w="9525">
+            <a:solidFill>
+              <a:srgbClr val="E3D9CC"/>
+            </a:solidFill>
+            <a:prstDash val="solid"/>
+          </a:ln>
         </p:spPr>
       </p:sp>
       <p:pic>
@@ -3884,11 +3875,11 @@
             <a:r>
               <a:rPr lang="en-US" sz="1800" b="1" dirty="0">
                 <a:solidFill>
-                  <a:srgbClr val="C9A961"/>
-                </a:solidFill>
-                <a:latin typeface="Bookman Old Style" pitchFamily="34" charset="0"/>
-                <a:ea typeface="Bookman Old Style" pitchFamily="34" charset="-122"/>
-                <a:cs typeface="Bookman Old Style" pitchFamily="34" charset="-120"/>
+                  <a:srgbClr val="B1937E"/>
+                </a:solidFill>
+                <a:latin typeface="Georgia" pitchFamily="34" charset="0"/>
+                <a:ea typeface="Georgia" pitchFamily="34" charset="-122"/>
+                <a:cs typeface="Georgia" pitchFamily="34" charset="-120"/>
               </a:rPr>
               <a:t>Uma primeira foto no dia</a:t>
             </a:r>
@@ -3923,7 +3914,7 @@
             <a:r>
               <a:rPr lang="en-US" sz="1350" dirty="0">
                 <a:solidFill>
-                  <a:srgbClr val="9FB2C9"/>
+                  <a:srgbClr val="8A7E72"/>
                 </a:solidFill>
                 <a:latin typeface="Calibri" pitchFamily="34" charset="0"/>
                 <a:ea typeface="Calibri" pitchFamily="34" charset="-122"/>
@@ -3952,13 +3943,18 @@
             </a:avLst>
           </a:prstGeom>
           <a:solidFill>
-            <a:srgbClr val="13283F"/>
+            <a:srgbClr val="FFFFFF"/>
           </a:solidFill>
-          <a:ln/>
+          <a:ln w="12700">
+            <a:solidFill>
+              <a:srgbClr val="E3D9CC"/>
+            </a:solidFill>
+            <a:prstDash val="solid"/>
+          </a:ln>
           <a:effectLst>
-            <a:outerShdw sx="100000" sy="100000" kx="0" ky="0" algn="bl" rotWithShape="0" blurRad="127000" dist="38100" dir="5400000">
-              <a:srgbClr val="000000">
-                <a:alpha val="28000"/>
+            <a:outerShdw sx="100000" sy="100000" kx="0" ky="0" algn="bl" rotWithShape="0" blurRad="114300" dist="38100" dir="5400000">
+              <a:srgbClr val="7A6A55">
+                <a:alpha val="12000"/>
               </a:srgbClr>
             </a:outerShdw>
           </a:effectLst>
@@ -3979,9 +3975,14 @@
             <a:avLst/>
           </a:prstGeom>
           <a:solidFill>
-            <a:srgbClr val="16314F"/>
+            <a:srgbClr val="EADFD0"/>
           </a:solidFill>
-          <a:ln/>
+          <a:ln w="9525">
+            <a:solidFill>
+              <a:srgbClr val="E3D9CC"/>
+            </a:solidFill>
+            <a:prstDash val="solid"/>
+          </a:ln>
         </p:spPr>
       </p:sp>
       <p:pic>
@@ -4035,11 +4036,11 @@
             <a:r>
               <a:rPr lang="en-US" sz="1800" b="1" dirty="0">
                 <a:solidFill>
-                  <a:srgbClr val="C9A961"/>
-                </a:solidFill>
-                <a:latin typeface="Bookman Old Style" pitchFamily="34" charset="0"/>
-                <a:ea typeface="Bookman Old Style" pitchFamily="34" charset="-122"/>
-                <a:cs typeface="Bookman Old Style" pitchFamily="34" charset="-120"/>
+                  <a:srgbClr val="B1937E"/>
+                </a:solidFill>
+                <a:latin typeface="Georgia" pitchFamily="34" charset="0"/>
+                <a:ea typeface="Georgia" pitchFamily="34" charset="-122"/>
+                <a:cs typeface="Georgia" pitchFamily="34" charset="-120"/>
               </a:rPr>
               <a:t>Um pequeno presente</a:t>
             </a:r>
@@ -4074,7 +4075,7 @@
             <a:r>
               <a:rPr lang="en-US" sz="1350" dirty="0">
                 <a:solidFill>
-                  <a:srgbClr val="9FB2C9"/>
+                  <a:srgbClr val="8A7E72"/>
                 </a:solidFill>
                 <a:latin typeface="Calibri" pitchFamily="34" charset="0"/>
                 <a:ea typeface="Calibri" pitchFamily="34" charset="-122"/>
@@ -4103,13 +4104,18 @@
             </a:avLst>
           </a:prstGeom>
           <a:solidFill>
-            <a:srgbClr val="13283F"/>
+            <a:srgbClr val="FFFFFF"/>
           </a:solidFill>
-          <a:ln/>
+          <a:ln w="12700">
+            <a:solidFill>
+              <a:srgbClr val="E3D9CC"/>
+            </a:solidFill>
+            <a:prstDash val="solid"/>
+          </a:ln>
           <a:effectLst>
-            <a:outerShdw sx="100000" sy="100000" kx="0" ky="0" algn="bl" rotWithShape="0" blurRad="127000" dist="38100" dir="5400000">
-              <a:srgbClr val="000000">
-                <a:alpha val="28000"/>
+            <a:outerShdw sx="100000" sy="100000" kx="0" ky="0" algn="bl" rotWithShape="0" blurRad="114300" dist="38100" dir="5400000">
+              <a:srgbClr val="7A6A55">
+                <a:alpha val="12000"/>
               </a:srgbClr>
             </a:outerShdw>
           </a:effectLst>
@@ -4130,9 +4136,14 @@
             <a:avLst/>
           </a:prstGeom>
           <a:solidFill>
-            <a:srgbClr val="16314F"/>
+            <a:srgbClr val="EADFD0"/>
           </a:solidFill>
-          <a:ln/>
+          <a:ln w="9525">
+            <a:solidFill>
+              <a:srgbClr val="E3D9CC"/>
+            </a:solidFill>
+            <a:prstDash val="solid"/>
+          </a:ln>
         </p:spPr>
       </p:sp>
       <p:pic>
@@ -4186,11 +4197,11 @@
             <a:r>
               <a:rPr lang="en-US" sz="1800" b="1" dirty="0">
                 <a:solidFill>
-                  <a:srgbClr val="C9A961"/>
-                </a:solidFill>
-                <a:latin typeface="Bookman Old Style" pitchFamily="34" charset="0"/>
-                <a:ea typeface="Bookman Old Style" pitchFamily="34" charset="-122"/>
-                <a:cs typeface="Bookman Old Style" pitchFamily="34" charset="-120"/>
+                  <a:srgbClr val="B1937E"/>
+                </a:solidFill>
+                <a:latin typeface="Georgia" pitchFamily="34" charset="0"/>
+                <a:ea typeface="Georgia" pitchFamily="34" charset="-122"/>
+                <a:cs typeface="Georgia" pitchFamily="34" charset="-120"/>
               </a:rPr>
               <a:t>Surpresa final</a:t>
             </a:r>
@@ -4225,7 +4236,7 @@
             <a:r>
               <a:rPr lang="en-US" sz="1350" dirty="0">
                 <a:solidFill>
-                  <a:srgbClr val="9FB2C9"/>
+                  <a:srgbClr val="8A7E72"/>
                 </a:solidFill>
                 <a:latin typeface="Calibri" pitchFamily="34" charset="0"/>
                 <a:ea typeface="Calibri" pitchFamily="34" charset="-122"/>
@@ -4254,7 +4265,7 @@
           <a:noFill/>
           <a:ln w="9525">
             <a:solidFill>
-              <a:srgbClr val="5C708A">
+              <a:srgbClr val="A89A86">
                 <a:alpha val="60000"/>
               </a:srgbClr>
             </a:solidFill>
@@ -4289,7 +4300,7 @@
             <a:r>
               <a:rPr lang="en-US" sz="900" dirty="0">
                 <a:solidFill>
-                  <a:srgbClr val="5C708A"/>
+                  <a:srgbClr val="A89A86"/>
                 </a:solidFill>
                 <a:latin typeface="Calibri" pitchFamily="34" charset="0"/>
                 <a:ea typeface="Calibri" pitchFamily="34" charset="-122"/>
@@ -4328,7 +4339,7 @@
             <a:r>
               <a:rPr lang="en-US" sz="900" dirty="0">
                 <a:solidFill>
-                  <a:srgbClr val="5C708A"/>
+                  <a:srgbClr val="A89A86"/>
                 </a:solidFill>
                 <a:latin typeface="Calibri" pitchFamily="34" charset="0"/>
                 <a:ea typeface="Calibri" pitchFamily="34" charset="-122"/>
@@ -4354,7 +4365,7 @@
     <p:bg>
       <p:bgPr>
         <a:solidFill>
-          <a:srgbClr val="0B1D33"/>
+          <a:srgbClr val="F8F6F3"/>
         </a:solidFill>
       </p:bgPr>
     </p:bg>
@@ -4399,7 +4410,7 @@
             <a:r>
               <a:rPr lang="en-US" sz="1200" b="1" spc="300" kern="0" dirty="0">
                 <a:solidFill>
-                  <a:srgbClr val="4A9EFF"/>
+                  <a:srgbClr val="9A7B66"/>
                 </a:solidFill>
                 <a:latin typeface="Calibri" pitchFamily="34" charset="0"/>
                 <a:ea typeface="Calibri" pitchFamily="34" charset="-122"/>
@@ -4441,11 +4452,11 @@
             <a:r>
               <a:rPr lang="en-US" sz="3200" b="1" dirty="0">
                 <a:solidFill>
-                  <a:srgbClr val="EAF1FA"/>
-                </a:solidFill>
-                <a:latin typeface="Bookman Old Style" pitchFamily="34" charset="0"/>
-                <a:ea typeface="Bookman Old Style" pitchFamily="34" charset="-122"/>
-                <a:cs typeface="Bookman Old Style" pitchFamily="34" charset="-120"/>
+                  <a:srgbClr val="33302B"/>
+                </a:solidFill>
+                <a:latin typeface="Georgia" pitchFamily="34" charset="0"/>
+                <a:ea typeface="Georgia" pitchFamily="34" charset="-122"/>
+                <a:cs typeface="Georgia" pitchFamily="34" charset="-120"/>
               </a:rPr>
               <a:t>Comunicação que mantém o casal seguro</a:t>
             </a:r>
@@ -4470,13 +4481,18 @@
             </a:avLst>
           </a:prstGeom>
           <a:solidFill>
-            <a:srgbClr val="13283F"/>
+            <a:srgbClr val="FFFFFF"/>
           </a:solidFill>
-          <a:ln/>
+          <a:ln w="12700">
+            <a:solidFill>
+              <a:srgbClr val="E3D9CC"/>
+            </a:solidFill>
+            <a:prstDash val="solid"/>
+          </a:ln>
           <a:effectLst>
-            <a:outerShdw sx="100000" sy="100000" kx="0" ky="0" algn="bl" rotWithShape="0" blurRad="127000" dist="38100" dir="5400000">
-              <a:srgbClr val="000000">
-                <a:alpha val="28000"/>
+            <a:outerShdw sx="100000" sy="100000" kx="0" ky="0" algn="bl" rotWithShape="0" blurRad="114300" dist="38100" dir="5400000">
+              <a:srgbClr val="7A6A55">
+                <a:alpha val="12000"/>
               </a:srgbClr>
             </a:outerShdw>
           </a:effectLst>
@@ -4497,9 +4513,14 @@
             <a:avLst/>
           </a:prstGeom>
           <a:solidFill>
-            <a:srgbClr val="16314F"/>
+            <a:srgbClr val="EADFD0"/>
           </a:solidFill>
-          <a:ln/>
+          <a:ln w="9525">
+            <a:solidFill>
+              <a:srgbClr val="E3D9CC"/>
+            </a:solidFill>
+            <a:prstDash val="solid"/>
+          </a:ln>
         </p:spPr>
       </p:sp>
       <p:pic>
@@ -4553,11 +4574,11 @@
             <a:r>
               <a:rPr lang="en-US" sz="1900" b="1" dirty="0">
                 <a:solidFill>
-                  <a:srgbClr val="C9A961"/>
-                </a:solidFill>
-                <a:latin typeface="Bookman Old Style" pitchFamily="34" charset="0"/>
-                <a:ea typeface="Bookman Old Style" pitchFamily="34" charset="-122"/>
-                <a:cs typeface="Bookman Old Style" pitchFamily="34" charset="-120"/>
+                  <a:srgbClr val="B1937E"/>
+                </a:solidFill>
+                <a:latin typeface="Georgia" pitchFamily="34" charset="0"/>
+                <a:ea typeface="Georgia" pitchFamily="34" charset="-122"/>
+                <a:cs typeface="Georgia" pitchFamily="34" charset="-120"/>
               </a:rPr>
               <a:t>Lembretes nos momentos certos</a:t>
             </a:r>
@@ -4592,7 +4613,7 @@
             <a:r>
               <a:rPr lang="en-US" sz="1400" dirty="0">
                 <a:solidFill>
-                  <a:srgbClr val="9FB2C9"/>
+                  <a:srgbClr val="8A7E72"/>
                 </a:solidFill>
                 <a:latin typeface="Calibri" pitchFamily="34" charset="0"/>
                 <a:ea typeface="Calibri" pitchFamily="34" charset="-122"/>
@@ -4621,13 +4642,18 @@
             </a:avLst>
           </a:prstGeom>
           <a:solidFill>
-            <a:srgbClr val="13283F"/>
+            <a:srgbClr val="FFFFFF"/>
           </a:solidFill>
-          <a:ln/>
+          <a:ln w="12700">
+            <a:solidFill>
+              <a:srgbClr val="E3D9CC"/>
+            </a:solidFill>
+            <a:prstDash val="solid"/>
+          </a:ln>
           <a:effectLst>
-            <a:outerShdw sx="100000" sy="100000" kx="0" ky="0" algn="bl" rotWithShape="0" blurRad="127000" dist="38100" dir="5400000">
-              <a:srgbClr val="000000">
-                <a:alpha val="28000"/>
+            <a:outerShdw sx="100000" sy="100000" kx="0" ky="0" algn="bl" rotWithShape="0" blurRad="114300" dist="38100" dir="5400000">
+              <a:srgbClr val="7A6A55">
+                <a:alpha val="12000"/>
               </a:srgbClr>
             </a:outerShdw>
           </a:effectLst>
@@ -4648,9 +4674,14 @@
             <a:avLst/>
           </a:prstGeom>
           <a:solidFill>
-            <a:srgbClr val="16314F"/>
+            <a:srgbClr val="EADFD0"/>
           </a:solidFill>
-          <a:ln/>
+          <a:ln w="9525">
+            <a:solidFill>
+              <a:srgbClr val="E3D9CC"/>
+            </a:solidFill>
+            <a:prstDash val="solid"/>
+          </a:ln>
         </p:spPr>
       </p:sp>
       <p:pic>
@@ -4704,11 +4735,11 @@
             <a:r>
               <a:rPr lang="en-US" sz="1900" b="1" dirty="0">
                 <a:solidFill>
-                  <a:srgbClr val="C9A961"/>
-                </a:solidFill>
-                <a:latin typeface="Bookman Old Style" pitchFamily="34" charset="0"/>
-                <a:ea typeface="Bookman Old Style" pitchFamily="34" charset="-122"/>
-                <a:cs typeface="Bookman Old Style" pitchFamily="34" charset="-120"/>
+                  <a:srgbClr val="B1937E"/>
+                </a:solidFill>
+                <a:latin typeface="Georgia" pitchFamily="34" charset="0"/>
+                <a:ea typeface="Georgia" pitchFamily="34" charset="-122"/>
+                <a:cs typeface="Georgia" pitchFamily="34" charset="-120"/>
               </a:rPr>
               <a:t>Disponível, sem ser invasivo</a:t>
             </a:r>
@@ -4743,7 +4774,7 @@
             <a:r>
               <a:rPr lang="en-US" sz="1400" dirty="0">
                 <a:solidFill>
-                  <a:srgbClr val="9FB2C9"/>
+                  <a:srgbClr val="8A7E72"/>
                 </a:solidFill>
                 <a:latin typeface="Calibri" pitchFamily="34" charset="0"/>
                 <a:ea typeface="Calibri" pitchFamily="34" charset="-122"/>
@@ -4772,13 +4803,18 @@
             </a:avLst>
           </a:prstGeom>
           <a:solidFill>
-            <a:srgbClr val="13283F"/>
+            <a:srgbClr val="FFFFFF"/>
           </a:solidFill>
-          <a:ln/>
+          <a:ln w="12700">
+            <a:solidFill>
+              <a:srgbClr val="E3D9CC"/>
+            </a:solidFill>
+            <a:prstDash val="solid"/>
+          </a:ln>
           <a:effectLst>
-            <a:outerShdw sx="100000" sy="100000" kx="0" ky="0" algn="bl" rotWithShape="0" blurRad="127000" dist="38100" dir="5400000">
-              <a:srgbClr val="000000">
-                <a:alpha val="28000"/>
+            <a:outerShdw sx="100000" sy="100000" kx="0" ky="0" algn="bl" rotWithShape="0" blurRad="114300" dist="38100" dir="5400000">
+              <a:srgbClr val="7A6A55">
+                <a:alpha val="12000"/>
               </a:srgbClr>
             </a:outerShdw>
           </a:effectLst>
@@ -4799,9 +4835,14 @@
             <a:avLst/>
           </a:prstGeom>
           <a:solidFill>
-            <a:srgbClr val="16314F"/>
+            <a:srgbClr val="EADFD0"/>
           </a:solidFill>
-          <a:ln/>
+          <a:ln w="9525">
+            <a:solidFill>
+              <a:srgbClr val="E3D9CC"/>
+            </a:solidFill>
+            <a:prstDash val="solid"/>
+          </a:ln>
         </p:spPr>
       </p:sp>
       <p:pic>
@@ -4855,11 +4896,11 @@
             <a:r>
               <a:rPr lang="en-US" sz="1900" b="1" dirty="0">
                 <a:solidFill>
-                  <a:srgbClr val="C9A961"/>
-                </a:solidFill>
-                <a:latin typeface="Bookman Old Style" pitchFamily="34" charset="0"/>
-                <a:ea typeface="Bookman Old Style" pitchFamily="34" charset="-122"/>
-                <a:cs typeface="Bookman Old Style" pitchFamily="34" charset="-120"/>
+                  <a:srgbClr val="B1937E"/>
+                </a:solidFill>
+                <a:latin typeface="Georgia" pitchFamily="34" charset="0"/>
+                <a:ea typeface="Georgia" pitchFamily="34" charset="-122"/>
+                <a:cs typeface="Georgia" pitchFamily="34" charset="-120"/>
               </a:rPr>
               <a:t>Toque humano</a:t>
             </a:r>
@@ -4894,7 +4935,7 @@
             <a:r>
               <a:rPr lang="en-US" sz="1400" dirty="0">
                 <a:solidFill>
-                  <a:srgbClr val="9FB2C9"/>
+                  <a:srgbClr val="8A7E72"/>
                 </a:solidFill>
                 <a:latin typeface="Calibri" pitchFamily="34" charset="0"/>
                 <a:ea typeface="Calibri" pitchFamily="34" charset="-122"/>
@@ -4923,7 +4964,7 @@
           <a:noFill/>
           <a:ln w="9525">
             <a:solidFill>
-              <a:srgbClr val="5C708A">
+              <a:srgbClr val="A89A86">
                 <a:alpha val="60000"/>
               </a:srgbClr>
             </a:solidFill>
@@ -4958,7 +4999,7 @@
             <a:r>
               <a:rPr lang="en-US" sz="900" dirty="0">
                 <a:solidFill>
-                  <a:srgbClr val="5C708A"/>
+                  <a:srgbClr val="A89A86"/>
                 </a:solidFill>
                 <a:latin typeface="Calibri" pitchFamily="34" charset="0"/>
                 <a:ea typeface="Calibri" pitchFamily="34" charset="-122"/>
@@ -4997,7 +5038,7 @@
             <a:r>
               <a:rPr lang="en-US" sz="900" dirty="0">
                 <a:solidFill>
-                  <a:srgbClr val="5C708A"/>
+                  <a:srgbClr val="A89A86"/>
                 </a:solidFill>
                 <a:latin typeface="Calibri" pitchFamily="34" charset="0"/>
                 <a:ea typeface="Calibri" pitchFamily="34" charset="-122"/>
@@ -5023,7 +5064,7 @@
     <p:bg>
       <p:bgPr>
         <a:solidFill>
-          <a:srgbClr val="0B1D33"/>
+          <a:srgbClr val="F8F6F3"/>
         </a:solidFill>
       </p:bgPr>
     </p:bg>
@@ -5043,51 +5084,7 @@
       </p:grpSpPr>
       <p:sp>
         <p:nvSpPr>
-          <p:cNvPr id="2" name="Shape 0"/>
-          <p:cNvSpPr/>
-          <p:nvPr/>
-        </p:nvSpPr>
-        <p:spPr>
-          <a:xfrm>
-            <a:off x="8229600" y="-1463040"/>
-            <a:ext cx="5486400" cy="5486400"/>
-          </a:xfrm>
-          <a:prstGeom prst="ellipse">
-            <a:avLst/>
-          </a:prstGeom>
-          <a:solidFill>
-            <a:srgbClr val="4A9EFF">
-              <a:alpha val="10000"/>
-            </a:srgbClr>
-          </a:solidFill>
-          <a:ln/>
-        </p:spPr>
-      </p:sp>
-      <p:sp>
-        <p:nvSpPr>
-          <p:cNvPr id="3" name="Shape 1"/>
-          <p:cNvSpPr/>
-          <p:nvPr/>
-        </p:nvSpPr>
-        <p:spPr>
-          <a:xfrm>
-            <a:off x="-1463040" y="4206240"/>
-            <a:ext cx="4572000" cy="4572000"/>
-          </a:xfrm>
-          <a:prstGeom prst="ellipse">
-            <a:avLst/>
-          </a:prstGeom>
-          <a:solidFill>
-            <a:srgbClr val="C9A961">
-              <a:alpha val="8000"/>
-            </a:srgbClr>
-          </a:solidFill>
-          <a:ln/>
-        </p:spPr>
-      </p:sp>
-      <p:sp>
-        <p:nvSpPr>
-          <p:cNvPr id="4" name="Text 2"/>
+          <p:cNvPr id="2" name="Text 0"/>
           <p:cNvSpPr/>
           <p:nvPr/>
         </p:nvSpPr>
@@ -5112,7 +5109,7 @@
             <a:r>
               <a:rPr lang="en-US" sz="1200" b="1" spc="300" kern="0" dirty="0">
                 <a:solidFill>
-                  <a:srgbClr val="4A9EFF"/>
+                  <a:srgbClr val="9A7B66"/>
                 </a:solidFill>
                 <a:latin typeface="Calibri" pitchFamily="34" charset="0"/>
                 <a:ea typeface="Calibri" pitchFamily="34" charset="-122"/>
@@ -5126,7 +5123,7 @@
       </p:sp>
       <p:sp>
         <p:nvSpPr>
-          <p:cNvPr id="5" name="Shape 3"/>
+          <p:cNvPr id="3" name="Shape 1"/>
           <p:cNvSpPr/>
           <p:nvPr/>
         </p:nvSpPr>
@@ -5139,14 +5136,19 @@
             <a:avLst/>
           </a:prstGeom>
           <a:solidFill>
-            <a:srgbClr val="16314F"/>
+            <a:srgbClr val="EADFD0"/>
           </a:solidFill>
-          <a:ln/>
+          <a:ln w="9525">
+            <a:solidFill>
+              <a:srgbClr val="E3D9CC"/>
+            </a:solidFill>
+            <a:prstDash val="solid"/>
+          </a:ln>
         </p:spPr>
       </p:sp>
       <p:pic>
         <p:nvPicPr>
-          <p:cNvPr id="6" name="Image 0" descr="preencoded.png">    </p:cNvPr>
+          <p:cNvPr id="4" name="Image 0" descr="preencoded.png">    </p:cNvPr>
           <p:cNvPicPr>
             <a:picLocks noChangeAspect="1"/>
           </p:cNvPicPr>
@@ -5170,7 +5172,7 @@
       </p:pic>
       <p:sp>
         <p:nvSpPr>
-          <p:cNvPr id="7" name="Text 4"/>
+          <p:cNvPr id="5" name="Text 2"/>
           <p:cNvSpPr/>
           <p:nvPr/>
         </p:nvSpPr>
@@ -5198,11 +5200,11 @@
             <a:r>
               <a:rPr lang="en-US" sz="3000" b="1" i="1" dirty="0">
                 <a:solidFill>
-                  <a:srgbClr val="EAF1FA"/>
-                </a:solidFill>
-                <a:latin typeface="Bookman Old Style" pitchFamily="34" charset="0"/>
-                <a:ea typeface="Bookman Old Style" pitchFamily="34" charset="-122"/>
-                <a:cs typeface="Bookman Old Style" pitchFamily="34" charset="-120"/>
+                  <a:srgbClr val="33302B"/>
+                </a:solidFill>
+                <a:latin typeface="Georgia" pitchFamily="34" charset="0"/>
+                <a:ea typeface="Georgia" pitchFamily="34" charset="-122"/>
+                <a:cs typeface="Georgia" pitchFamily="34" charset="-120"/>
               </a:rPr>
               <a:t>Cada momento uau é marketing que não se compra.</a:t>
             </a:r>
@@ -5212,7 +5214,7 @@
       </p:sp>
       <p:sp>
         <p:nvSpPr>
-          <p:cNvPr id="8" name="Text 5"/>
+          <p:cNvPr id="6" name="Text 3"/>
           <p:cNvSpPr/>
           <p:nvPr/>
         </p:nvSpPr>
@@ -5237,7 +5239,7 @@
             <a:r>
               <a:rPr lang="en-US" sz="1600" dirty="0">
                 <a:solidFill>
-                  <a:srgbClr val="9FB2C9"/>
+                  <a:srgbClr val="8A7E72"/>
                 </a:solidFill>
                 <a:latin typeface="Calibri" pitchFamily="34" charset="0"/>
                 <a:ea typeface="Calibri" pitchFamily="34" charset="-122"/>
@@ -5251,7 +5253,7 @@
       </p:sp>
       <p:sp>
         <p:nvSpPr>
-          <p:cNvPr id="9" name="Shape 6"/>
+          <p:cNvPr id="7" name="Shape 4"/>
           <p:cNvSpPr/>
           <p:nvPr/>
         </p:nvSpPr>
@@ -5266,7 +5268,7 @@
           <a:noFill/>
           <a:ln w="9525">
             <a:solidFill>
-              <a:srgbClr val="5C708A">
+              <a:srgbClr val="A89A86">
                 <a:alpha val="60000"/>
               </a:srgbClr>
             </a:solidFill>
@@ -5276,7 +5278,7 @@
       </p:sp>
       <p:sp>
         <p:nvSpPr>
-          <p:cNvPr id="10" name="Text 7"/>
+          <p:cNvPr id="8" name="Text 5"/>
           <p:cNvSpPr/>
           <p:nvPr/>
         </p:nvSpPr>
@@ -5301,7 +5303,7 @@
             <a:r>
               <a:rPr lang="en-US" sz="900" dirty="0">
                 <a:solidFill>
-                  <a:srgbClr val="5C708A"/>
+                  <a:srgbClr val="A89A86"/>
                 </a:solidFill>
                 <a:latin typeface="Calibri" pitchFamily="34" charset="0"/>
                 <a:ea typeface="Calibri" pitchFamily="34" charset="-122"/>
@@ -5315,7 +5317,7 @@
       </p:sp>
       <p:sp>
         <p:nvSpPr>
-          <p:cNvPr id="11" name="Text 8"/>
+          <p:cNvPr id="9" name="Text 6"/>
           <p:cNvSpPr/>
           <p:nvPr/>
         </p:nvSpPr>
@@ -5340,7 +5342,7 @@
             <a:r>
               <a:rPr lang="en-US" sz="900" dirty="0">
                 <a:solidFill>
-                  <a:srgbClr val="5C708A"/>
+                  <a:srgbClr val="A89A86"/>
                 </a:solidFill>
                 <a:latin typeface="Calibri" pitchFamily="34" charset="0"/>
                 <a:ea typeface="Calibri" pitchFamily="34" charset="-122"/>
@@ -5366,7 +5368,7 @@
     <p:bg>
       <p:bgPr>
         <a:solidFill>
-          <a:srgbClr val="0B1D33"/>
+          <a:srgbClr val="F8F6F3"/>
         </a:solidFill>
       </p:bgPr>
     </p:bg>
@@ -5411,7 +5413,7 @@
             <a:r>
               <a:rPr lang="en-US" sz="1200" b="1" spc="300" kern="0" dirty="0">
                 <a:solidFill>
-                  <a:srgbClr val="4A9EFF"/>
+                  <a:srgbClr val="9A7B66"/>
                 </a:solidFill>
                 <a:latin typeface="Calibri" pitchFamily="34" charset="0"/>
                 <a:ea typeface="Calibri" pitchFamily="34" charset="-122"/>
@@ -5453,11 +5455,11 @@
             <a:r>
               <a:rPr lang="en-US" sz="3200" b="1" dirty="0">
                 <a:solidFill>
-                  <a:srgbClr val="EAF1FA"/>
-                </a:solidFill>
-                <a:latin typeface="Bookman Old Style" pitchFamily="34" charset="0"/>
-                <a:ea typeface="Bookman Old Style" pitchFamily="34" charset="-122"/>
-                <a:cs typeface="Bookman Old Style" pitchFamily="34" charset="-120"/>
+                  <a:srgbClr val="33302B"/>
+                </a:solidFill>
+                <a:latin typeface="Georgia" pitchFamily="34" charset="0"/>
+                <a:ea typeface="Georgia" pitchFamily="34" charset="-122"/>
+                <a:cs typeface="Georgia" pitchFamily="34" charset="-120"/>
               </a:rPr>
               <a:t>Transformar o cliente em fã</a:t>
             </a:r>
@@ -5482,13 +5484,18 @@
             </a:avLst>
           </a:prstGeom>
           <a:solidFill>
-            <a:srgbClr val="13283F"/>
+            <a:srgbClr val="FFFFFF"/>
           </a:solidFill>
-          <a:ln/>
+          <a:ln w="12700">
+            <a:solidFill>
+              <a:srgbClr val="E3D9CC"/>
+            </a:solidFill>
+            <a:prstDash val="solid"/>
+          </a:ln>
           <a:effectLst>
-            <a:outerShdw sx="100000" sy="100000" kx="0" ky="0" algn="bl" rotWithShape="0" blurRad="127000" dist="38100" dir="5400000">
-              <a:srgbClr val="000000">
-                <a:alpha val="28000"/>
+            <a:outerShdw sx="100000" sy="100000" kx="0" ky="0" algn="bl" rotWithShape="0" blurRad="114300" dist="38100" dir="5400000">
+              <a:srgbClr val="7A6A55">
+                <a:alpha val="12000"/>
               </a:srgbClr>
             </a:outerShdw>
           </a:effectLst>
@@ -5509,9 +5516,14 @@
             <a:avLst/>
           </a:prstGeom>
           <a:solidFill>
-            <a:srgbClr val="16314F"/>
+            <a:srgbClr val="EADFD0"/>
           </a:solidFill>
-          <a:ln/>
+          <a:ln w="9525">
+            <a:solidFill>
+              <a:srgbClr val="E3D9CC"/>
+            </a:solidFill>
+            <a:prstDash val="solid"/>
+          </a:ln>
         </p:spPr>
       </p:sp>
       <p:pic>
@@ -5565,11 +5577,11 @@
             <a:r>
               <a:rPr lang="en-US" sz="1900" b="1" dirty="0">
                 <a:solidFill>
-                  <a:srgbClr val="C9A961"/>
-                </a:solidFill>
-                <a:latin typeface="Bookman Old Style" pitchFamily="34" charset="0"/>
-                <a:ea typeface="Bookman Old Style" pitchFamily="34" charset="-122"/>
-                <a:cs typeface="Bookman Old Style" pitchFamily="34" charset="-120"/>
+                  <a:srgbClr val="B1937E"/>
+                </a:solidFill>
+                <a:latin typeface="Georgia" pitchFamily="34" charset="0"/>
+                <a:ea typeface="Georgia" pitchFamily="34" charset="-122"/>
+                <a:cs typeface="Georgia" pitchFamily="34" charset="-120"/>
               </a:rPr>
               <a:t>De cliente a fã</a:t>
             </a:r>
@@ -5604,7 +5616,7 @@
             <a:r>
               <a:rPr lang="en-US" sz="1400" dirty="0">
                 <a:solidFill>
-                  <a:srgbClr val="9FB2C9"/>
+                  <a:srgbClr val="8A7E72"/>
                 </a:solidFill>
                 <a:latin typeface="Calibri" pitchFamily="34" charset="0"/>
                 <a:ea typeface="Calibri" pitchFamily="34" charset="-122"/>
@@ -5633,13 +5645,18 @@
             </a:avLst>
           </a:prstGeom>
           <a:solidFill>
-            <a:srgbClr val="13283F"/>
+            <a:srgbClr val="FFFFFF"/>
           </a:solidFill>
-          <a:ln/>
+          <a:ln w="12700">
+            <a:solidFill>
+              <a:srgbClr val="E3D9CC"/>
+            </a:solidFill>
+            <a:prstDash val="solid"/>
+          </a:ln>
           <a:effectLst>
-            <a:outerShdw sx="100000" sy="100000" kx="0" ky="0" algn="bl" rotWithShape="0" blurRad="127000" dist="38100" dir="5400000">
-              <a:srgbClr val="000000">
-                <a:alpha val="28000"/>
+            <a:outerShdw sx="100000" sy="100000" kx="0" ky="0" algn="bl" rotWithShape="0" blurRad="114300" dist="38100" dir="5400000">
+              <a:srgbClr val="7A6A55">
+                <a:alpha val="12000"/>
               </a:srgbClr>
             </a:outerShdw>
           </a:effectLst>
@@ -5660,9 +5677,14 @@
             <a:avLst/>
           </a:prstGeom>
           <a:solidFill>
-            <a:srgbClr val="16314F"/>
+            <a:srgbClr val="EADFD0"/>
           </a:solidFill>
-          <a:ln/>
+          <a:ln w="9525">
+            <a:solidFill>
+              <a:srgbClr val="E3D9CC"/>
+            </a:solidFill>
+            <a:prstDash val="solid"/>
+          </a:ln>
         </p:spPr>
       </p:sp>
       <p:pic>
@@ -5716,11 +5738,11 @@
             <a:r>
               <a:rPr lang="en-US" sz="1900" b="1" dirty="0">
                 <a:solidFill>
-                  <a:srgbClr val="C9A961"/>
-                </a:solidFill>
-                <a:latin typeface="Bookman Old Style" pitchFamily="34" charset="0"/>
-                <a:ea typeface="Bookman Old Style" pitchFamily="34" charset="-122"/>
-                <a:cs typeface="Bookman Old Style" pitchFamily="34" charset="-120"/>
+                  <a:srgbClr val="B1937E"/>
+                </a:solidFill>
+                <a:latin typeface="Georgia" pitchFamily="34" charset="0"/>
+                <a:ea typeface="Georgia" pitchFamily="34" charset="-122"/>
+                <a:cs typeface="Georgia" pitchFamily="34" charset="-120"/>
               </a:rPr>
               <a:t>De fã a embaixador</a:t>
             </a:r>
@@ -5755,7 +5777,7 @@
             <a:r>
               <a:rPr lang="en-US" sz="1400" dirty="0">
                 <a:solidFill>
-                  <a:srgbClr val="9FB2C9"/>
+                  <a:srgbClr val="8A7E72"/>
                 </a:solidFill>
                 <a:latin typeface="Calibri" pitchFamily="34" charset="0"/>
                 <a:ea typeface="Calibri" pitchFamily="34" charset="-122"/>
@@ -5784,13 +5806,18 @@
             </a:avLst>
           </a:prstGeom>
           <a:solidFill>
-            <a:srgbClr val="13283F"/>
+            <a:srgbClr val="FFFFFF"/>
           </a:solidFill>
-          <a:ln/>
+          <a:ln w="12700">
+            <a:solidFill>
+              <a:srgbClr val="E3D9CC"/>
+            </a:solidFill>
+            <a:prstDash val="solid"/>
+          </a:ln>
           <a:effectLst>
-            <a:outerShdw sx="100000" sy="100000" kx="0" ky="0" algn="bl" rotWithShape="0" blurRad="127000" dist="38100" dir="5400000">
-              <a:srgbClr val="000000">
-                <a:alpha val="28000"/>
+            <a:outerShdw sx="100000" sy="100000" kx="0" ky="0" algn="bl" rotWithShape="0" blurRad="114300" dist="38100" dir="5400000">
+              <a:srgbClr val="7A6A55">
+                <a:alpha val="12000"/>
               </a:srgbClr>
             </a:outerShdw>
           </a:effectLst>
@@ -5811,9 +5838,14 @@
             <a:avLst/>
           </a:prstGeom>
           <a:solidFill>
-            <a:srgbClr val="16314F"/>
+            <a:srgbClr val="EADFD0"/>
           </a:solidFill>
-          <a:ln/>
+          <a:ln w="9525">
+            <a:solidFill>
+              <a:srgbClr val="E3D9CC"/>
+            </a:solidFill>
+            <a:prstDash val="solid"/>
+          </a:ln>
         </p:spPr>
       </p:sp>
       <p:pic>
@@ -5867,11 +5899,11 @@
             <a:r>
               <a:rPr lang="en-US" sz="1900" b="1" dirty="0">
                 <a:solidFill>
-                  <a:srgbClr val="C9A961"/>
-                </a:solidFill>
-                <a:latin typeface="Bookman Old Style" pitchFamily="34" charset="0"/>
-                <a:ea typeface="Bookman Old Style" pitchFamily="34" charset="-122"/>
-                <a:cs typeface="Bookman Old Style" pitchFamily="34" charset="-120"/>
+                  <a:srgbClr val="B1937E"/>
+                </a:solidFill>
+                <a:latin typeface="Georgia" pitchFamily="34" charset="0"/>
+                <a:ea typeface="Georgia" pitchFamily="34" charset="-122"/>
+                <a:cs typeface="Georgia" pitchFamily="34" charset="-120"/>
               </a:rPr>
               <a:t>De embaixador a recorrente</a:t>
             </a:r>
@@ -5906,7 +5938,7 @@
             <a:r>
               <a:rPr lang="en-US" sz="1400" dirty="0">
                 <a:solidFill>
-                  <a:srgbClr val="9FB2C9"/>
+                  <a:srgbClr val="8A7E72"/>
                 </a:solidFill>
                 <a:latin typeface="Calibri" pitchFamily="34" charset="0"/>
                 <a:ea typeface="Calibri" pitchFamily="34" charset="-122"/>
@@ -5935,7 +5967,7 @@
           <a:noFill/>
           <a:ln w="9525">
             <a:solidFill>
-              <a:srgbClr val="5C708A">
+              <a:srgbClr val="A89A86">
                 <a:alpha val="60000"/>
               </a:srgbClr>
             </a:solidFill>
@@ -5970,7 +6002,7 @@
             <a:r>
               <a:rPr lang="en-US" sz="900" dirty="0">
                 <a:solidFill>
-                  <a:srgbClr val="5C708A"/>
+                  <a:srgbClr val="A89A86"/>
                 </a:solidFill>
                 <a:latin typeface="Calibri" pitchFamily="34" charset="0"/>
                 <a:ea typeface="Calibri" pitchFamily="34" charset="-122"/>
@@ -6009,7 +6041,7 @@
             <a:r>
               <a:rPr lang="en-US" sz="900" dirty="0">
                 <a:solidFill>
-                  <a:srgbClr val="5C708A"/>
+                  <a:srgbClr val="A89A86"/>
                 </a:solidFill>
                 <a:latin typeface="Calibri" pitchFamily="34" charset="0"/>
                 <a:ea typeface="Calibri" pitchFamily="34" charset="-122"/>
@@ -6035,7 +6067,7 @@
     <p:bg>
       <p:bgPr>
         <a:solidFill>
-          <a:srgbClr val="0B1D33"/>
+          <a:srgbClr val="F8F6F3"/>
         </a:solidFill>
       </p:bgPr>
     </p:bg>
@@ -6080,7 +6112,7 @@
             <a:r>
               <a:rPr lang="en-US" sz="1200" b="1" spc="300" kern="0" dirty="0">
                 <a:solidFill>
-                  <a:srgbClr val="4A9EFF"/>
+                  <a:srgbClr val="9A7B66"/>
                 </a:solidFill>
                 <a:latin typeface="Calibri" pitchFamily="34" charset="0"/>
                 <a:ea typeface="Calibri" pitchFamily="34" charset="-122"/>
@@ -6122,11 +6154,11 @@
             <a:r>
               <a:rPr lang="en-US" sz="3200" b="1" dirty="0">
                 <a:solidFill>
-                  <a:srgbClr val="EAF1FA"/>
-                </a:solidFill>
-                <a:latin typeface="Bookman Old Style" pitchFamily="34" charset="0"/>
-                <a:ea typeface="Bookman Old Style" pitchFamily="34" charset="-122"/>
-                <a:cs typeface="Bookman Old Style" pitchFamily="34" charset="-120"/>
+                  <a:srgbClr val="33302B"/>
+                </a:solidFill>
+                <a:latin typeface="Georgia" pitchFamily="34" charset="0"/>
+                <a:ea typeface="Georgia" pitchFamily="34" charset="-122"/>
+                <a:cs typeface="Georgia" pitchFamily="34" charset="-120"/>
               </a:rPr>
               <a:t>O fã vale muito mais que a venda</a:t>
             </a:r>
@@ -6151,13 +6183,18 @@
             </a:avLst>
           </a:prstGeom>
           <a:solidFill>
-            <a:srgbClr val="13283F"/>
+            <a:srgbClr val="FFFFFF"/>
           </a:solidFill>
-          <a:ln/>
+          <a:ln w="12700">
+            <a:solidFill>
+              <a:srgbClr val="E3D9CC"/>
+            </a:solidFill>
+            <a:prstDash val="solid"/>
+          </a:ln>
           <a:effectLst>
-            <a:outerShdw sx="100000" sy="100000" kx="0" ky="0" algn="bl" rotWithShape="0" blurRad="127000" dist="38100" dir="5400000">
-              <a:srgbClr val="000000">
-                <a:alpha val="28000"/>
+            <a:outerShdw sx="100000" sy="100000" kx="0" ky="0" algn="bl" rotWithShape="0" blurRad="114300" dist="38100" dir="5400000">
+              <a:srgbClr val="7A6A55">
+                <a:alpha val="12000"/>
               </a:srgbClr>
             </a:outerShdw>
           </a:effectLst>
@@ -6190,11 +6227,11 @@
             <a:r>
               <a:rPr lang="en-US" sz="3400" b="1" dirty="0">
                 <a:solidFill>
-                  <a:srgbClr val="C9A961"/>
-                </a:solidFill>
-                <a:latin typeface="Bookman Old Style" pitchFamily="34" charset="0"/>
-                <a:ea typeface="Bookman Old Style" pitchFamily="34" charset="-122"/>
-                <a:cs typeface="Bookman Old Style" pitchFamily="34" charset="-120"/>
+                  <a:srgbClr val="B1937E"/>
+                </a:solidFill>
+                <a:latin typeface="Georgia" pitchFamily="34" charset="0"/>
+                <a:ea typeface="Georgia" pitchFamily="34" charset="-122"/>
+                <a:cs typeface="Georgia" pitchFamily="34" charset="-120"/>
               </a:rPr>
               <a:t>1→vários</a:t>
             </a:r>
@@ -6229,7 +6266,7 @@
             <a:r>
               <a:rPr lang="en-US" sz="1500" b="1" dirty="0">
                 <a:solidFill>
-                  <a:srgbClr val="EAF1FA"/>
+                  <a:srgbClr val="33302B"/>
                 </a:solidFill>
                 <a:latin typeface="Calibri" pitchFamily="34" charset="0"/>
                 <a:ea typeface="Calibri" pitchFamily="34" charset="-122"/>
@@ -6258,7 +6295,7 @@
           <a:noFill/>
           <a:ln w="9525">
             <a:solidFill>
-              <a:srgbClr val="5C708A">
+              <a:srgbClr val="A89A86">
                 <a:alpha val="60000"/>
               </a:srgbClr>
             </a:solidFill>
@@ -6293,7 +6330,7 @@
             <a:r>
               <a:rPr lang="en-US" sz="1300" dirty="0">
                 <a:solidFill>
-                  <a:srgbClr val="9FB2C9"/>
+                  <a:srgbClr val="8A7E72"/>
                 </a:solidFill>
                 <a:latin typeface="Calibri" pitchFamily="34" charset="0"/>
                 <a:ea typeface="Calibri" pitchFamily="34" charset="-122"/>
@@ -6322,13 +6359,18 @@
             </a:avLst>
           </a:prstGeom>
           <a:solidFill>
-            <a:srgbClr val="13283F"/>
+            <a:srgbClr val="FFFFFF"/>
           </a:solidFill>
-          <a:ln/>
+          <a:ln w="12700">
+            <a:solidFill>
+              <a:srgbClr val="E3D9CC"/>
+            </a:solidFill>
+            <a:prstDash val="solid"/>
+          </a:ln>
           <a:effectLst>
-            <a:outerShdw sx="100000" sy="100000" kx="0" ky="0" algn="bl" rotWithShape="0" blurRad="127000" dist="38100" dir="5400000">
-              <a:srgbClr val="000000">
-                <a:alpha val="28000"/>
+            <a:outerShdw sx="100000" sy="100000" kx="0" ky="0" algn="bl" rotWithShape="0" blurRad="114300" dist="38100" dir="5400000">
+              <a:srgbClr val="7A6A55">
+                <a:alpha val="12000"/>
               </a:srgbClr>
             </a:outerShdw>
           </a:effectLst>
@@ -6361,11 +6403,11 @@
             <a:r>
               <a:rPr lang="en-US" sz="4600" b="1" dirty="0">
                 <a:solidFill>
-                  <a:srgbClr val="4A9EFF"/>
-                </a:solidFill>
-                <a:latin typeface="Bookman Old Style" pitchFamily="34" charset="0"/>
-                <a:ea typeface="Bookman Old Style" pitchFamily="34" charset="-122"/>
-                <a:cs typeface="Bookman Old Style" pitchFamily="34" charset="-120"/>
+                  <a:srgbClr val="9A7B66"/>
+                </a:solidFill>
+                <a:latin typeface="Georgia" pitchFamily="34" charset="0"/>
+                <a:ea typeface="Georgia" pitchFamily="34" charset="-122"/>
+                <a:cs typeface="Georgia" pitchFamily="34" charset="-120"/>
               </a:rPr>
               <a:t>+ticket</a:t>
             </a:r>
@@ -6400,7 +6442,7 @@
             <a:r>
               <a:rPr lang="en-US" sz="1500" b="1" dirty="0">
                 <a:solidFill>
-                  <a:srgbClr val="EAF1FA"/>
+                  <a:srgbClr val="33302B"/>
                 </a:solidFill>
                 <a:latin typeface="Calibri" pitchFamily="34" charset="0"/>
                 <a:ea typeface="Calibri" pitchFamily="34" charset="-122"/>
@@ -6429,7 +6471,7 @@
           <a:noFill/>
           <a:ln w="9525">
             <a:solidFill>
-              <a:srgbClr val="5C708A">
+              <a:srgbClr val="A89A86">
                 <a:alpha val="60000"/>
               </a:srgbClr>
             </a:solidFill>
@@ -6464,7 +6506,7 @@
             <a:r>
               <a:rPr lang="en-US" sz="1300" dirty="0">
                 <a:solidFill>
-                  <a:srgbClr val="9FB2C9"/>
+                  <a:srgbClr val="8A7E72"/>
                 </a:solidFill>
                 <a:latin typeface="Calibri" pitchFamily="34" charset="0"/>
                 <a:ea typeface="Calibri" pitchFamily="34" charset="-122"/>
@@ -6493,13 +6535,18 @@
             </a:avLst>
           </a:prstGeom>
           <a:solidFill>
-            <a:srgbClr val="13283F"/>
+            <a:srgbClr val="FFFFFF"/>
           </a:solidFill>
-          <a:ln/>
+          <a:ln w="12700">
+            <a:solidFill>
+              <a:srgbClr val="E3D9CC"/>
+            </a:solidFill>
+            <a:prstDash val="solid"/>
+          </a:ln>
           <a:effectLst>
-            <a:outerShdw sx="100000" sy="100000" kx="0" ky="0" algn="bl" rotWithShape="0" blurRad="127000" dist="38100" dir="5400000">
-              <a:srgbClr val="000000">
-                <a:alpha val="28000"/>
+            <a:outerShdw sx="100000" sy="100000" kx="0" ky="0" algn="bl" rotWithShape="0" blurRad="114300" dist="38100" dir="5400000">
+              <a:srgbClr val="7A6A55">
+                <a:alpha val="12000"/>
               </a:srgbClr>
             </a:outerShdw>
           </a:effectLst>
@@ -6532,11 +6579,11 @@
             <a:r>
               <a:rPr lang="en-US" sz="4600" b="1" dirty="0">
                 <a:solidFill>
-                  <a:srgbClr val="4A9EFF"/>
-                </a:solidFill>
-                <a:latin typeface="Bookman Old Style" pitchFamily="34" charset="0"/>
-                <a:ea typeface="Bookman Old Style" pitchFamily="34" charset="-122"/>
-                <a:cs typeface="Bookman Old Style" pitchFamily="34" charset="-120"/>
+                  <a:srgbClr val="9A7B66"/>
+                </a:solidFill>
+                <a:latin typeface="Georgia" pitchFamily="34" charset="0"/>
+                <a:ea typeface="Georgia" pitchFamily="34" charset="-122"/>
+                <a:cs typeface="Georgia" pitchFamily="34" charset="-120"/>
               </a:rPr>
               <a:t>0€</a:t>
             </a:r>
@@ -6571,7 +6618,7 @@
             <a:r>
               <a:rPr lang="en-US" sz="1500" b="1" dirty="0">
                 <a:solidFill>
-                  <a:srgbClr val="EAF1FA"/>
+                  <a:srgbClr val="33302B"/>
                 </a:solidFill>
                 <a:latin typeface="Calibri" pitchFamily="34" charset="0"/>
                 <a:ea typeface="Calibri" pitchFamily="34" charset="-122"/>
@@ -6600,7 +6647,7 @@
           <a:noFill/>
           <a:ln w="9525">
             <a:solidFill>
-              <a:srgbClr val="5C708A">
+              <a:srgbClr val="A89A86">
                 <a:alpha val="60000"/>
               </a:srgbClr>
             </a:solidFill>
@@ -6635,7 +6682,7 @@
             <a:r>
               <a:rPr lang="en-US" sz="1300" dirty="0">
                 <a:solidFill>
-                  <a:srgbClr val="9FB2C9"/>
+                  <a:srgbClr val="8A7E72"/>
                 </a:solidFill>
                 <a:latin typeface="Calibri" pitchFamily="34" charset="0"/>
                 <a:ea typeface="Calibri" pitchFamily="34" charset="-122"/>
@@ -6664,7 +6711,7 @@
           <a:noFill/>
           <a:ln w="9525">
             <a:solidFill>
-              <a:srgbClr val="5C708A">
+              <a:srgbClr val="A89A86">
                 <a:alpha val="60000"/>
               </a:srgbClr>
             </a:solidFill>
@@ -6699,7 +6746,7 @@
             <a:r>
               <a:rPr lang="en-US" sz="900" dirty="0">
                 <a:solidFill>
-                  <a:srgbClr val="5C708A"/>
+                  <a:srgbClr val="A89A86"/>
                 </a:solidFill>
                 <a:latin typeface="Calibri" pitchFamily="34" charset="0"/>
                 <a:ea typeface="Calibri" pitchFamily="34" charset="-122"/>
@@ -6738,7 +6785,7 @@
             <a:r>
               <a:rPr lang="en-US" sz="900" dirty="0">
                 <a:solidFill>
-                  <a:srgbClr val="5C708A"/>
+                  <a:srgbClr val="A89A86"/>
                 </a:solidFill>
                 <a:latin typeface="Calibri" pitchFamily="34" charset="0"/>
                 <a:ea typeface="Calibri" pitchFamily="34" charset="-122"/>
@@ -6764,7 +6811,7 @@
     <p:bg>
       <p:bgPr>
         <a:solidFill>
-          <a:srgbClr val="0B1D33"/>
+          <a:srgbClr val="F8F6F3"/>
         </a:solidFill>
       </p:bgPr>
     </p:bg>
@@ -6809,7 +6856,7 @@
             <a:r>
               <a:rPr lang="en-US" sz="1200" b="1" spc="300" kern="0" dirty="0">
                 <a:solidFill>
-                  <a:srgbClr val="4A9EFF"/>
+                  <a:srgbClr val="9A7B66"/>
                 </a:solidFill>
                 <a:latin typeface="Calibri" pitchFamily="34" charset="0"/>
                 <a:ea typeface="Calibri" pitchFamily="34" charset="-122"/>
@@ -6851,11 +6898,11 @@
             <a:r>
               <a:rPr lang="en-US" sz="3200" b="1" dirty="0">
                 <a:solidFill>
-                  <a:srgbClr val="EAF1FA"/>
-                </a:solidFill>
-                <a:latin typeface="Bookman Old Style" pitchFamily="34" charset="0"/>
-                <a:ea typeface="Bookman Old Style" pitchFamily="34" charset="-122"/>
-                <a:cs typeface="Bookman Old Style" pitchFamily="34" charset="-120"/>
+                  <a:srgbClr val="33302B"/>
+                </a:solidFill>
+                <a:latin typeface="Georgia" pitchFamily="34" charset="0"/>
+                <a:ea typeface="Georgia" pitchFamily="34" charset="-122"/>
+                <a:cs typeface="Georgia" pitchFamily="34" charset="-120"/>
               </a:rPr>
               <a:t>Erros comuns na experiência</a:t>
             </a:r>
@@ -6880,13 +6927,18 @@
             </a:avLst>
           </a:prstGeom>
           <a:solidFill>
-            <a:srgbClr val="13283F"/>
+            <a:srgbClr val="FFFFFF"/>
           </a:solidFill>
-          <a:ln/>
+          <a:ln w="12700">
+            <a:solidFill>
+              <a:srgbClr val="E3D9CC"/>
+            </a:solidFill>
+            <a:prstDash val="solid"/>
+          </a:ln>
           <a:effectLst>
-            <a:outerShdw sx="100000" sy="100000" kx="0" ky="0" algn="bl" rotWithShape="0" blurRad="127000" dist="38100" dir="5400000">
-              <a:srgbClr val="000000">
-                <a:alpha val="28000"/>
+            <a:outerShdw sx="100000" sy="100000" kx="0" ky="0" algn="bl" rotWithShape="0" blurRad="114300" dist="38100" dir="5400000">
+              <a:srgbClr val="7A6A55">
+                <a:alpha val="12000"/>
               </a:srgbClr>
             </a:outerShdw>
           </a:effectLst>
@@ -6907,9 +6959,14 @@
             <a:avLst/>
           </a:prstGeom>
           <a:solidFill>
-            <a:srgbClr val="16314F"/>
+            <a:srgbClr val="EADFD0"/>
           </a:solidFill>
-          <a:ln/>
+          <a:ln w="9525">
+            <a:solidFill>
+              <a:srgbClr val="E3D9CC"/>
+            </a:solidFill>
+            <a:prstDash val="solid"/>
+          </a:ln>
         </p:spPr>
       </p:sp>
       <p:pic>
@@ -6963,11 +7020,11 @@
             <a:r>
               <a:rPr lang="en-US" sz="1800" b="1" dirty="0">
                 <a:solidFill>
-                  <a:srgbClr val="C9A961"/>
-                </a:solidFill>
-                <a:latin typeface="Bookman Old Style" pitchFamily="34" charset="0"/>
-                <a:ea typeface="Bookman Old Style" pitchFamily="34" charset="-122"/>
-                <a:cs typeface="Bookman Old Style" pitchFamily="34" charset="-120"/>
+                  <a:srgbClr val="B1937E"/>
+                </a:solidFill>
+                <a:latin typeface="Georgia" pitchFamily="34" charset="0"/>
+                <a:ea typeface="Georgia" pitchFamily="34" charset="-122"/>
+                <a:cs typeface="Georgia" pitchFamily="34" charset="-120"/>
               </a:rPr>
               <a:t>Desaparecer após o sinal</a:t>
             </a:r>
@@ -7002,7 +7059,7 @@
             <a:r>
               <a:rPr lang="en-US" sz="1350" dirty="0">
                 <a:solidFill>
-                  <a:srgbClr val="9FB2C9"/>
+                  <a:srgbClr val="8A7E72"/>
                 </a:solidFill>
                 <a:latin typeface="Calibri" pitchFamily="34" charset="0"/>
                 <a:ea typeface="Calibri" pitchFamily="34" charset="-122"/>
@@ -7031,13 +7088,18 @@
             </a:avLst>
           </a:prstGeom>
           <a:solidFill>
-            <a:srgbClr val="13283F"/>
+            <a:srgbClr val="FFFFFF"/>
           </a:solidFill>
-          <a:ln/>
+          <a:ln w="12700">
+            <a:solidFill>
+              <a:srgbClr val="E3D9CC"/>
+            </a:solidFill>
+            <a:prstDash val="solid"/>
+          </a:ln>
           <a:effectLst>
-            <a:outerShdw sx="100000" sy="100000" kx="0" ky="0" algn="bl" rotWithShape="0" blurRad="127000" dist="38100" dir="5400000">
-              <a:srgbClr val="000000">
-                <a:alpha val="28000"/>
+            <a:outerShdw sx="100000" sy="100000" kx="0" ky="0" algn="bl" rotWithShape="0" blurRad="114300" dist="38100" dir="5400000">
+              <a:srgbClr val="7A6A55">
+                <a:alpha val="12000"/>
               </a:srgbClr>
             </a:outerShdw>
           </a:effectLst>
@@ -7058,9 +7120,14 @@
             <a:avLst/>
           </a:prstGeom>
           <a:solidFill>
-            <a:srgbClr val="16314F"/>
+            <a:srgbClr val="EADFD0"/>
           </a:solidFill>
-          <a:ln/>
+          <a:ln w="9525">
+            <a:solidFill>
+              <a:srgbClr val="E3D9CC"/>
+            </a:solidFill>
+            <a:prstDash val="solid"/>
+          </a:ln>
         </p:spPr>
       </p:sp>
       <p:pic>
@@ -7114,11 +7181,11 @@
             <a:r>
               <a:rPr lang="en-US" sz="1800" b="1" dirty="0">
                 <a:solidFill>
-                  <a:srgbClr val="C9A961"/>
-                </a:solidFill>
-                <a:latin typeface="Bookman Old Style" pitchFamily="34" charset="0"/>
-                <a:ea typeface="Bookman Old Style" pitchFamily="34" charset="-122"/>
-                <a:cs typeface="Bookman Old Style" pitchFamily="34" charset="-120"/>
+                  <a:srgbClr val="B1937E"/>
+                </a:solidFill>
+                <a:latin typeface="Georgia" pitchFamily="34" charset="0"/>
+                <a:ea typeface="Georgia" pitchFamily="34" charset="-122"/>
+                <a:cs typeface="Georgia" pitchFamily="34" charset="-120"/>
               </a:rPr>
               <a:t>Comunicação dispersa</a:t>
             </a:r>
@@ -7153,7 +7220,7 @@
             <a:r>
               <a:rPr lang="en-US" sz="1350" dirty="0">
                 <a:solidFill>
-                  <a:srgbClr val="9FB2C9"/>
+                  <a:srgbClr val="8A7E72"/>
                 </a:solidFill>
                 <a:latin typeface="Calibri" pitchFamily="34" charset="0"/>
                 <a:ea typeface="Calibri" pitchFamily="34" charset="-122"/>
@@ -7182,13 +7249,18 @@
             </a:avLst>
           </a:prstGeom>
           <a:solidFill>
-            <a:srgbClr val="13283F"/>
+            <a:srgbClr val="FFFFFF"/>
           </a:solidFill>
-          <a:ln/>
+          <a:ln w="12700">
+            <a:solidFill>
+              <a:srgbClr val="E3D9CC"/>
+            </a:solidFill>
+            <a:prstDash val="solid"/>
+          </a:ln>
           <a:effectLst>
-            <a:outerShdw sx="100000" sy="100000" kx="0" ky="0" algn="bl" rotWithShape="0" blurRad="127000" dist="38100" dir="5400000">
-              <a:srgbClr val="000000">
-                <a:alpha val="28000"/>
+            <a:outerShdw sx="100000" sy="100000" kx="0" ky="0" algn="bl" rotWithShape="0" blurRad="114300" dist="38100" dir="5400000">
+              <a:srgbClr val="7A6A55">
+                <a:alpha val="12000"/>
               </a:srgbClr>
             </a:outerShdw>
           </a:effectLst>
@@ -7209,9 +7281,14 @@
             <a:avLst/>
           </a:prstGeom>
           <a:solidFill>
-            <a:srgbClr val="16314F"/>
+            <a:srgbClr val="EADFD0"/>
           </a:solidFill>
-          <a:ln/>
+          <a:ln w="9525">
+            <a:solidFill>
+              <a:srgbClr val="E3D9CC"/>
+            </a:solidFill>
+            <a:prstDash val="solid"/>
+          </a:ln>
         </p:spPr>
       </p:sp>
       <p:pic>
@@ -7265,11 +7342,11 @@
             <a:r>
               <a:rPr lang="en-US" sz="1800" b="1" dirty="0">
                 <a:solidFill>
-                  <a:srgbClr val="C9A961"/>
-                </a:solidFill>
-                <a:latin typeface="Bookman Old Style" pitchFamily="34" charset="0"/>
-                <a:ea typeface="Bookman Old Style" pitchFamily="34" charset="-122"/>
-                <a:cs typeface="Bookman Old Style" pitchFamily="34" charset="-120"/>
+                  <a:srgbClr val="B1937E"/>
+                </a:solidFill>
+                <a:latin typeface="Georgia" pitchFamily="34" charset="0"/>
+                <a:ea typeface="Georgia" pitchFamily="34" charset="-122"/>
+                <a:cs typeface="Georgia" pitchFamily="34" charset="-120"/>
               </a:rPr>
               <a:t>Não educar para os extras</a:t>
             </a:r>
@@ -7304,7 +7381,7 @@
             <a:r>
               <a:rPr lang="en-US" sz="1350" dirty="0">
                 <a:solidFill>
-                  <a:srgbClr val="9FB2C9"/>
+                  <a:srgbClr val="8A7E72"/>
                 </a:solidFill>
                 <a:latin typeface="Calibri" pitchFamily="34" charset="0"/>
                 <a:ea typeface="Calibri" pitchFamily="34" charset="-122"/>
@@ -7333,13 +7410,18 @@
             </a:avLst>
           </a:prstGeom>
           <a:solidFill>
-            <a:srgbClr val="13283F"/>
+            <a:srgbClr val="FFFFFF"/>
           </a:solidFill>
-          <a:ln/>
+          <a:ln w="12700">
+            <a:solidFill>
+              <a:srgbClr val="E3D9CC"/>
+            </a:solidFill>
+            <a:prstDash val="solid"/>
+          </a:ln>
           <a:effectLst>
-            <a:outerShdw sx="100000" sy="100000" kx="0" ky="0" algn="bl" rotWithShape="0" blurRad="127000" dist="38100" dir="5400000">
-              <a:srgbClr val="000000">
-                <a:alpha val="28000"/>
+            <a:outerShdw sx="100000" sy="100000" kx="0" ky="0" algn="bl" rotWithShape="0" blurRad="114300" dist="38100" dir="5400000">
+              <a:srgbClr val="7A6A55">
+                <a:alpha val="12000"/>
               </a:srgbClr>
             </a:outerShdw>
           </a:effectLst>
@@ -7360,9 +7442,14 @@
             <a:avLst/>
           </a:prstGeom>
           <a:solidFill>
-            <a:srgbClr val="16314F"/>
+            <a:srgbClr val="EADFD0"/>
           </a:solidFill>
-          <a:ln/>
+          <a:ln w="9525">
+            <a:solidFill>
+              <a:srgbClr val="E3D9CC"/>
+            </a:solidFill>
+            <a:prstDash val="solid"/>
+          </a:ln>
         </p:spPr>
       </p:sp>
       <p:pic>
@@ -7416,11 +7503,11 @@
             <a:r>
               <a:rPr lang="en-US" sz="1800" b="1" dirty="0">
                 <a:solidFill>
-                  <a:srgbClr val="C9A961"/>
-                </a:solidFill>
-                <a:latin typeface="Bookman Old Style" pitchFamily="34" charset="0"/>
-                <a:ea typeface="Bookman Old Style" pitchFamily="34" charset="-122"/>
-                <a:cs typeface="Bookman Old Style" pitchFamily="34" charset="-120"/>
+                  <a:srgbClr val="B1937E"/>
+                </a:solidFill>
+                <a:latin typeface="Georgia" pitchFamily="34" charset="0"/>
+                <a:ea typeface="Georgia" pitchFamily="34" charset="-122"/>
+                <a:cs typeface="Georgia" pitchFamily="34" charset="-120"/>
               </a:rPr>
               <a:t>Deixar tudo ao acaso</a:t>
             </a:r>
@@ -7455,7 +7542,7 @@
             <a:r>
               <a:rPr lang="en-US" sz="1350" dirty="0">
                 <a:solidFill>
-                  <a:srgbClr val="9FB2C9"/>
+                  <a:srgbClr val="8A7E72"/>
                 </a:solidFill>
                 <a:latin typeface="Calibri" pitchFamily="34" charset="0"/>
                 <a:ea typeface="Calibri" pitchFamily="34" charset="-122"/>
@@ -7484,7 +7571,7 @@
           <a:noFill/>
           <a:ln w="9525">
             <a:solidFill>
-              <a:srgbClr val="5C708A">
+              <a:srgbClr val="A89A86">
                 <a:alpha val="60000"/>
               </a:srgbClr>
             </a:solidFill>
@@ -7519,7 +7606,7 @@
             <a:r>
               <a:rPr lang="en-US" sz="900" dirty="0">
                 <a:solidFill>
-                  <a:srgbClr val="5C708A"/>
+                  <a:srgbClr val="A89A86"/>
                 </a:solidFill>
                 <a:latin typeface="Calibri" pitchFamily="34" charset="0"/>
                 <a:ea typeface="Calibri" pitchFamily="34" charset="-122"/>
@@ -7558,7 +7645,7 @@
             <a:r>
               <a:rPr lang="en-US" sz="900" dirty="0">
                 <a:solidFill>
-                  <a:srgbClr val="5C708A"/>
+                  <a:srgbClr val="A89A86"/>
                 </a:solidFill>
                 <a:latin typeface="Calibri" pitchFamily="34" charset="0"/>
                 <a:ea typeface="Calibri" pitchFamily="34" charset="-122"/>
@@ -7584,7 +7671,7 @@
     <p:bg>
       <p:bgPr>
         <a:solidFill>
-          <a:srgbClr val="0B1D33"/>
+          <a:srgbClr val="F8F6F3"/>
         </a:solidFill>
       </p:bgPr>
     </p:bg>
@@ -7604,51 +7691,7 @@
       </p:grpSpPr>
       <p:sp>
         <p:nvSpPr>
-          <p:cNvPr id="2" name="Shape 0"/>
-          <p:cNvSpPr/>
-          <p:nvPr/>
-        </p:nvSpPr>
-        <p:spPr>
-          <a:xfrm>
-            <a:off x="7772400" y="-1371600"/>
-            <a:ext cx="5486400" cy="5486400"/>
-          </a:xfrm>
-          <a:prstGeom prst="ellipse">
-            <a:avLst/>
-          </a:prstGeom>
-          <a:solidFill>
-            <a:srgbClr val="4A9EFF">
-              <a:alpha val="10000"/>
-            </a:srgbClr>
-          </a:solidFill>
-          <a:ln/>
-        </p:spPr>
-      </p:sp>
-      <p:sp>
-        <p:nvSpPr>
-          <p:cNvPr id="3" name="Shape 1"/>
-          <p:cNvSpPr/>
-          <p:nvPr/>
-        </p:nvSpPr>
-        <p:spPr>
-          <a:xfrm>
-            <a:off x="-1371600" y="4114800"/>
-            <a:ext cx="4572000" cy="4572000"/>
-          </a:xfrm>
-          <a:prstGeom prst="ellipse">
-            <a:avLst/>
-          </a:prstGeom>
-          <a:solidFill>
-            <a:srgbClr val="C9A961">
-              <a:alpha val="8000"/>
-            </a:srgbClr>
-          </a:solidFill>
-          <a:ln/>
-        </p:spPr>
-      </p:sp>
-      <p:sp>
-        <p:nvSpPr>
-          <p:cNvPr id="4" name="Text 2"/>
+          <p:cNvPr id="2" name="Text 0"/>
           <p:cNvSpPr/>
           <p:nvPr/>
         </p:nvSpPr>
@@ -7673,11 +7716,11 @@
             <a:r>
               <a:rPr lang="en-US" sz="15000" b="1" dirty="0">
                 <a:solidFill>
-                  <a:srgbClr val="16314F"/>
-                </a:solidFill>
-                <a:latin typeface="Bookman Old Style" pitchFamily="34" charset="0"/>
-                <a:ea typeface="Bookman Old Style" pitchFamily="34" charset="-122"/>
-                <a:cs typeface="Bookman Old Style" pitchFamily="34" charset="-120"/>
+                  <a:srgbClr val="EADFD0"/>
+                </a:solidFill>
+                <a:latin typeface="Georgia" pitchFamily="34" charset="0"/>
+                <a:ea typeface="Georgia" pitchFamily="34" charset="-122"/>
+                <a:cs typeface="Georgia" pitchFamily="34" charset="-120"/>
               </a:rPr>
               <a:t>C</a:t>
             </a:r>
@@ -7687,7 +7730,7 @@
       </p:sp>
       <p:sp>
         <p:nvSpPr>
-          <p:cNvPr id="5" name="Text 3"/>
+          <p:cNvPr id="3" name="Text 1"/>
           <p:cNvSpPr/>
           <p:nvPr/>
         </p:nvSpPr>
@@ -7712,7 +7755,7 @@
             <a:r>
               <a:rPr lang="en-US" sz="1300" b="1" spc="400" kern="0" dirty="0">
                 <a:solidFill>
-                  <a:srgbClr val="C9A961"/>
+                  <a:srgbClr val="B1937E"/>
                 </a:solidFill>
                 <a:latin typeface="Calibri" pitchFamily="34" charset="0"/>
                 <a:ea typeface="Calibri" pitchFamily="34" charset="-122"/>
@@ -7726,7 +7769,7 @@
       </p:sp>
       <p:sp>
         <p:nvSpPr>
-          <p:cNvPr id="6" name="Text 4"/>
+          <p:cNvPr id="4" name="Text 2"/>
           <p:cNvSpPr/>
           <p:nvPr/>
         </p:nvSpPr>
@@ -7752,23 +7795,23 @@
               <a:buNone/>
             </a:pPr>
             <a:r>
-              <a:rPr lang="en-US" sz="4400" b="1" dirty="0">
-                <a:solidFill>
-                  <a:srgbClr val="EAF1FA"/>
-                </a:solidFill>
-                <a:latin typeface="Bookman Old Style" pitchFamily="34" charset="0"/>
-                <a:ea typeface="Bookman Old Style" pitchFamily="34" charset="-122"/>
-                <a:cs typeface="Bookman Old Style" pitchFamily="34" charset="-120"/>
+              <a:rPr lang="en-US" sz="4000" b="1" dirty="0">
+                <a:solidFill>
+                  <a:srgbClr val="33302B"/>
+                </a:solidFill>
+                <a:latin typeface="Georgia" pitchFamily="34" charset="0"/>
+                <a:ea typeface="Georgia" pitchFamily="34" charset="-122"/>
+                <a:cs typeface="Georgia" pitchFamily="34" charset="-120"/>
               </a:rPr>
               <a:t>O Trabalho desta Semana</a:t>
             </a:r>
-            <a:endParaRPr lang="en-US" sz="4400" dirty="0"/>
-          </a:p>
-        </p:txBody>
-      </p:sp>
-      <p:sp>
-        <p:nvSpPr>
-          <p:cNvPr id="7" name="Text 5"/>
+            <a:endParaRPr lang="en-US" sz="4000" dirty="0"/>
+          </a:p>
+        </p:txBody>
+      </p:sp>
+      <p:sp>
+        <p:nvSpPr>
+          <p:cNvPr id="5" name="Text 3"/>
           <p:cNvSpPr/>
           <p:nvPr/>
         </p:nvSpPr>
@@ -7793,7 +7836,7 @@
             <a:r>
               <a:rPr lang="en-US" sz="1600" dirty="0">
                 <a:solidFill>
-                  <a:srgbClr val="9FB2C9"/>
+                  <a:srgbClr val="8A7E72"/>
                 </a:solidFill>
                 <a:latin typeface="Calibri" pitchFamily="34" charset="0"/>
                 <a:ea typeface="Calibri" pitchFamily="34" charset="-122"/>
@@ -7807,7 +7850,7 @@
       </p:sp>
       <p:sp>
         <p:nvSpPr>
-          <p:cNvPr id="8" name="Shape 6"/>
+          <p:cNvPr id="6" name="Shape 4"/>
           <p:cNvSpPr/>
           <p:nvPr/>
         </p:nvSpPr>
@@ -7822,7 +7865,7 @@
           <a:noFill/>
           <a:ln w="9525">
             <a:solidFill>
-              <a:srgbClr val="5C708A">
+              <a:srgbClr val="A89A86">
                 <a:alpha val="60000"/>
               </a:srgbClr>
             </a:solidFill>
@@ -7832,7 +7875,7 @@
       </p:sp>
       <p:sp>
         <p:nvSpPr>
-          <p:cNvPr id="9" name="Text 7"/>
+          <p:cNvPr id="7" name="Text 5"/>
           <p:cNvSpPr/>
           <p:nvPr/>
         </p:nvSpPr>
@@ -7857,7 +7900,7 @@
             <a:r>
               <a:rPr lang="en-US" sz="900" dirty="0">
                 <a:solidFill>
-                  <a:srgbClr val="5C708A"/>
+                  <a:srgbClr val="A89A86"/>
                 </a:solidFill>
                 <a:latin typeface="Calibri" pitchFamily="34" charset="0"/>
                 <a:ea typeface="Calibri" pitchFamily="34" charset="-122"/>
@@ -7871,7 +7914,7 @@
       </p:sp>
       <p:sp>
         <p:nvSpPr>
-          <p:cNvPr id="10" name="Text 8"/>
+          <p:cNvPr id="8" name="Text 6"/>
           <p:cNvSpPr/>
           <p:nvPr/>
         </p:nvSpPr>
@@ -7896,7 +7939,7 @@
             <a:r>
               <a:rPr lang="en-US" sz="900" dirty="0">
                 <a:solidFill>
-                  <a:srgbClr val="5C708A"/>
+                  <a:srgbClr val="A89A86"/>
                 </a:solidFill>
                 <a:latin typeface="Calibri" pitchFamily="34" charset="0"/>
                 <a:ea typeface="Calibri" pitchFamily="34" charset="-122"/>
@@ -7922,7 +7965,7 @@
     <p:bg>
       <p:bgPr>
         <a:solidFill>
-          <a:srgbClr val="0B1D33"/>
+          <a:srgbClr val="F8F6F3"/>
         </a:solidFill>
       </p:bgPr>
     </p:bg>
@@ -7967,7 +8010,7 @@
             <a:r>
               <a:rPr lang="en-US" sz="1200" b="1" spc="300" kern="0" dirty="0">
                 <a:solidFill>
-                  <a:srgbClr val="4A9EFF"/>
+                  <a:srgbClr val="9A7B66"/>
                 </a:solidFill>
                 <a:latin typeface="Calibri" pitchFamily="34" charset="0"/>
                 <a:ea typeface="Calibri" pitchFamily="34" charset="-122"/>
@@ -8009,11 +8052,11 @@
             <a:r>
               <a:rPr lang="en-US" sz="3400" b="1" dirty="0">
                 <a:solidFill>
-                  <a:srgbClr val="EAF1FA"/>
-                </a:solidFill>
-                <a:latin typeface="Bookman Old Style" pitchFamily="34" charset="0"/>
-                <a:ea typeface="Bookman Old Style" pitchFamily="34" charset="-122"/>
-                <a:cs typeface="Bookman Old Style" pitchFamily="34" charset="-120"/>
+                  <a:srgbClr val="33302B"/>
+                </a:solidFill>
+                <a:latin typeface="Georgia" pitchFamily="34" charset="0"/>
+                <a:ea typeface="Georgia" pitchFamily="34" charset="-122"/>
+                <a:cs typeface="Georgia" pitchFamily="34" charset="-120"/>
               </a:rPr>
               <a:t>Três peças, uma experiência</a:t>
             </a:r>
@@ -8038,13 +8081,18 @@
             </a:avLst>
           </a:prstGeom>
           <a:solidFill>
-            <a:srgbClr val="13283F"/>
+            <a:srgbClr val="FFFFFF"/>
           </a:solidFill>
-          <a:ln/>
+          <a:ln w="12700">
+            <a:solidFill>
+              <a:srgbClr val="E3D9CC"/>
+            </a:solidFill>
+            <a:prstDash val="solid"/>
+          </a:ln>
           <a:effectLst>
-            <a:outerShdw sx="100000" sy="100000" kx="0" ky="0" algn="bl" rotWithShape="0" blurRad="127000" dist="38100" dir="5400000">
-              <a:srgbClr val="000000">
-                <a:alpha val="28000"/>
+            <a:outerShdw sx="100000" sy="100000" kx="0" ky="0" algn="bl" rotWithShape="0" blurRad="114300" dist="38100" dir="5400000">
+              <a:srgbClr val="7A6A55">
+                <a:alpha val="12000"/>
               </a:srgbClr>
             </a:outerShdw>
           </a:effectLst>
@@ -8077,11 +8125,11 @@
             <a:r>
               <a:rPr lang="en-US" sz="3600" b="1" dirty="0">
                 <a:solidFill>
-                  <a:srgbClr val="C9A961"/>
-                </a:solidFill>
-                <a:latin typeface="Bookman Old Style" pitchFamily="34" charset="0"/>
-                <a:ea typeface="Bookman Old Style" pitchFamily="34" charset="-122"/>
-                <a:cs typeface="Bookman Old Style" pitchFamily="34" charset="-120"/>
+                  <a:srgbClr val="B1937E"/>
+                </a:solidFill>
+                <a:latin typeface="Georgia" pitchFamily="34" charset="0"/>
+                <a:ea typeface="Georgia" pitchFamily="34" charset="-122"/>
+                <a:cs typeface="Georgia" pitchFamily="34" charset="-120"/>
               </a:rPr>
               <a:t>01</a:t>
             </a:r>
@@ -8104,9 +8152,14 @@
             <a:avLst/>
           </a:prstGeom>
           <a:solidFill>
-            <a:srgbClr val="16314F"/>
+            <a:srgbClr val="EADFD0"/>
           </a:solidFill>
-          <a:ln/>
+          <a:ln w="9525">
+            <a:solidFill>
+              <a:srgbClr val="E3D9CC"/>
+            </a:solidFill>
+            <a:prstDash val="solid"/>
+          </a:ln>
         </p:spPr>
       </p:sp>
       <p:pic>
@@ -8160,11 +8213,11 @@
             <a:r>
               <a:rPr lang="en-US" sz="1900" b="1" dirty="0">
                 <a:solidFill>
-                  <a:srgbClr val="EAF1FA"/>
-                </a:solidFill>
-                <a:latin typeface="Bookman Old Style" pitchFamily="34" charset="0"/>
-                <a:ea typeface="Bookman Old Style" pitchFamily="34" charset="-122"/>
-                <a:cs typeface="Bookman Old Style" pitchFamily="34" charset="-120"/>
+                  <a:srgbClr val="33302B"/>
+                </a:solidFill>
+                <a:latin typeface="Georgia" pitchFamily="34" charset="0"/>
+                <a:ea typeface="Georgia" pitchFamily="34" charset="-122"/>
+                <a:cs typeface="Georgia" pitchFamily="34" charset="-120"/>
               </a:rPr>
               <a:t>Mapeia a jornada</a:t>
             </a:r>
@@ -8199,7 +8252,7 @@
             <a:r>
               <a:rPr lang="en-US" sz="1300" dirty="0">
                 <a:solidFill>
-                  <a:srgbClr val="9FB2C9"/>
+                  <a:srgbClr val="8A7E72"/>
                 </a:solidFill>
                 <a:latin typeface="Calibri" pitchFamily="34" charset="0"/>
                 <a:ea typeface="Calibri" pitchFamily="34" charset="-122"/>
@@ -8228,13 +8281,18 @@
             </a:avLst>
           </a:prstGeom>
           <a:solidFill>
-            <a:srgbClr val="13283F"/>
+            <a:srgbClr val="FFFFFF"/>
           </a:solidFill>
-          <a:ln/>
+          <a:ln w="12700">
+            <a:solidFill>
+              <a:srgbClr val="E3D9CC"/>
+            </a:solidFill>
+            <a:prstDash val="solid"/>
+          </a:ln>
           <a:effectLst>
-            <a:outerShdw sx="100000" sy="100000" kx="0" ky="0" algn="bl" rotWithShape="0" blurRad="127000" dist="38100" dir="5400000">
-              <a:srgbClr val="000000">
-                <a:alpha val="28000"/>
+            <a:outerShdw sx="100000" sy="100000" kx="0" ky="0" algn="bl" rotWithShape="0" blurRad="114300" dist="38100" dir="5400000">
+              <a:srgbClr val="7A6A55">
+                <a:alpha val="12000"/>
               </a:srgbClr>
             </a:outerShdw>
           </a:effectLst>
@@ -8267,11 +8325,11 @@
             <a:r>
               <a:rPr lang="en-US" sz="3600" b="1" dirty="0">
                 <a:solidFill>
-                  <a:srgbClr val="C9A961"/>
-                </a:solidFill>
-                <a:latin typeface="Bookman Old Style" pitchFamily="34" charset="0"/>
-                <a:ea typeface="Bookman Old Style" pitchFamily="34" charset="-122"/>
-                <a:cs typeface="Bookman Old Style" pitchFamily="34" charset="-120"/>
+                  <a:srgbClr val="B1937E"/>
+                </a:solidFill>
+                <a:latin typeface="Georgia" pitchFamily="34" charset="0"/>
+                <a:ea typeface="Georgia" pitchFamily="34" charset="-122"/>
+                <a:cs typeface="Georgia" pitchFamily="34" charset="-120"/>
               </a:rPr>
               <a:t>02</a:t>
             </a:r>
@@ -8294,9 +8352,14 @@
             <a:avLst/>
           </a:prstGeom>
           <a:solidFill>
-            <a:srgbClr val="16314F"/>
+            <a:srgbClr val="EADFD0"/>
           </a:solidFill>
-          <a:ln/>
+          <a:ln w="9525">
+            <a:solidFill>
+              <a:srgbClr val="E3D9CC"/>
+            </a:solidFill>
+            <a:prstDash val="solid"/>
+          </a:ln>
         </p:spPr>
       </p:sp>
       <p:pic>
@@ -8350,11 +8413,11 @@
             <a:r>
               <a:rPr lang="en-US" sz="1900" b="1" dirty="0">
                 <a:solidFill>
-                  <a:srgbClr val="EAF1FA"/>
-                </a:solidFill>
-                <a:latin typeface="Bookman Old Style" pitchFamily="34" charset="0"/>
-                <a:ea typeface="Bookman Old Style" pitchFamily="34" charset="-122"/>
-                <a:cs typeface="Bookman Old Style" pitchFamily="34" charset="-120"/>
+                  <a:srgbClr val="33302B"/>
+                </a:solidFill>
+                <a:latin typeface="Georgia" pitchFamily="34" charset="0"/>
+                <a:ea typeface="Georgia" pitchFamily="34" charset="-122"/>
+                <a:cs typeface="Georgia" pitchFamily="34" charset="-120"/>
               </a:rPr>
               <a:t>Estrutura o teu portal</a:t>
             </a:r>
@@ -8389,7 +8452,7 @@
             <a:r>
               <a:rPr lang="en-US" sz="1300" dirty="0">
                 <a:solidFill>
-                  <a:srgbClr val="9FB2C9"/>
+                  <a:srgbClr val="8A7E72"/>
                 </a:solidFill>
                 <a:latin typeface="Calibri" pitchFamily="34" charset="0"/>
                 <a:ea typeface="Calibri" pitchFamily="34" charset="-122"/>
@@ -8418,13 +8481,18 @@
             </a:avLst>
           </a:prstGeom>
           <a:solidFill>
-            <a:srgbClr val="13283F"/>
+            <a:srgbClr val="FFFFFF"/>
           </a:solidFill>
-          <a:ln/>
+          <a:ln w="12700">
+            <a:solidFill>
+              <a:srgbClr val="E3D9CC"/>
+            </a:solidFill>
+            <a:prstDash val="solid"/>
+          </a:ln>
           <a:effectLst>
-            <a:outerShdw sx="100000" sy="100000" kx="0" ky="0" algn="bl" rotWithShape="0" blurRad="127000" dist="38100" dir="5400000">
-              <a:srgbClr val="000000">
-                <a:alpha val="28000"/>
+            <a:outerShdw sx="100000" sy="100000" kx="0" ky="0" algn="bl" rotWithShape="0" blurRad="114300" dist="38100" dir="5400000">
+              <a:srgbClr val="7A6A55">
+                <a:alpha val="12000"/>
               </a:srgbClr>
             </a:outerShdw>
           </a:effectLst>
@@ -8457,11 +8525,11 @@
             <a:r>
               <a:rPr lang="en-US" sz="3600" b="1" dirty="0">
                 <a:solidFill>
-                  <a:srgbClr val="C9A961"/>
-                </a:solidFill>
-                <a:latin typeface="Bookman Old Style" pitchFamily="34" charset="0"/>
-                <a:ea typeface="Bookman Old Style" pitchFamily="34" charset="-122"/>
-                <a:cs typeface="Bookman Old Style" pitchFamily="34" charset="-120"/>
+                  <a:srgbClr val="B1937E"/>
+                </a:solidFill>
+                <a:latin typeface="Georgia" pitchFamily="34" charset="0"/>
+                <a:ea typeface="Georgia" pitchFamily="34" charset="-122"/>
+                <a:cs typeface="Georgia" pitchFamily="34" charset="-120"/>
               </a:rPr>
               <a:t>03</a:t>
             </a:r>
@@ -8484,9 +8552,14 @@
             <a:avLst/>
           </a:prstGeom>
           <a:solidFill>
-            <a:srgbClr val="16314F"/>
+            <a:srgbClr val="EADFD0"/>
           </a:solidFill>
-          <a:ln/>
+          <a:ln w="9525">
+            <a:solidFill>
+              <a:srgbClr val="E3D9CC"/>
+            </a:solidFill>
+            <a:prstDash val="solid"/>
+          </a:ln>
         </p:spPr>
       </p:sp>
       <p:pic>
@@ -8540,11 +8613,11 @@
             <a:r>
               <a:rPr lang="en-US" sz="1900" b="1" dirty="0">
                 <a:solidFill>
-                  <a:srgbClr val="EAF1FA"/>
-                </a:solidFill>
-                <a:latin typeface="Bookman Old Style" pitchFamily="34" charset="0"/>
-                <a:ea typeface="Bookman Old Style" pitchFamily="34" charset="-122"/>
-                <a:cs typeface="Bookman Old Style" pitchFamily="34" charset="-120"/>
+                  <a:srgbClr val="33302B"/>
+                </a:solidFill>
+                <a:latin typeface="Georgia" pitchFamily="34" charset="0"/>
+                <a:ea typeface="Georgia" pitchFamily="34" charset="-122"/>
+                <a:cs typeface="Georgia" pitchFamily="34" charset="-120"/>
               </a:rPr>
               <a:t>Define 3 momentos uau</a:t>
             </a:r>
@@ -8579,7 +8652,7 @@
             <a:r>
               <a:rPr lang="en-US" sz="1300" dirty="0">
                 <a:solidFill>
-                  <a:srgbClr val="9FB2C9"/>
+                  <a:srgbClr val="8A7E72"/>
                 </a:solidFill>
                 <a:latin typeface="Calibri" pitchFamily="34" charset="0"/>
                 <a:ea typeface="Calibri" pitchFamily="34" charset="-122"/>
@@ -8608,7 +8681,7 @@
           <a:noFill/>
           <a:ln w="9525">
             <a:solidFill>
-              <a:srgbClr val="5C708A">
+              <a:srgbClr val="A89A86">
                 <a:alpha val="60000"/>
               </a:srgbClr>
             </a:solidFill>
@@ -8643,7 +8716,7 @@
             <a:r>
               <a:rPr lang="en-US" sz="900" dirty="0">
                 <a:solidFill>
-                  <a:srgbClr val="5C708A"/>
+                  <a:srgbClr val="A89A86"/>
                 </a:solidFill>
                 <a:latin typeface="Calibri" pitchFamily="34" charset="0"/>
                 <a:ea typeface="Calibri" pitchFamily="34" charset="-122"/>
@@ -8682,7 +8755,7 @@
             <a:r>
               <a:rPr lang="en-US" sz="900" dirty="0">
                 <a:solidFill>
-                  <a:srgbClr val="5C708A"/>
+                  <a:srgbClr val="A89A86"/>
                 </a:solidFill>
                 <a:latin typeface="Calibri" pitchFamily="34" charset="0"/>
                 <a:ea typeface="Calibri" pitchFamily="34" charset="-122"/>
@@ -8708,7 +8781,7 @@
     <p:bg>
       <p:bgPr>
         <a:solidFill>
-          <a:srgbClr val="102844"/>
+          <a:srgbClr val="EFE7DE"/>
         </a:solidFill>
       </p:bgPr>
     </p:bg>
@@ -8753,7 +8826,7 @@
             <a:r>
               <a:rPr lang="en-US" sz="1200" b="1" spc="300" kern="0" dirty="0">
                 <a:solidFill>
-                  <a:srgbClr val="C9A961"/>
+                  <a:srgbClr val="B1937E"/>
                 </a:solidFill>
                 <a:latin typeface="Calibri" pitchFamily="34" charset="0"/>
                 <a:ea typeface="Calibri" pitchFamily="34" charset="-122"/>
@@ -8795,11 +8868,11 @@
             <a:r>
               <a:rPr lang="en-US" sz="3200" b="1" dirty="0">
                 <a:solidFill>
-                  <a:srgbClr val="EAF1FA"/>
-                </a:solidFill>
-                <a:latin typeface="Bookman Old Style" pitchFamily="34" charset="0"/>
-                <a:ea typeface="Bookman Old Style" pitchFamily="34" charset="-122"/>
-                <a:cs typeface="Bookman Old Style" pitchFamily="34" charset="-120"/>
+                  <a:srgbClr val="33302B"/>
+                </a:solidFill>
+                <a:latin typeface="Georgia" pitchFamily="34" charset="0"/>
+                <a:ea typeface="Georgia" pitchFamily="34" charset="-122"/>
+                <a:cs typeface="Georgia" pitchFamily="34" charset="-120"/>
               </a:rPr>
               <a:t>O que trazes à próxima sessão</a:t>
             </a:r>
@@ -8824,18 +8897,18 @@
             </a:avLst>
           </a:prstGeom>
           <a:solidFill>
-            <a:srgbClr val="13283F"/>
+            <a:srgbClr val="FFFFFF"/>
           </a:solidFill>
           <a:ln w="19050">
             <a:solidFill>
-              <a:srgbClr val="C9A961"/>
+              <a:srgbClr val="B1937E"/>
             </a:solidFill>
             <a:prstDash val="solid"/>
           </a:ln>
           <a:effectLst>
-            <a:outerShdw sx="100000" sy="100000" kx="0" ky="0" algn="bl" rotWithShape="0" blurRad="127000" dist="38100" dir="5400000">
-              <a:srgbClr val="000000">
-                <a:alpha val="28000"/>
+            <a:outerShdw sx="100000" sy="100000" kx="0" ky="0" algn="bl" rotWithShape="0" blurRad="114300" dist="38100" dir="5400000">
+              <a:srgbClr val="7A6A55">
+                <a:alpha val="12000"/>
               </a:srgbClr>
             </a:outerShdw>
           </a:effectLst>
@@ -8868,11 +8941,11 @@
             <a:r>
               <a:rPr lang="en-US" sz="2300" b="1" dirty="0">
                 <a:solidFill>
-                  <a:srgbClr val="C9A961"/>
-                </a:solidFill>
-                <a:latin typeface="Bookman Old Style" pitchFamily="34" charset="0"/>
-                <a:ea typeface="Bookman Old Style" pitchFamily="34" charset="-122"/>
-                <a:cs typeface="Bookman Old Style" pitchFamily="34" charset="-120"/>
+                  <a:srgbClr val="B1937E"/>
+                </a:solidFill>
+                <a:latin typeface="Georgia" pitchFamily="34" charset="0"/>
+                <a:ea typeface="Georgia" pitchFamily="34" charset="-122"/>
+                <a:cs typeface="Georgia" pitchFamily="34" charset="-120"/>
               </a:rPr>
               <a:t>Experiência do Cliente Desenhada</a:t>
             </a:r>
@@ -8931,7 +9004,7 @@
             <a:r>
               <a:rPr lang="en-US" sz="1550" dirty="0">
                 <a:solidFill>
-                  <a:srgbClr val="EAF1FA"/>
+                  <a:srgbClr val="33302B"/>
                 </a:solidFill>
                 <a:latin typeface="Calibri" pitchFamily="34" charset="0"/>
                 <a:ea typeface="Calibri" pitchFamily="34" charset="-122"/>
@@ -8994,7 +9067,7 @@
             <a:r>
               <a:rPr lang="en-US" sz="1550" dirty="0">
                 <a:solidFill>
-                  <a:srgbClr val="EAF1FA"/>
+                  <a:srgbClr val="33302B"/>
                 </a:solidFill>
                 <a:latin typeface="Calibri" pitchFamily="34" charset="0"/>
                 <a:ea typeface="Calibri" pitchFamily="34" charset="-122"/>
@@ -9057,7 +9130,7 @@
             <a:r>
               <a:rPr lang="en-US" sz="1550" dirty="0">
                 <a:solidFill>
-                  <a:srgbClr val="EAF1FA"/>
+                  <a:srgbClr val="33302B"/>
                 </a:solidFill>
                 <a:latin typeface="Calibri" pitchFamily="34" charset="0"/>
                 <a:ea typeface="Calibri" pitchFamily="34" charset="-122"/>
@@ -9096,7 +9169,7 @@
             <a:r>
               <a:rPr lang="en-US" sz="1500" i="1" dirty="0">
                 <a:solidFill>
-                  <a:srgbClr val="9FB2C9"/>
+                  <a:srgbClr val="8A7E72"/>
                 </a:solidFill>
                 <a:latin typeface="Calibri" pitchFamily="34" charset="0"/>
                 <a:ea typeface="Calibri" pitchFamily="34" charset="-122"/>
@@ -9125,7 +9198,7 @@
           <a:noFill/>
           <a:ln w="9525">
             <a:solidFill>
-              <a:srgbClr val="5C708A">
+              <a:srgbClr val="A89A86">
                 <a:alpha val="60000"/>
               </a:srgbClr>
             </a:solidFill>
@@ -9160,7 +9233,7 @@
             <a:r>
               <a:rPr lang="en-US" sz="900" dirty="0">
                 <a:solidFill>
-                  <a:srgbClr val="5C708A"/>
+                  <a:srgbClr val="A89A86"/>
                 </a:solidFill>
                 <a:latin typeface="Calibri" pitchFamily="34" charset="0"/>
                 <a:ea typeface="Calibri" pitchFamily="34" charset="-122"/>
@@ -9199,7 +9272,7 @@
             <a:r>
               <a:rPr lang="en-US" sz="900" dirty="0">
                 <a:solidFill>
-                  <a:srgbClr val="5C708A"/>
+                  <a:srgbClr val="A89A86"/>
                 </a:solidFill>
                 <a:latin typeface="Calibri" pitchFamily="34" charset="0"/>
                 <a:ea typeface="Calibri" pitchFamily="34" charset="-122"/>
@@ -9225,7 +9298,7 @@
     <p:bg>
       <p:bgPr>
         <a:solidFill>
-          <a:srgbClr val="0B1D33"/>
+          <a:srgbClr val="F8F6F3"/>
         </a:solidFill>
       </p:bgPr>
     </p:bg>
@@ -9270,7 +9343,7 @@
             <a:r>
               <a:rPr lang="en-US" sz="1200" b="1" spc="300" kern="0" dirty="0">
                 <a:solidFill>
-                  <a:srgbClr val="4A9EFF"/>
+                  <a:srgbClr val="9A7B66"/>
                 </a:solidFill>
                 <a:latin typeface="Calibri" pitchFamily="34" charset="0"/>
                 <a:ea typeface="Calibri" pitchFamily="34" charset="-122"/>
@@ -9312,11 +9385,11 @@
             <a:r>
               <a:rPr lang="en-US" sz="3600" b="1" dirty="0">
                 <a:solidFill>
-                  <a:srgbClr val="EAF1FA"/>
-                </a:solidFill>
-                <a:latin typeface="Bookman Old Style" pitchFamily="34" charset="0"/>
-                <a:ea typeface="Bookman Old Style" pitchFamily="34" charset="-122"/>
-                <a:cs typeface="Bookman Old Style" pitchFamily="34" charset="-120"/>
+                  <a:srgbClr val="33302B"/>
+                </a:solidFill>
+                <a:latin typeface="Georgia" pitchFamily="34" charset="0"/>
+                <a:ea typeface="Georgia" pitchFamily="34" charset="-122"/>
+                <a:cs typeface="Georgia" pitchFamily="34" charset="-120"/>
               </a:rPr>
               <a:t>Do sim ao fã</a:t>
             </a:r>
@@ -9341,13 +9414,18 @@
             </a:avLst>
           </a:prstGeom>
           <a:solidFill>
-            <a:srgbClr val="13283F"/>
+            <a:srgbClr val="FFFFFF"/>
           </a:solidFill>
-          <a:ln/>
+          <a:ln w="12700">
+            <a:solidFill>
+              <a:srgbClr val="E3D9CC"/>
+            </a:solidFill>
+            <a:prstDash val="solid"/>
+          </a:ln>
           <a:effectLst>
-            <a:outerShdw sx="100000" sy="100000" kx="0" ky="0" algn="bl" rotWithShape="0" blurRad="127000" dist="38100" dir="5400000">
-              <a:srgbClr val="000000">
-                <a:alpha val="28000"/>
+            <a:outerShdw sx="100000" sy="100000" kx="0" ky="0" algn="bl" rotWithShape="0" blurRad="114300" dist="38100" dir="5400000">
+              <a:srgbClr val="7A6A55">
+                <a:alpha val="12000"/>
               </a:srgbClr>
             </a:outerShdw>
           </a:effectLst>
@@ -9368,9 +9446,14 @@
             <a:avLst/>
           </a:prstGeom>
           <a:solidFill>
-            <a:srgbClr val="16314F"/>
+            <a:srgbClr val="EADFD0"/>
           </a:solidFill>
-          <a:ln/>
+          <a:ln w="9525">
+            <a:solidFill>
+              <a:srgbClr val="E3D9CC"/>
+            </a:solidFill>
+            <a:prstDash val="solid"/>
+          </a:ln>
         </p:spPr>
       </p:sp>
       <p:pic>
@@ -9424,11 +9507,11 @@
             <a:r>
               <a:rPr lang="en-US" sz="2800" b="1" dirty="0">
                 <a:solidFill>
-                  <a:srgbClr val="C9A961"/>
-                </a:solidFill>
-                <a:latin typeface="Bookman Old Style" pitchFamily="34" charset="0"/>
-                <a:ea typeface="Bookman Old Style" pitchFamily="34" charset="-122"/>
-                <a:cs typeface="Bookman Old Style" pitchFamily="34" charset="-120"/>
+                  <a:srgbClr val="B1937E"/>
+                </a:solidFill>
+                <a:latin typeface="Georgia" pitchFamily="34" charset="0"/>
+                <a:ea typeface="Georgia" pitchFamily="34" charset="-122"/>
+                <a:cs typeface="Georgia" pitchFamily="34" charset="-120"/>
               </a:rPr>
               <a:t>01</a:t>
             </a:r>
@@ -9463,7 +9546,7 @@
             <a:r>
               <a:rPr lang="en-US" sz="1800" b="1" dirty="0">
                 <a:solidFill>
-                  <a:srgbClr val="EAF1FA"/>
+                  <a:srgbClr val="33302B"/>
                 </a:solidFill>
                 <a:latin typeface="Calibri" pitchFamily="34" charset="0"/>
                 <a:ea typeface="Calibri" pitchFamily="34" charset="-122"/>
@@ -9502,7 +9585,7 @@
             <a:r>
               <a:rPr lang="en-US" sz="1300" dirty="0">
                 <a:solidFill>
-                  <a:srgbClr val="9FB2C9"/>
+                  <a:srgbClr val="8A7E72"/>
                 </a:solidFill>
                 <a:latin typeface="Calibri" pitchFamily="34" charset="0"/>
                 <a:ea typeface="Calibri" pitchFamily="34" charset="-122"/>
@@ -9531,13 +9614,18 @@
             </a:avLst>
           </a:prstGeom>
           <a:solidFill>
-            <a:srgbClr val="13283F"/>
+            <a:srgbClr val="FFFFFF"/>
           </a:solidFill>
-          <a:ln/>
+          <a:ln w="12700">
+            <a:solidFill>
+              <a:srgbClr val="E3D9CC"/>
+            </a:solidFill>
+            <a:prstDash val="solid"/>
+          </a:ln>
           <a:effectLst>
-            <a:outerShdw sx="100000" sy="100000" kx="0" ky="0" algn="bl" rotWithShape="0" blurRad="127000" dist="38100" dir="5400000">
-              <a:srgbClr val="000000">
-                <a:alpha val="28000"/>
+            <a:outerShdw sx="100000" sy="100000" kx="0" ky="0" algn="bl" rotWithShape="0" blurRad="114300" dist="38100" dir="5400000">
+              <a:srgbClr val="7A6A55">
+                <a:alpha val="12000"/>
               </a:srgbClr>
             </a:outerShdw>
           </a:effectLst>
@@ -9558,9 +9646,14 @@
             <a:avLst/>
           </a:prstGeom>
           <a:solidFill>
-            <a:srgbClr val="16314F"/>
+            <a:srgbClr val="EADFD0"/>
           </a:solidFill>
-          <a:ln/>
+          <a:ln w="9525">
+            <a:solidFill>
+              <a:srgbClr val="E3D9CC"/>
+            </a:solidFill>
+            <a:prstDash val="solid"/>
+          </a:ln>
         </p:spPr>
       </p:sp>
       <p:pic>
@@ -9614,11 +9707,11 @@
             <a:r>
               <a:rPr lang="en-US" sz="2800" b="1" dirty="0">
                 <a:solidFill>
-                  <a:srgbClr val="C9A961"/>
-                </a:solidFill>
-                <a:latin typeface="Bookman Old Style" pitchFamily="34" charset="0"/>
-                <a:ea typeface="Bookman Old Style" pitchFamily="34" charset="-122"/>
-                <a:cs typeface="Bookman Old Style" pitchFamily="34" charset="-120"/>
+                  <a:srgbClr val="B1937E"/>
+                </a:solidFill>
+                <a:latin typeface="Georgia" pitchFamily="34" charset="0"/>
+                <a:ea typeface="Georgia" pitchFamily="34" charset="-122"/>
+                <a:cs typeface="Georgia" pitchFamily="34" charset="-120"/>
               </a:rPr>
               <a:t>02</a:t>
             </a:r>
@@ -9653,7 +9746,7 @@
             <a:r>
               <a:rPr lang="en-US" sz="1800" b="1" dirty="0">
                 <a:solidFill>
-                  <a:srgbClr val="EAF1FA"/>
+                  <a:srgbClr val="33302B"/>
                 </a:solidFill>
                 <a:latin typeface="Calibri" pitchFamily="34" charset="0"/>
                 <a:ea typeface="Calibri" pitchFamily="34" charset="-122"/>
@@ -9692,7 +9785,7 @@
             <a:r>
               <a:rPr lang="en-US" sz="1300" dirty="0">
                 <a:solidFill>
-                  <a:srgbClr val="9FB2C9"/>
+                  <a:srgbClr val="8A7E72"/>
                 </a:solidFill>
                 <a:latin typeface="Calibri" pitchFamily="34" charset="0"/>
                 <a:ea typeface="Calibri" pitchFamily="34" charset="-122"/>
@@ -9721,13 +9814,18 @@
             </a:avLst>
           </a:prstGeom>
           <a:solidFill>
-            <a:srgbClr val="13283F"/>
+            <a:srgbClr val="FFFFFF"/>
           </a:solidFill>
-          <a:ln/>
+          <a:ln w="12700">
+            <a:solidFill>
+              <a:srgbClr val="E3D9CC"/>
+            </a:solidFill>
+            <a:prstDash val="solid"/>
+          </a:ln>
           <a:effectLst>
-            <a:outerShdw sx="100000" sy="100000" kx="0" ky="0" algn="bl" rotWithShape="0" blurRad="127000" dist="38100" dir="5400000">
-              <a:srgbClr val="000000">
-                <a:alpha val="28000"/>
+            <a:outerShdw sx="100000" sy="100000" kx="0" ky="0" algn="bl" rotWithShape="0" blurRad="114300" dist="38100" dir="5400000">
+              <a:srgbClr val="7A6A55">
+                <a:alpha val="12000"/>
               </a:srgbClr>
             </a:outerShdw>
           </a:effectLst>
@@ -9748,9 +9846,14 @@
             <a:avLst/>
           </a:prstGeom>
           <a:solidFill>
-            <a:srgbClr val="16314F"/>
+            <a:srgbClr val="EADFD0"/>
           </a:solidFill>
-          <a:ln/>
+          <a:ln w="9525">
+            <a:solidFill>
+              <a:srgbClr val="E3D9CC"/>
+            </a:solidFill>
+            <a:prstDash val="solid"/>
+          </a:ln>
         </p:spPr>
       </p:sp>
       <p:pic>
@@ -9804,11 +9907,11 @@
             <a:r>
               <a:rPr lang="en-US" sz="2800" b="1" dirty="0">
                 <a:solidFill>
-                  <a:srgbClr val="C9A961"/>
-                </a:solidFill>
-                <a:latin typeface="Bookman Old Style" pitchFamily="34" charset="0"/>
-                <a:ea typeface="Bookman Old Style" pitchFamily="34" charset="-122"/>
-                <a:cs typeface="Bookman Old Style" pitchFamily="34" charset="-120"/>
+                  <a:srgbClr val="B1937E"/>
+                </a:solidFill>
+                <a:latin typeface="Georgia" pitchFamily="34" charset="0"/>
+                <a:ea typeface="Georgia" pitchFamily="34" charset="-122"/>
+                <a:cs typeface="Georgia" pitchFamily="34" charset="-120"/>
               </a:rPr>
               <a:t>03</a:t>
             </a:r>
@@ -9843,7 +9946,7 @@
             <a:r>
               <a:rPr lang="en-US" sz="1800" b="1" dirty="0">
                 <a:solidFill>
-                  <a:srgbClr val="EAF1FA"/>
+                  <a:srgbClr val="33302B"/>
                 </a:solidFill>
                 <a:latin typeface="Calibri" pitchFamily="34" charset="0"/>
                 <a:ea typeface="Calibri" pitchFamily="34" charset="-122"/>
@@ -9882,7 +9985,7 @@
             <a:r>
               <a:rPr lang="en-US" sz="1300" dirty="0">
                 <a:solidFill>
-                  <a:srgbClr val="9FB2C9"/>
+                  <a:srgbClr val="8A7E72"/>
                 </a:solidFill>
                 <a:latin typeface="Calibri" pitchFamily="34" charset="0"/>
                 <a:ea typeface="Calibri" pitchFamily="34" charset="-122"/>
@@ -9911,13 +10014,18 @@
             </a:avLst>
           </a:prstGeom>
           <a:solidFill>
-            <a:srgbClr val="13283F"/>
+            <a:srgbClr val="FFFFFF"/>
           </a:solidFill>
-          <a:ln/>
+          <a:ln w="12700">
+            <a:solidFill>
+              <a:srgbClr val="E3D9CC"/>
+            </a:solidFill>
+            <a:prstDash val="solid"/>
+          </a:ln>
           <a:effectLst>
-            <a:outerShdw sx="100000" sy="100000" kx="0" ky="0" algn="bl" rotWithShape="0" blurRad="127000" dist="38100" dir="5400000">
-              <a:srgbClr val="000000">
-                <a:alpha val="28000"/>
+            <a:outerShdw sx="100000" sy="100000" kx="0" ky="0" algn="bl" rotWithShape="0" blurRad="114300" dist="38100" dir="5400000">
+              <a:srgbClr val="7A6A55">
+                <a:alpha val="12000"/>
               </a:srgbClr>
             </a:outerShdw>
           </a:effectLst>
@@ -9938,9 +10046,14 @@
             <a:avLst/>
           </a:prstGeom>
           <a:solidFill>
-            <a:srgbClr val="16314F"/>
+            <a:srgbClr val="EADFD0"/>
           </a:solidFill>
-          <a:ln/>
+          <a:ln w="9525">
+            <a:solidFill>
+              <a:srgbClr val="E3D9CC"/>
+            </a:solidFill>
+            <a:prstDash val="solid"/>
+          </a:ln>
         </p:spPr>
       </p:sp>
       <p:pic>
@@ -9994,11 +10107,11 @@
             <a:r>
               <a:rPr lang="en-US" sz="2800" b="1" dirty="0">
                 <a:solidFill>
-                  <a:srgbClr val="C9A961"/>
-                </a:solidFill>
-                <a:latin typeface="Bookman Old Style" pitchFamily="34" charset="0"/>
-                <a:ea typeface="Bookman Old Style" pitchFamily="34" charset="-122"/>
-                <a:cs typeface="Bookman Old Style" pitchFamily="34" charset="-120"/>
+                  <a:srgbClr val="B1937E"/>
+                </a:solidFill>
+                <a:latin typeface="Georgia" pitchFamily="34" charset="0"/>
+                <a:ea typeface="Georgia" pitchFamily="34" charset="-122"/>
+                <a:cs typeface="Georgia" pitchFamily="34" charset="-120"/>
               </a:rPr>
               <a:t>04</a:t>
             </a:r>
@@ -10033,7 +10146,7 @@
             <a:r>
               <a:rPr lang="en-US" sz="1800" b="1" dirty="0">
                 <a:solidFill>
-                  <a:srgbClr val="EAF1FA"/>
+                  <a:srgbClr val="33302B"/>
                 </a:solidFill>
                 <a:latin typeface="Calibri" pitchFamily="34" charset="0"/>
                 <a:ea typeface="Calibri" pitchFamily="34" charset="-122"/>
@@ -10072,7 +10185,7 @@
             <a:r>
               <a:rPr lang="en-US" sz="1300" dirty="0">
                 <a:solidFill>
-                  <a:srgbClr val="9FB2C9"/>
+                  <a:srgbClr val="8A7E72"/>
                 </a:solidFill>
                 <a:latin typeface="Calibri" pitchFamily="34" charset="0"/>
                 <a:ea typeface="Calibri" pitchFamily="34" charset="-122"/>
@@ -10101,7 +10214,7 @@
           <a:noFill/>
           <a:ln w="9525">
             <a:solidFill>
-              <a:srgbClr val="5C708A">
+              <a:srgbClr val="A89A86">
                 <a:alpha val="60000"/>
               </a:srgbClr>
             </a:solidFill>
@@ -10136,7 +10249,7 @@
             <a:r>
               <a:rPr lang="en-US" sz="900" dirty="0">
                 <a:solidFill>
-                  <a:srgbClr val="5C708A"/>
+                  <a:srgbClr val="A89A86"/>
                 </a:solidFill>
                 <a:latin typeface="Calibri" pitchFamily="34" charset="0"/>
                 <a:ea typeface="Calibri" pitchFamily="34" charset="-122"/>
@@ -10175,7 +10288,7 @@
             <a:r>
               <a:rPr lang="en-US" sz="900" dirty="0">
                 <a:solidFill>
-                  <a:srgbClr val="5C708A"/>
+                  <a:srgbClr val="A89A86"/>
                 </a:solidFill>
                 <a:latin typeface="Calibri" pitchFamily="34" charset="0"/>
                 <a:ea typeface="Calibri" pitchFamily="34" charset="-122"/>
@@ -10201,7 +10314,7 @@
     <p:bg>
       <p:bgPr>
         <a:solidFill>
-          <a:srgbClr val="0B1D33"/>
+          <a:srgbClr val="F8F6F3"/>
         </a:solidFill>
       </p:bgPr>
     </p:bg>
@@ -10221,51 +10334,7 @@
       </p:grpSpPr>
       <p:sp>
         <p:nvSpPr>
-          <p:cNvPr id="2" name="Shape 0"/>
-          <p:cNvSpPr/>
-          <p:nvPr/>
-        </p:nvSpPr>
-        <p:spPr>
-          <a:xfrm>
-            <a:off x="8046720" y="-1645920"/>
-            <a:ext cx="5943600" cy="5943600"/>
-          </a:xfrm>
-          <a:prstGeom prst="ellipse">
-            <a:avLst/>
-          </a:prstGeom>
-          <a:solidFill>
-            <a:srgbClr val="4A9EFF">
-              <a:alpha val="14000"/>
-            </a:srgbClr>
-          </a:solidFill>
-          <a:ln/>
-        </p:spPr>
-      </p:sp>
-      <p:sp>
-        <p:nvSpPr>
-          <p:cNvPr id="3" name="Shape 1"/>
-          <p:cNvSpPr/>
-          <p:nvPr/>
-        </p:nvSpPr>
-        <p:spPr>
-          <a:xfrm>
-            <a:off x="-1828800" y="4389120"/>
-            <a:ext cx="5029200" cy="5029200"/>
-          </a:xfrm>
-          <a:prstGeom prst="ellipse">
-            <a:avLst/>
-          </a:prstGeom>
-          <a:solidFill>
-            <a:srgbClr val="C9A961">
-              <a:alpha val="10000"/>
-            </a:srgbClr>
-          </a:solidFill>
-          <a:ln/>
-        </p:spPr>
-      </p:sp>
-      <p:sp>
-        <p:nvSpPr>
-          <p:cNvPr id="4" name="Text 2"/>
+          <p:cNvPr id="2" name="Text 0"/>
           <p:cNvSpPr/>
           <p:nvPr/>
         </p:nvSpPr>
@@ -10290,7 +10359,7 @@
             <a:r>
               <a:rPr lang="en-US" sz="1400" b="1" spc="500" kern="0" dirty="0">
                 <a:solidFill>
-                  <a:srgbClr val="C9A961"/>
+                  <a:srgbClr val="B1937E"/>
                 </a:solidFill>
                 <a:latin typeface="Calibri" pitchFamily="34" charset="0"/>
                 <a:ea typeface="Calibri" pitchFamily="34" charset="-122"/>
@@ -10304,7 +10373,7 @@
       </p:sp>
       <p:sp>
         <p:nvSpPr>
-          <p:cNvPr id="5" name="Text 3"/>
+          <p:cNvPr id="3" name="Text 1"/>
           <p:cNvSpPr/>
           <p:nvPr/>
         </p:nvSpPr>
@@ -10330,17 +10399,17 @@
               <a:buNone/>
             </a:pPr>
             <a:r>
-              <a:rPr lang="en-US" sz="4200" b="1" dirty="0">
-                <a:solidFill>
-                  <a:srgbClr val="EAF1FA"/>
-                </a:solidFill>
-                <a:latin typeface="Bookman Old Style" pitchFamily="34" charset="0"/>
-                <a:ea typeface="Bookman Old Style" pitchFamily="34" charset="-122"/>
-                <a:cs typeface="Bookman Old Style" pitchFamily="34" charset="-120"/>
+              <a:rPr lang="en-US" sz="3800" b="1" dirty="0">
+                <a:solidFill>
+                  <a:srgbClr val="33302B"/>
+                </a:solidFill>
+                <a:latin typeface="Georgia" pitchFamily="34" charset="0"/>
+                <a:ea typeface="Georgia" pitchFamily="34" charset="-122"/>
+                <a:cs typeface="Georgia" pitchFamily="34" charset="-120"/>
               </a:rPr>
               <a:t>Sessão 07:</a:t>
             </a:r>
-            <a:endParaRPr lang="en-US" sz="4200" dirty="0"/>
+            <a:endParaRPr lang="en-US" sz="3800" dirty="0"/>
           </a:p>
           <a:p>
             <a:pPr indent="0" marL="0">
@@ -10350,23 +10419,23 @@
               <a:buNone/>
             </a:pPr>
             <a:r>
-              <a:rPr lang="en-US" sz="4200" b="1" dirty="0">
-                <a:solidFill>
-                  <a:srgbClr val="EAF1FA"/>
-                </a:solidFill>
-                <a:latin typeface="Bookman Old Style" pitchFamily="34" charset="0"/>
-                <a:ea typeface="Bookman Old Style" pitchFamily="34" charset="-122"/>
-                <a:cs typeface="Bookman Old Style" pitchFamily="34" charset="-120"/>
+              <a:rPr lang="en-US" sz="3800" b="1" dirty="0">
+                <a:solidFill>
+                  <a:srgbClr val="33302B"/>
+                </a:solidFill>
+                <a:latin typeface="Georgia" pitchFamily="34" charset="0"/>
+                <a:ea typeface="Georgia" pitchFamily="34" charset="-122"/>
+                <a:cs typeface="Georgia" pitchFamily="34" charset="-120"/>
               </a:rPr>
               <a:t>Produção e Entrega</a:t>
             </a:r>
-            <a:endParaRPr lang="en-US" sz="4200" dirty="0"/>
-          </a:p>
-        </p:txBody>
-      </p:sp>
-      <p:sp>
-        <p:nvSpPr>
-          <p:cNvPr id="6" name="Text 4"/>
+            <a:endParaRPr lang="en-US" sz="3800" dirty="0"/>
+          </a:p>
+        </p:txBody>
+      </p:sp>
+      <p:sp>
+        <p:nvSpPr>
+          <p:cNvPr id="4" name="Text 2"/>
           <p:cNvSpPr/>
           <p:nvPr/>
         </p:nvSpPr>
@@ -10391,7 +10460,7 @@
             <a:r>
               <a:rPr lang="en-US" sz="1700" dirty="0">
                 <a:solidFill>
-                  <a:srgbClr val="9FB2C9"/>
+                  <a:srgbClr val="8A7E72"/>
                 </a:solidFill>
                 <a:latin typeface="Calibri" pitchFamily="34" charset="0"/>
                 <a:ea typeface="Calibri" pitchFamily="34" charset="-122"/>
@@ -10405,7 +10474,7 @@
       </p:sp>
       <p:sp>
         <p:nvSpPr>
-          <p:cNvPr id="7" name="Shape 5"/>
+          <p:cNvPr id="5" name="Shape 3"/>
           <p:cNvSpPr/>
           <p:nvPr/>
         </p:nvSpPr>
@@ -10420,51 +10489,36 @@
           <a:noFill/>
           <a:ln w="31750">
             <a:solidFill>
-              <a:srgbClr val="C9A961"/>
+              <a:srgbClr val="B1937E"/>
             </a:solidFill>
             <a:prstDash val="solid"/>
           </a:ln>
         </p:spPr>
       </p:sp>
-      <p:sp>
-        <p:nvSpPr>
-          <p:cNvPr id="8" name="Text 6"/>
-          <p:cNvSpPr/>
-          <p:nvPr/>
-        </p:nvSpPr>
-        <p:spPr>
-          <a:xfrm>
-            <a:off x="640080" y="5943600"/>
-            <a:ext cx="7315200" cy="365760"/>
-          </a:xfrm>
-          <a:prstGeom prst="rect">
-            <a:avLst/>
-          </a:prstGeom>
-          <a:noFill/>
-          <a:ln/>
-        </p:spPr>
-        <p:txBody>
-          <a:bodyPr wrap="square" lIns="0" tIns="0" rIns="0" bIns="0" rtlCol="0" anchor="ctr"/>
-          <a:lstStyle/>
-          <a:p>
-            <a:pPr indent="0" marL="0">
-              <a:buNone/>
-            </a:pPr>
-            <a:r>
-              <a:rPr lang="en-US" sz="1200" spc="400" kern="0" dirty="0">
-                <a:solidFill>
-                  <a:srgbClr val="5C708A"/>
-                </a:solidFill>
-                <a:latin typeface="Calibri" pitchFamily="34" charset="0"/>
-                <a:ea typeface="Calibri" pitchFamily="34" charset="-122"/>
-                <a:cs typeface="Calibri" pitchFamily="34" charset="-120"/>
-              </a:rPr>
-              <a:t>MENTORIA · RL</a:t>
-            </a:r>
-            <a:endParaRPr lang="en-US" sz="1200" dirty="0"/>
-          </a:p>
-        </p:txBody>
-      </p:sp>
+      <p:pic>
+        <p:nvPicPr>
+          <p:cNvPr id="6" name="Image 0" descr="preencoded.png">    </p:cNvPr>
+          <p:cNvPicPr>
+            <a:picLocks noChangeAspect="1"/>
+          </p:cNvPicPr>
+          <p:nvPr/>
+        </p:nvPicPr>
+        <p:blipFill>
+          <a:blip r:embed="rId1"/>
+          <a:stretch>
+            <a:fillRect/>
+          </a:stretch>
+        </p:blipFill>
+        <p:spPr>
+          <a:xfrm>
+            <a:off x="640080" y="502920"/>
+            <a:ext cx="1280160" cy="1320800"/>
+          </a:xfrm>
+          <a:prstGeom prst="rect">
+            <a:avLst/>
+          </a:prstGeom>
+        </p:spPr>
+      </p:pic>
     </p:spTree>
   </p:cSld>
   <p:clrMapOvr>
@@ -10479,7 +10533,7 @@
     <p:bg>
       <p:bgPr>
         <a:solidFill>
-          <a:srgbClr val="0B1D33"/>
+          <a:srgbClr val="F8F6F3"/>
         </a:solidFill>
       </p:bgPr>
     </p:bg>
@@ -10499,51 +10553,7 @@
       </p:grpSpPr>
       <p:sp>
         <p:nvSpPr>
-          <p:cNvPr id="2" name="Shape 0"/>
-          <p:cNvSpPr/>
-          <p:nvPr/>
-        </p:nvSpPr>
-        <p:spPr>
-          <a:xfrm>
-            <a:off x="7772400" y="-1371600"/>
-            <a:ext cx="5486400" cy="5486400"/>
-          </a:xfrm>
-          <a:prstGeom prst="ellipse">
-            <a:avLst/>
-          </a:prstGeom>
-          <a:solidFill>
-            <a:srgbClr val="4A9EFF">
-              <a:alpha val="10000"/>
-            </a:srgbClr>
-          </a:solidFill>
-          <a:ln/>
-        </p:spPr>
-      </p:sp>
-      <p:sp>
-        <p:nvSpPr>
-          <p:cNvPr id="3" name="Shape 1"/>
-          <p:cNvSpPr/>
-          <p:nvPr/>
-        </p:nvSpPr>
-        <p:spPr>
-          <a:xfrm>
-            <a:off x="-1371600" y="4114800"/>
-            <a:ext cx="4572000" cy="4572000"/>
-          </a:xfrm>
-          <a:prstGeom prst="ellipse">
-            <a:avLst/>
-          </a:prstGeom>
-          <a:solidFill>
-            <a:srgbClr val="C9A961">
-              <a:alpha val="8000"/>
-            </a:srgbClr>
-          </a:solidFill>
-          <a:ln/>
-        </p:spPr>
-      </p:sp>
-      <p:sp>
-        <p:nvSpPr>
-          <p:cNvPr id="4" name="Text 2"/>
+          <p:cNvPr id="2" name="Text 0"/>
           <p:cNvSpPr/>
           <p:nvPr/>
         </p:nvSpPr>
@@ -10568,11 +10578,11 @@
             <a:r>
               <a:rPr lang="en-US" sz="15000" b="1" dirty="0">
                 <a:solidFill>
-                  <a:srgbClr val="16314F"/>
-                </a:solidFill>
-                <a:latin typeface="Bookman Old Style" pitchFamily="34" charset="0"/>
-                <a:ea typeface="Bookman Old Style" pitchFamily="34" charset="-122"/>
-                <a:cs typeface="Bookman Old Style" pitchFamily="34" charset="-120"/>
+                  <a:srgbClr val="EADFD0"/>
+                </a:solidFill>
+                <a:latin typeface="Georgia" pitchFamily="34" charset="0"/>
+                <a:ea typeface="Georgia" pitchFamily="34" charset="-122"/>
+                <a:cs typeface="Georgia" pitchFamily="34" charset="-120"/>
               </a:rPr>
               <a:t>A</a:t>
             </a:r>
@@ -10582,7 +10592,7 @@
       </p:sp>
       <p:sp>
         <p:nvSpPr>
-          <p:cNvPr id="5" name="Text 3"/>
+          <p:cNvPr id="3" name="Text 1"/>
           <p:cNvSpPr/>
           <p:nvPr/>
         </p:nvSpPr>
@@ -10607,7 +10617,7 @@
             <a:r>
               <a:rPr lang="en-US" sz="1300" b="1" spc="400" kern="0" dirty="0">
                 <a:solidFill>
-                  <a:srgbClr val="C9A961"/>
+                  <a:srgbClr val="B1937E"/>
                 </a:solidFill>
                 <a:latin typeface="Calibri" pitchFamily="34" charset="0"/>
                 <a:ea typeface="Calibri" pitchFamily="34" charset="-122"/>
@@ -10621,7 +10631,7 @@
       </p:sp>
       <p:sp>
         <p:nvSpPr>
-          <p:cNvPr id="6" name="Text 4"/>
+          <p:cNvPr id="4" name="Text 2"/>
           <p:cNvSpPr/>
           <p:nvPr/>
         </p:nvSpPr>
@@ -10647,23 +10657,23 @@
               <a:buNone/>
             </a:pPr>
             <a:r>
-              <a:rPr lang="en-US" sz="4400" b="1" dirty="0">
-                <a:solidFill>
-                  <a:srgbClr val="EAF1FA"/>
-                </a:solidFill>
-                <a:latin typeface="Bookman Old Style" pitchFamily="34" charset="0"/>
-                <a:ea typeface="Bookman Old Style" pitchFamily="34" charset="-122"/>
-                <a:cs typeface="Bookman Old Style" pitchFamily="34" charset="-120"/>
+              <a:rPr lang="en-US" sz="4000" b="1" dirty="0">
+                <a:solidFill>
+                  <a:srgbClr val="33302B"/>
+                </a:solidFill>
+                <a:latin typeface="Georgia" pitchFamily="34" charset="0"/>
+                <a:ea typeface="Georgia" pitchFamily="34" charset="-122"/>
+                <a:cs typeface="Georgia" pitchFamily="34" charset="-120"/>
               </a:rPr>
               <a:t>A Venda Não Acaba no Sim. Começa.</a:t>
             </a:r>
-            <a:endParaRPr lang="en-US" sz="4400" dirty="0"/>
-          </a:p>
-        </p:txBody>
-      </p:sp>
-      <p:sp>
-        <p:nvSpPr>
-          <p:cNvPr id="7" name="Text 5"/>
+            <a:endParaRPr lang="en-US" sz="4000" dirty="0"/>
+          </a:p>
+        </p:txBody>
+      </p:sp>
+      <p:sp>
+        <p:nvSpPr>
+          <p:cNvPr id="5" name="Text 3"/>
           <p:cNvSpPr/>
           <p:nvPr/>
         </p:nvSpPr>
@@ -10688,7 +10698,7 @@
             <a:r>
               <a:rPr lang="en-US" sz="1600" dirty="0">
                 <a:solidFill>
-                  <a:srgbClr val="9FB2C9"/>
+                  <a:srgbClr val="8A7E72"/>
                 </a:solidFill>
                 <a:latin typeface="Calibri" pitchFamily="34" charset="0"/>
                 <a:ea typeface="Calibri" pitchFamily="34" charset="-122"/>
@@ -10702,7 +10712,7 @@
       </p:sp>
       <p:sp>
         <p:nvSpPr>
-          <p:cNvPr id="8" name="Shape 6"/>
+          <p:cNvPr id="6" name="Shape 4"/>
           <p:cNvSpPr/>
           <p:nvPr/>
         </p:nvSpPr>
@@ -10717,7 +10727,7 @@
           <a:noFill/>
           <a:ln w="9525">
             <a:solidFill>
-              <a:srgbClr val="5C708A">
+              <a:srgbClr val="A89A86">
                 <a:alpha val="60000"/>
               </a:srgbClr>
             </a:solidFill>
@@ -10727,7 +10737,7 @@
       </p:sp>
       <p:sp>
         <p:nvSpPr>
-          <p:cNvPr id="9" name="Text 7"/>
+          <p:cNvPr id="7" name="Text 5"/>
           <p:cNvSpPr/>
           <p:nvPr/>
         </p:nvSpPr>
@@ -10752,7 +10762,7 @@
             <a:r>
               <a:rPr lang="en-US" sz="900" dirty="0">
                 <a:solidFill>
-                  <a:srgbClr val="5C708A"/>
+                  <a:srgbClr val="A89A86"/>
                 </a:solidFill>
                 <a:latin typeface="Calibri" pitchFamily="34" charset="0"/>
                 <a:ea typeface="Calibri" pitchFamily="34" charset="-122"/>
@@ -10766,7 +10776,7 @@
       </p:sp>
       <p:sp>
         <p:nvSpPr>
-          <p:cNvPr id="10" name="Text 8"/>
+          <p:cNvPr id="8" name="Text 6"/>
           <p:cNvSpPr/>
           <p:nvPr/>
         </p:nvSpPr>
@@ -10791,7 +10801,7 @@
             <a:r>
               <a:rPr lang="en-US" sz="900" dirty="0">
                 <a:solidFill>
-                  <a:srgbClr val="5C708A"/>
+                  <a:srgbClr val="A89A86"/>
                 </a:solidFill>
                 <a:latin typeface="Calibri" pitchFamily="34" charset="0"/>
                 <a:ea typeface="Calibri" pitchFamily="34" charset="-122"/>
@@ -10817,7 +10827,7 @@
     <p:bg>
       <p:bgPr>
         <a:solidFill>
-          <a:srgbClr val="0B1D33"/>
+          <a:srgbClr val="F8F6F3"/>
         </a:solidFill>
       </p:bgPr>
     </p:bg>
@@ -10837,51 +10847,7 @@
       </p:grpSpPr>
       <p:sp>
         <p:nvSpPr>
-          <p:cNvPr id="2" name="Shape 0"/>
-          <p:cNvSpPr/>
-          <p:nvPr/>
-        </p:nvSpPr>
-        <p:spPr>
-          <a:xfrm>
-            <a:off x="8229600" y="-1463040"/>
-            <a:ext cx="5486400" cy="5486400"/>
-          </a:xfrm>
-          <a:prstGeom prst="ellipse">
-            <a:avLst/>
-          </a:prstGeom>
-          <a:solidFill>
-            <a:srgbClr val="4A9EFF">
-              <a:alpha val="10000"/>
-            </a:srgbClr>
-          </a:solidFill>
-          <a:ln/>
-        </p:spPr>
-      </p:sp>
-      <p:sp>
-        <p:nvSpPr>
-          <p:cNvPr id="3" name="Shape 1"/>
-          <p:cNvSpPr/>
-          <p:nvPr/>
-        </p:nvSpPr>
-        <p:spPr>
-          <a:xfrm>
-            <a:off x="-1463040" y="4206240"/>
-            <a:ext cx="4572000" cy="4572000"/>
-          </a:xfrm>
-          <a:prstGeom prst="ellipse">
-            <a:avLst/>
-          </a:prstGeom>
-          <a:solidFill>
-            <a:srgbClr val="C9A961">
-              <a:alpha val="8000"/>
-            </a:srgbClr>
-          </a:solidFill>
-          <a:ln/>
-        </p:spPr>
-      </p:sp>
-      <p:sp>
-        <p:nvSpPr>
-          <p:cNvPr id="4" name="Text 2"/>
+          <p:cNvPr id="2" name="Text 0"/>
           <p:cNvSpPr/>
           <p:nvPr/>
         </p:nvSpPr>
@@ -10906,7 +10872,7 @@
             <a:r>
               <a:rPr lang="en-US" sz="1200" b="1" spc="300" kern="0" dirty="0">
                 <a:solidFill>
-                  <a:srgbClr val="4A9EFF"/>
+                  <a:srgbClr val="9A7B66"/>
                 </a:solidFill>
                 <a:latin typeface="Calibri" pitchFamily="34" charset="0"/>
                 <a:ea typeface="Calibri" pitchFamily="34" charset="-122"/>
@@ -10920,7 +10886,7 @@
       </p:sp>
       <p:sp>
         <p:nvSpPr>
-          <p:cNvPr id="5" name="Shape 3"/>
+          <p:cNvPr id="3" name="Shape 1"/>
           <p:cNvSpPr/>
           <p:nvPr/>
         </p:nvSpPr>
@@ -10933,14 +10899,19 @@
             <a:avLst/>
           </a:prstGeom>
           <a:solidFill>
-            <a:srgbClr val="16314F"/>
+            <a:srgbClr val="EADFD0"/>
           </a:solidFill>
-          <a:ln/>
+          <a:ln w="9525">
+            <a:solidFill>
+              <a:srgbClr val="E3D9CC"/>
+            </a:solidFill>
+            <a:prstDash val="solid"/>
+          </a:ln>
         </p:spPr>
       </p:sp>
       <p:pic>
         <p:nvPicPr>
-          <p:cNvPr id="6" name="Image 0" descr="preencoded.png">    </p:cNvPr>
+          <p:cNvPr id="4" name="Image 0" descr="preencoded.png">    </p:cNvPr>
           <p:cNvPicPr>
             <a:picLocks noChangeAspect="1"/>
           </p:cNvPicPr>
@@ -10964,7 +10935,7 @@
       </p:pic>
       <p:sp>
         <p:nvSpPr>
-          <p:cNvPr id="7" name="Text 4"/>
+          <p:cNvPr id="5" name="Text 2"/>
           <p:cNvSpPr/>
           <p:nvPr/>
         </p:nvSpPr>
@@ -10992,11 +10963,11 @@
             <a:r>
               <a:rPr lang="en-US" sz="2800" b="1" i="1" dirty="0">
                 <a:solidFill>
-                  <a:srgbClr val="EAF1FA"/>
-                </a:solidFill>
-                <a:latin typeface="Bookman Old Style" pitchFamily="34" charset="0"/>
-                <a:ea typeface="Bookman Old Style" pitchFamily="34" charset="-122"/>
-                <a:cs typeface="Bookman Old Style" pitchFamily="34" charset="-120"/>
+                  <a:srgbClr val="33302B"/>
+                </a:solidFill>
+                <a:latin typeface="Georgia" pitchFamily="34" charset="0"/>
+                <a:ea typeface="Georgia" pitchFamily="34" charset="-122"/>
+                <a:cs typeface="Georgia" pitchFamily="34" charset="-120"/>
               </a:rPr>
               <a:t>O silêncio entre o sinal e o dia é dinheiro deixado em cima da mesa.</a:t>
             </a:r>
@@ -11006,7 +10977,7 @@
       </p:sp>
       <p:sp>
         <p:nvSpPr>
-          <p:cNvPr id="8" name="Text 5"/>
+          <p:cNvPr id="6" name="Text 3"/>
           <p:cNvSpPr/>
           <p:nvPr/>
         </p:nvSpPr>
@@ -11031,7 +11002,7 @@
             <a:r>
               <a:rPr lang="en-US" sz="1600" dirty="0">
                 <a:solidFill>
-                  <a:srgbClr val="9FB2C9"/>
+                  <a:srgbClr val="8A7E72"/>
                 </a:solidFill>
                 <a:latin typeface="Calibri" pitchFamily="34" charset="0"/>
                 <a:ea typeface="Calibri" pitchFamily="34" charset="-122"/>
@@ -11045,7 +11016,7 @@
       </p:sp>
       <p:sp>
         <p:nvSpPr>
-          <p:cNvPr id="9" name="Shape 6"/>
+          <p:cNvPr id="7" name="Shape 4"/>
           <p:cNvSpPr/>
           <p:nvPr/>
         </p:nvSpPr>
@@ -11060,7 +11031,7 @@
           <a:noFill/>
           <a:ln w="9525">
             <a:solidFill>
-              <a:srgbClr val="5C708A">
+              <a:srgbClr val="A89A86">
                 <a:alpha val="60000"/>
               </a:srgbClr>
             </a:solidFill>
@@ -11070,7 +11041,7 @@
       </p:sp>
       <p:sp>
         <p:nvSpPr>
-          <p:cNvPr id="10" name="Text 7"/>
+          <p:cNvPr id="8" name="Text 5"/>
           <p:cNvSpPr/>
           <p:nvPr/>
         </p:nvSpPr>
@@ -11095,7 +11066,7 @@
             <a:r>
               <a:rPr lang="en-US" sz="900" dirty="0">
                 <a:solidFill>
-                  <a:srgbClr val="5C708A"/>
+                  <a:srgbClr val="A89A86"/>
                 </a:solidFill>
                 <a:latin typeface="Calibri" pitchFamily="34" charset="0"/>
                 <a:ea typeface="Calibri" pitchFamily="34" charset="-122"/>
@@ -11109,7 +11080,7 @@
       </p:sp>
       <p:sp>
         <p:nvSpPr>
-          <p:cNvPr id="11" name="Text 8"/>
+          <p:cNvPr id="9" name="Text 6"/>
           <p:cNvSpPr/>
           <p:nvPr/>
         </p:nvSpPr>
@@ -11134,7 +11105,7 @@
             <a:r>
               <a:rPr lang="en-US" sz="900" dirty="0">
                 <a:solidFill>
-                  <a:srgbClr val="5C708A"/>
+                  <a:srgbClr val="A89A86"/>
                 </a:solidFill>
                 <a:latin typeface="Calibri" pitchFamily="34" charset="0"/>
                 <a:ea typeface="Calibri" pitchFamily="34" charset="-122"/>
@@ -11160,7 +11131,7 @@
     <p:bg>
       <p:bgPr>
         <a:solidFill>
-          <a:srgbClr val="0B1D33"/>
+          <a:srgbClr val="F8F6F3"/>
         </a:solidFill>
       </p:bgPr>
     </p:bg>
@@ -11205,7 +11176,7 @@
             <a:r>
               <a:rPr lang="en-US" sz="1200" b="1" spc="300" kern="0" dirty="0">
                 <a:solidFill>
-                  <a:srgbClr val="4A9EFF"/>
+                  <a:srgbClr val="9A7B66"/>
                 </a:solidFill>
                 <a:latin typeface="Calibri" pitchFamily="34" charset="0"/>
                 <a:ea typeface="Calibri" pitchFamily="34" charset="-122"/>
@@ -11247,11 +11218,11 @@
             <a:r>
               <a:rPr lang="en-US" sz="3200" b="1" dirty="0">
                 <a:solidFill>
-                  <a:srgbClr val="EAF1FA"/>
-                </a:solidFill>
-                <a:latin typeface="Bookman Old Style" pitchFamily="34" charset="0"/>
-                <a:ea typeface="Bookman Old Style" pitchFamily="34" charset="-122"/>
-                <a:cs typeface="Bookman Old Style" pitchFamily="34" charset="-120"/>
+                  <a:srgbClr val="33302B"/>
+                </a:solidFill>
+                <a:latin typeface="Georgia" pitchFamily="34" charset="0"/>
+                <a:ea typeface="Georgia" pitchFamily="34" charset="-122"/>
+                <a:cs typeface="Georgia" pitchFamily="34" charset="-120"/>
               </a:rPr>
               <a:t>O onboarding que tranquiliza</a:t>
             </a:r>
@@ -11276,13 +11247,18 @@
             </a:avLst>
           </a:prstGeom>
           <a:solidFill>
-            <a:srgbClr val="13283F"/>
+            <a:srgbClr val="FFFFFF"/>
           </a:solidFill>
-          <a:ln/>
+          <a:ln w="12700">
+            <a:solidFill>
+              <a:srgbClr val="E3D9CC"/>
+            </a:solidFill>
+            <a:prstDash val="solid"/>
+          </a:ln>
           <a:effectLst>
-            <a:outerShdw sx="100000" sy="100000" kx="0" ky="0" algn="bl" rotWithShape="0" blurRad="127000" dist="38100" dir="5400000">
-              <a:srgbClr val="000000">
-                <a:alpha val="28000"/>
+            <a:outerShdw sx="100000" sy="100000" kx="0" ky="0" algn="bl" rotWithShape="0" blurRad="114300" dist="38100" dir="5400000">
+              <a:srgbClr val="7A6A55">
+                <a:alpha val="12000"/>
               </a:srgbClr>
             </a:outerShdw>
           </a:effectLst>
@@ -11303,9 +11279,14 @@
             <a:avLst/>
           </a:prstGeom>
           <a:solidFill>
-            <a:srgbClr val="16314F"/>
+            <a:srgbClr val="EADFD0"/>
           </a:solidFill>
-          <a:ln/>
+          <a:ln w="9525">
+            <a:solidFill>
+              <a:srgbClr val="E3D9CC"/>
+            </a:solidFill>
+            <a:prstDash val="solid"/>
+          </a:ln>
         </p:spPr>
       </p:sp>
       <p:pic>
@@ -11359,11 +11340,11 @@
             <a:r>
               <a:rPr lang="en-US" sz="1900" b="1" dirty="0">
                 <a:solidFill>
-                  <a:srgbClr val="C9A961"/>
-                </a:solidFill>
-                <a:latin typeface="Bookman Old Style" pitchFamily="34" charset="0"/>
-                <a:ea typeface="Bookman Old Style" pitchFamily="34" charset="-122"/>
-                <a:cs typeface="Bookman Old Style" pitchFamily="34" charset="-120"/>
+                  <a:srgbClr val="B1937E"/>
+                </a:solidFill>
+                <a:latin typeface="Georgia" pitchFamily="34" charset="0"/>
+                <a:ea typeface="Georgia" pitchFamily="34" charset="-122"/>
+                <a:cs typeface="Georgia" pitchFamily="34" charset="-120"/>
               </a:rPr>
               <a:t>Boas-vindas</a:t>
             </a:r>
@@ -11398,7 +11379,7 @@
             <a:r>
               <a:rPr lang="en-US" sz="1400" dirty="0">
                 <a:solidFill>
-                  <a:srgbClr val="9FB2C9"/>
+                  <a:srgbClr val="8A7E72"/>
                 </a:solidFill>
                 <a:latin typeface="Calibri" pitchFamily="34" charset="0"/>
                 <a:ea typeface="Calibri" pitchFamily="34" charset="-122"/>
@@ -11427,13 +11408,18 @@
             </a:avLst>
           </a:prstGeom>
           <a:solidFill>
-            <a:srgbClr val="13283F"/>
+            <a:srgbClr val="FFFFFF"/>
           </a:solidFill>
-          <a:ln/>
+          <a:ln w="12700">
+            <a:solidFill>
+              <a:srgbClr val="E3D9CC"/>
+            </a:solidFill>
+            <a:prstDash val="solid"/>
+          </a:ln>
           <a:effectLst>
-            <a:outerShdw sx="100000" sy="100000" kx="0" ky="0" algn="bl" rotWithShape="0" blurRad="127000" dist="38100" dir="5400000">
-              <a:srgbClr val="000000">
-                <a:alpha val="28000"/>
+            <a:outerShdw sx="100000" sy="100000" kx="0" ky="0" algn="bl" rotWithShape="0" blurRad="114300" dist="38100" dir="5400000">
+              <a:srgbClr val="7A6A55">
+                <a:alpha val="12000"/>
               </a:srgbClr>
             </a:outerShdw>
           </a:effectLst>
@@ -11454,9 +11440,14 @@
             <a:avLst/>
           </a:prstGeom>
           <a:solidFill>
-            <a:srgbClr val="16314F"/>
+            <a:srgbClr val="EADFD0"/>
           </a:solidFill>
-          <a:ln/>
+          <a:ln w="9525">
+            <a:solidFill>
+              <a:srgbClr val="E3D9CC"/>
+            </a:solidFill>
+            <a:prstDash val="solid"/>
+          </a:ln>
         </p:spPr>
       </p:sp>
       <p:pic>
@@ -11510,11 +11501,11 @@
             <a:r>
               <a:rPr lang="en-US" sz="1900" b="1" dirty="0">
                 <a:solidFill>
-                  <a:srgbClr val="C9A961"/>
-                </a:solidFill>
-                <a:latin typeface="Bookman Old Style" pitchFamily="34" charset="0"/>
-                <a:ea typeface="Bookman Old Style" pitchFamily="34" charset="-122"/>
-                <a:cs typeface="Bookman Old Style" pitchFamily="34" charset="-120"/>
+                  <a:srgbClr val="B1937E"/>
+                </a:solidFill>
+                <a:latin typeface="Georgia" pitchFamily="34" charset="0"/>
+                <a:ea typeface="Georgia" pitchFamily="34" charset="-122"/>
+                <a:cs typeface="Georgia" pitchFamily="34" charset="-120"/>
               </a:rPr>
               <a:t>Próximos passos</a:t>
             </a:r>
@@ -11549,7 +11540,7 @@
             <a:r>
               <a:rPr lang="en-US" sz="1400" dirty="0">
                 <a:solidFill>
-                  <a:srgbClr val="9FB2C9"/>
+                  <a:srgbClr val="8A7E72"/>
                 </a:solidFill>
                 <a:latin typeface="Calibri" pitchFamily="34" charset="0"/>
                 <a:ea typeface="Calibri" pitchFamily="34" charset="-122"/>
@@ -11578,13 +11569,18 @@
             </a:avLst>
           </a:prstGeom>
           <a:solidFill>
-            <a:srgbClr val="13283F"/>
+            <a:srgbClr val="FFFFFF"/>
           </a:solidFill>
-          <a:ln/>
+          <a:ln w="12700">
+            <a:solidFill>
+              <a:srgbClr val="E3D9CC"/>
+            </a:solidFill>
+            <a:prstDash val="solid"/>
+          </a:ln>
           <a:effectLst>
-            <a:outerShdw sx="100000" sy="100000" kx="0" ky="0" algn="bl" rotWithShape="0" blurRad="127000" dist="38100" dir="5400000">
-              <a:srgbClr val="000000">
-                <a:alpha val="28000"/>
+            <a:outerShdw sx="100000" sy="100000" kx="0" ky="0" algn="bl" rotWithShape="0" blurRad="114300" dist="38100" dir="5400000">
+              <a:srgbClr val="7A6A55">
+                <a:alpha val="12000"/>
               </a:srgbClr>
             </a:outerShdw>
           </a:effectLst>
@@ -11605,9 +11601,14 @@
             <a:avLst/>
           </a:prstGeom>
           <a:solidFill>
-            <a:srgbClr val="16314F"/>
+            <a:srgbClr val="EADFD0"/>
           </a:solidFill>
-          <a:ln/>
+          <a:ln w="9525">
+            <a:solidFill>
+              <a:srgbClr val="E3D9CC"/>
+            </a:solidFill>
+            <a:prstDash val="solid"/>
+          </a:ln>
         </p:spPr>
       </p:sp>
       <p:pic>
@@ -11661,11 +11662,11 @@
             <a:r>
               <a:rPr lang="en-US" sz="1900" b="1" dirty="0">
                 <a:solidFill>
-                  <a:srgbClr val="C9A961"/>
-                </a:solidFill>
-                <a:latin typeface="Bookman Old Style" pitchFamily="34" charset="0"/>
-                <a:ea typeface="Bookman Old Style" pitchFamily="34" charset="-122"/>
-                <a:cs typeface="Bookman Old Style" pitchFamily="34" charset="-120"/>
+                  <a:srgbClr val="B1937E"/>
+                </a:solidFill>
+                <a:latin typeface="Georgia" pitchFamily="34" charset="0"/>
+                <a:ea typeface="Georgia" pitchFamily="34" charset="-122"/>
+                <a:cs typeface="Georgia" pitchFamily="34" charset="-120"/>
               </a:rPr>
               <a:t>A primeira prova</a:t>
             </a:r>
@@ -11700,7 +11701,7 @@
             <a:r>
               <a:rPr lang="en-US" sz="1400" dirty="0">
                 <a:solidFill>
-                  <a:srgbClr val="9FB2C9"/>
+                  <a:srgbClr val="8A7E72"/>
                 </a:solidFill>
                 <a:latin typeface="Calibri" pitchFamily="34" charset="0"/>
                 <a:ea typeface="Calibri" pitchFamily="34" charset="-122"/>
@@ -11729,7 +11730,7 @@
           <a:noFill/>
           <a:ln w="9525">
             <a:solidFill>
-              <a:srgbClr val="5C708A">
+              <a:srgbClr val="A89A86">
                 <a:alpha val="60000"/>
               </a:srgbClr>
             </a:solidFill>
@@ -11764,7 +11765,7 @@
             <a:r>
               <a:rPr lang="en-US" sz="900" dirty="0">
                 <a:solidFill>
-                  <a:srgbClr val="5C708A"/>
+                  <a:srgbClr val="A89A86"/>
                 </a:solidFill>
                 <a:latin typeface="Calibri" pitchFamily="34" charset="0"/>
                 <a:ea typeface="Calibri" pitchFamily="34" charset="-122"/>
@@ -11803,7 +11804,7 @@
             <a:r>
               <a:rPr lang="en-US" sz="900" dirty="0">
                 <a:solidFill>
-                  <a:srgbClr val="5C708A"/>
+                  <a:srgbClr val="A89A86"/>
                 </a:solidFill>
                 <a:latin typeface="Calibri" pitchFamily="34" charset="0"/>
                 <a:ea typeface="Calibri" pitchFamily="34" charset="-122"/>
@@ -11829,7 +11830,7 @@
     <p:bg>
       <p:bgPr>
         <a:solidFill>
-          <a:srgbClr val="0B1D33"/>
+          <a:srgbClr val="F8F6F3"/>
         </a:solidFill>
       </p:bgPr>
     </p:bg>
@@ -11874,7 +11875,7 @@
             <a:r>
               <a:rPr lang="en-US" sz="1200" b="1" spc="300" kern="0" dirty="0">
                 <a:solidFill>
-                  <a:srgbClr val="4A9EFF"/>
+                  <a:srgbClr val="9A7B66"/>
                 </a:solidFill>
                 <a:latin typeface="Calibri" pitchFamily="34" charset="0"/>
                 <a:ea typeface="Calibri" pitchFamily="34" charset="-122"/>
@@ -11916,11 +11917,11 @@
             <a:r>
               <a:rPr lang="en-US" sz="3000" b="1" dirty="0">
                 <a:solidFill>
-                  <a:srgbClr val="EAF1FA"/>
-                </a:solidFill>
-                <a:latin typeface="Bookman Old Style" pitchFamily="34" charset="0"/>
-                <a:ea typeface="Bookman Old Style" pitchFamily="34" charset="-122"/>
-                <a:cs typeface="Bookman Old Style" pitchFamily="34" charset="-120"/>
+                  <a:srgbClr val="33302B"/>
+                </a:solidFill>
+                <a:latin typeface="Georgia" pitchFamily="34" charset="0"/>
+                <a:ea typeface="Georgia" pitchFamily="34" charset="-122"/>
+                <a:cs typeface="Georgia" pitchFamily="34" charset="-120"/>
               </a:rPr>
               <a:t>A jornada, do sim à entrega</a:t>
             </a:r>
@@ -11945,13 +11946,18 @@
             </a:avLst>
           </a:prstGeom>
           <a:solidFill>
-            <a:srgbClr val="13283F"/>
+            <a:srgbClr val="FFFFFF"/>
           </a:solidFill>
-          <a:ln/>
+          <a:ln w="12700">
+            <a:solidFill>
+              <a:srgbClr val="E3D9CC"/>
+            </a:solidFill>
+            <a:prstDash val="solid"/>
+          </a:ln>
           <a:effectLst>
-            <a:outerShdw sx="100000" sy="100000" kx="0" ky="0" algn="bl" rotWithShape="0" blurRad="127000" dist="38100" dir="5400000">
-              <a:srgbClr val="000000">
-                <a:alpha val="28000"/>
+            <a:outerShdw sx="100000" sy="100000" kx="0" ky="0" algn="bl" rotWithShape="0" blurRad="114300" dist="38100" dir="5400000">
+              <a:srgbClr val="7A6A55">
+                <a:alpha val="12000"/>
               </a:srgbClr>
             </a:outerShdw>
           </a:effectLst>
@@ -11972,9 +11978,14 @@
             <a:avLst/>
           </a:prstGeom>
           <a:solidFill>
-            <a:srgbClr val="16314F"/>
+            <a:srgbClr val="EADFD0"/>
           </a:solidFill>
-          <a:ln/>
+          <a:ln w="9525">
+            <a:solidFill>
+              <a:srgbClr val="E3D9CC"/>
+            </a:solidFill>
+            <a:prstDash val="solid"/>
+          </a:ln>
         </p:spPr>
       </p:sp>
       <p:pic>
@@ -12028,11 +12039,11 @@
             <a:r>
               <a:rPr lang="en-US" sz="1700" b="1" dirty="0">
                 <a:solidFill>
-                  <a:srgbClr val="EAF1FA"/>
-                </a:solidFill>
-                <a:latin typeface="Bookman Old Style" pitchFamily="34" charset="0"/>
-                <a:ea typeface="Bookman Old Style" pitchFamily="34" charset="-122"/>
-                <a:cs typeface="Bookman Old Style" pitchFamily="34" charset="-120"/>
+                  <a:srgbClr val="33302B"/>
+                </a:solidFill>
+                <a:latin typeface="Georgia" pitchFamily="34" charset="0"/>
+                <a:ea typeface="Georgia" pitchFamily="34" charset="-122"/>
+                <a:cs typeface="Georgia" pitchFamily="34" charset="-120"/>
               </a:rPr>
               <a:t>Reserva</a:t>
             </a:r>
@@ -12067,7 +12078,7 @@
             <a:r>
               <a:rPr lang="en-US" sz="1250" dirty="0">
                 <a:solidFill>
-                  <a:srgbClr val="9FB2C9"/>
+                  <a:srgbClr val="8A7E72"/>
                 </a:solidFill>
                 <a:latin typeface="Calibri" pitchFamily="34" charset="0"/>
                 <a:ea typeface="Calibri" pitchFamily="34" charset="-122"/>
@@ -12120,13 +12131,18 @@
             </a:avLst>
           </a:prstGeom>
           <a:solidFill>
-            <a:srgbClr val="13283F"/>
+            <a:srgbClr val="FFFFFF"/>
           </a:solidFill>
-          <a:ln/>
+          <a:ln w="12700">
+            <a:solidFill>
+              <a:srgbClr val="E3D9CC"/>
+            </a:solidFill>
+            <a:prstDash val="solid"/>
+          </a:ln>
           <a:effectLst>
-            <a:outerShdw sx="100000" sy="100000" kx="0" ky="0" algn="bl" rotWithShape="0" blurRad="127000" dist="38100" dir="5400000">
-              <a:srgbClr val="000000">
-                <a:alpha val="28000"/>
+            <a:outerShdw sx="100000" sy="100000" kx="0" ky="0" algn="bl" rotWithShape="0" blurRad="114300" dist="38100" dir="5400000">
+              <a:srgbClr val="7A6A55">
+                <a:alpha val="12000"/>
               </a:srgbClr>
             </a:outerShdw>
           </a:effectLst>
@@ -12147,9 +12163,14 @@
             <a:avLst/>
           </a:prstGeom>
           <a:solidFill>
-            <a:srgbClr val="16314F"/>
+            <a:srgbClr val="EADFD0"/>
           </a:solidFill>
-          <a:ln/>
+          <a:ln w="9525">
+            <a:solidFill>
+              <a:srgbClr val="E3D9CC"/>
+            </a:solidFill>
+            <a:prstDash val="solid"/>
+          </a:ln>
         </p:spPr>
       </p:sp>
       <p:pic>
@@ -12203,11 +12224,11 @@
             <a:r>
               <a:rPr lang="en-US" sz="1700" b="1" dirty="0">
                 <a:solidFill>
-                  <a:srgbClr val="EAF1FA"/>
-                </a:solidFill>
-                <a:latin typeface="Bookman Old Style" pitchFamily="34" charset="0"/>
-                <a:ea typeface="Bookman Old Style" pitchFamily="34" charset="-122"/>
-                <a:cs typeface="Bookman Old Style" pitchFamily="34" charset="-120"/>
+                  <a:srgbClr val="33302B"/>
+                </a:solidFill>
+                <a:latin typeface="Georgia" pitchFamily="34" charset="0"/>
+                <a:ea typeface="Georgia" pitchFamily="34" charset="-122"/>
+                <a:cs typeface="Georgia" pitchFamily="34" charset="-120"/>
               </a:rPr>
               <a:t>Acompanhamento</a:t>
             </a:r>
@@ -12242,7 +12263,7 @@
             <a:r>
               <a:rPr lang="en-US" sz="1250" dirty="0">
                 <a:solidFill>
-                  <a:srgbClr val="9FB2C9"/>
+                  <a:srgbClr val="8A7E72"/>
                 </a:solidFill>
                 <a:latin typeface="Calibri" pitchFamily="34" charset="0"/>
                 <a:ea typeface="Calibri" pitchFamily="34" charset="-122"/>
@@ -12295,13 +12316,18 @@
             </a:avLst>
           </a:prstGeom>
           <a:solidFill>
-            <a:srgbClr val="13283F"/>
+            <a:srgbClr val="FFFFFF"/>
           </a:solidFill>
-          <a:ln/>
+          <a:ln w="12700">
+            <a:solidFill>
+              <a:srgbClr val="E3D9CC"/>
+            </a:solidFill>
+            <a:prstDash val="solid"/>
+          </a:ln>
           <a:effectLst>
-            <a:outerShdw sx="100000" sy="100000" kx="0" ky="0" algn="bl" rotWithShape="0" blurRad="127000" dist="38100" dir="5400000">
-              <a:srgbClr val="000000">
-                <a:alpha val="28000"/>
+            <a:outerShdw sx="100000" sy="100000" kx="0" ky="0" algn="bl" rotWithShape="0" blurRad="114300" dist="38100" dir="5400000">
+              <a:srgbClr val="7A6A55">
+                <a:alpha val="12000"/>
               </a:srgbClr>
             </a:outerShdw>
           </a:effectLst>
@@ -12322,9 +12348,14 @@
             <a:avLst/>
           </a:prstGeom>
           <a:solidFill>
-            <a:srgbClr val="16314F"/>
+            <a:srgbClr val="EADFD0"/>
           </a:solidFill>
-          <a:ln/>
+          <a:ln w="9525">
+            <a:solidFill>
+              <a:srgbClr val="E3D9CC"/>
+            </a:solidFill>
+            <a:prstDash val="solid"/>
+          </a:ln>
         </p:spPr>
       </p:sp>
       <p:pic>
@@ -12378,11 +12409,11 @@
             <a:r>
               <a:rPr lang="en-US" sz="1700" b="1" dirty="0">
                 <a:solidFill>
-                  <a:srgbClr val="EAF1FA"/>
-                </a:solidFill>
-                <a:latin typeface="Bookman Old Style" pitchFamily="34" charset="0"/>
-                <a:ea typeface="Bookman Old Style" pitchFamily="34" charset="-122"/>
-                <a:cs typeface="Bookman Old Style" pitchFamily="34" charset="-120"/>
+                  <a:srgbClr val="33302B"/>
+                </a:solidFill>
+                <a:latin typeface="Georgia" pitchFamily="34" charset="0"/>
+                <a:ea typeface="Georgia" pitchFamily="34" charset="-122"/>
+                <a:cs typeface="Georgia" pitchFamily="34" charset="-120"/>
               </a:rPr>
               <a:t>O dia</a:t>
             </a:r>
@@ -12417,7 +12448,7 @@
             <a:r>
               <a:rPr lang="en-US" sz="1250" dirty="0">
                 <a:solidFill>
-                  <a:srgbClr val="9FB2C9"/>
+                  <a:srgbClr val="8A7E72"/>
                 </a:solidFill>
                 <a:latin typeface="Calibri" pitchFamily="34" charset="0"/>
                 <a:ea typeface="Calibri" pitchFamily="34" charset="-122"/>
@@ -12470,13 +12501,18 @@
             </a:avLst>
           </a:prstGeom>
           <a:solidFill>
-            <a:srgbClr val="13283F"/>
+            <a:srgbClr val="FFFFFF"/>
           </a:solidFill>
-          <a:ln/>
+          <a:ln w="12700">
+            <a:solidFill>
+              <a:srgbClr val="E3D9CC"/>
+            </a:solidFill>
+            <a:prstDash val="solid"/>
+          </a:ln>
           <a:effectLst>
-            <a:outerShdw sx="100000" sy="100000" kx="0" ky="0" algn="bl" rotWithShape="0" blurRad="127000" dist="38100" dir="5400000">
-              <a:srgbClr val="000000">
-                <a:alpha val="28000"/>
+            <a:outerShdw sx="100000" sy="100000" kx="0" ky="0" algn="bl" rotWithShape="0" blurRad="114300" dist="38100" dir="5400000">
+              <a:srgbClr val="7A6A55">
+                <a:alpha val="12000"/>
               </a:srgbClr>
             </a:outerShdw>
           </a:effectLst>
@@ -12497,9 +12533,14 @@
             <a:avLst/>
           </a:prstGeom>
           <a:solidFill>
-            <a:srgbClr val="16314F"/>
+            <a:srgbClr val="EADFD0"/>
           </a:solidFill>
-          <a:ln/>
+          <a:ln w="9525">
+            <a:solidFill>
+              <a:srgbClr val="E3D9CC"/>
+            </a:solidFill>
+            <a:prstDash val="solid"/>
+          </a:ln>
         </p:spPr>
       </p:sp>
       <p:pic>
@@ -12553,11 +12594,11 @@
             <a:r>
               <a:rPr lang="en-US" sz="1700" b="1" dirty="0">
                 <a:solidFill>
-                  <a:srgbClr val="EAF1FA"/>
-                </a:solidFill>
-                <a:latin typeface="Bookman Old Style" pitchFamily="34" charset="0"/>
-                <a:ea typeface="Bookman Old Style" pitchFamily="34" charset="-122"/>
-                <a:cs typeface="Bookman Old Style" pitchFamily="34" charset="-120"/>
+                  <a:srgbClr val="33302B"/>
+                </a:solidFill>
+                <a:latin typeface="Georgia" pitchFamily="34" charset="0"/>
+                <a:ea typeface="Georgia" pitchFamily="34" charset="-122"/>
+                <a:cs typeface="Georgia" pitchFamily="34" charset="-120"/>
               </a:rPr>
               <a:t>Entrega</a:t>
             </a:r>
@@ -12592,7 +12633,7 @@
             <a:r>
               <a:rPr lang="en-US" sz="1250" dirty="0">
                 <a:solidFill>
-                  <a:srgbClr val="9FB2C9"/>
+                  <a:srgbClr val="8A7E72"/>
                 </a:solidFill>
                 <a:latin typeface="Calibri" pitchFamily="34" charset="0"/>
                 <a:ea typeface="Calibri" pitchFamily="34" charset="-122"/>
@@ -12631,7 +12672,7 @@
             <a:r>
               <a:rPr lang="en-US" sz="1500" i="1" dirty="0">
                 <a:solidFill>
-                  <a:srgbClr val="C9A961"/>
+                  <a:srgbClr val="B1937E"/>
                 </a:solidFill>
                 <a:latin typeface="Calibri" pitchFamily="34" charset="0"/>
                 <a:ea typeface="Calibri" pitchFamily="34" charset="-122"/>
@@ -12660,7 +12701,7 @@
           <a:noFill/>
           <a:ln w="9525">
             <a:solidFill>
-              <a:srgbClr val="5C708A">
+              <a:srgbClr val="A89A86">
                 <a:alpha val="60000"/>
               </a:srgbClr>
             </a:solidFill>
@@ -12695,7 +12736,7 @@
             <a:r>
               <a:rPr lang="en-US" sz="900" dirty="0">
                 <a:solidFill>
-                  <a:srgbClr val="5C708A"/>
+                  <a:srgbClr val="A89A86"/>
                 </a:solidFill>
                 <a:latin typeface="Calibri" pitchFamily="34" charset="0"/>
                 <a:ea typeface="Calibri" pitchFamily="34" charset="-122"/>
@@ -12734,7 +12775,7 @@
             <a:r>
               <a:rPr lang="en-US" sz="900" dirty="0">
                 <a:solidFill>
-                  <a:srgbClr val="5C708A"/>
+                  <a:srgbClr val="A89A86"/>
                 </a:solidFill>
                 <a:latin typeface="Calibri" pitchFamily="34" charset="0"/>
                 <a:ea typeface="Calibri" pitchFamily="34" charset="-122"/>
@@ -12760,7 +12801,7 @@
     <p:bg>
       <p:bgPr>
         <a:solidFill>
-          <a:srgbClr val="0B1D33"/>
+          <a:srgbClr val="F8F6F3"/>
         </a:solidFill>
       </p:bgPr>
     </p:bg>
@@ -12780,51 +12821,7 @@
       </p:grpSpPr>
       <p:sp>
         <p:nvSpPr>
-          <p:cNvPr id="2" name="Shape 0"/>
-          <p:cNvSpPr/>
-          <p:nvPr/>
-        </p:nvSpPr>
-        <p:spPr>
-          <a:xfrm>
-            <a:off x="7772400" y="-1371600"/>
-            <a:ext cx="5486400" cy="5486400"/>
-          </a:xfrm>
-          <a:prstGeom prst="ellipse">
-            <a:avLst/>
-          </a:prstGeom>
-          <a:solidFill>
-            <a:srgbClr val="4A9EFF">
-              <a:alpha val="10000"/>
-            </a:srgbClr>
-          </a:solidFill>
-          <a:ln/>
-        </p:spPr>
-      </p:sp>
-      <p:sp>
-        <p:nvSpPr>
-          <p:cNvPr id="3" name="Shape 1"/>
-          <p:cNvSpPr/>
-          <p:nvPr/>
-        </p:nvSpPr>
-        <p:spPr>
-          <a:xfrm>
-            <a:off x="-1371600" y="4114800"/>
-            <a:ext cx="4572000" cy="4572000"/>
-          </a:xfrm>
-          <a:prstGeom prst="ellipse">
-            <a:avLst/>
-          </a:prstGeom>
-          <a:solidFill>
-            <a:srgbClr val="C9A961">
-              <a:alpha val="8000"/>
-            </a:srgbClr>
-          </a:solidFill>
-          <a:ln/>
-        </p:spPr>
-      </p:sp>
-      <p:sp>
-        <p:nvSpPr>
-          <p:cNvPr id="4" name="Text 2"/>
+          <p:cNvPr id="2" name="Text 0"/>
           <p:cNvSpPr/>
           <p:nvPr/>
         </p:nvSpPr>
@@ -12849,11 +12846,11 @@
             <a:r>
               <a:rPr lang="en-US" sz="15000" b="1" dirty="0">
                 <a:solidFill>
-                  <a:srgbClr val="16314F"/>
-                </a:solidFill>
-                <a:latin typeface="Bookman Old Style" pitchFamily="34" charset="0"/>
-                <a:ea typeface="Bookman Old Style" pitchFamily="34" charset="-122"/>
-                <a:cs typeface="Bookman Old Style" pitchFamily="34" charset="-120"/>
+                  <a:srgbClr val="EADFD0"/>
+                </a:solidFill>
+                <a:latin typeface="Georgia" pitchFamily="34" charset="0"/>
+                <a:ea typeface="Georgia" pitchFamily="34" charset="-122"/>
+                <a:cs typeface="Georgia" pitchFamily="34" charset="-120"/>
               </a:rPr>
               <a:t>B</a:t>
             </a:r>
@@ -12863,7 +12860,7 @@
       </p:sp>
       <p:sp>
         <p:nvSpPr>
-          <p:cNvPr id="5" name="Text 3"/>
+          <p:cNvPr id="3" name="Text 1"/>
           <p:cNvSpPr/>
           <p:nvPr/>
         </p:nvSpPr>
@@ -12888,7 +12885,7 @@
             <a:r>
               <a:rPr lang="en-US" sz="1300" b="1" spc="400" kern="0" dirty="0">
                 <a:solidFill>
-                  <a:srgbClr val="C9A961"/>
+                  <a:srgbClr val="B1937E"/>
                 </a:solidFill>
                 <a:latin typeface="Calibri" pitchFamily="34" charset="0"/>
                 <a:ea typeface="Calibri" pitchFamily="34" charset="-122"/>
@@ -12902,7 +12899,7 @@
       </p:sp>
       <p:sp>
         <p:nvSpPr>
-          <p:cNvPr id="6" name="Text 4"/>
+          <p:cNvPr id="4" name="Text 2"/>
           <p:cNvSpPr/>
           <p:nvPr/>
         </p:nvSpPr>
@@ -12928,23 +12925,23 @@
               <a:buNone/>
             </a:pPr>
             <a:r>
-              <a:rPr lang="en-US" sz="4400" b="1" dirty="0">
-                <a:solidFill>
-                  <a:srgbClr val="EAF1FA"/>
-                </a:solidFill>
-                <a:latin typeface="Bookman Old Style" pitchFamily="34" charset="0"/>
-                <a:ea typeface="Bookman Old Style" pitchFamily="34" charset="-122"/>
-                <a:cs typeface="Bookman Old Style" pitchFamily="34" charset="-120"/>
+              <a:rPr lang="en-US" sz="4000" b="1" dirty="0">
+                <a:solidFill>
+                  <a:srgbClr val="33302B"/>
+                </a:solidFill>
+                <a:latin typeface="Georgia" pitchFamily="34" charset="0"/>
+                <a:ea typeface="Georgia" pitchFamily="34" charset="-122"/>
+                <a:cs typeface="Georgia" pitchFamily="34" charset="-120"/>
               </a:rPr>
               <a:t>O Portal &amp; os Momentos Uau</a:t>
             </a:r>
-            <a:endParaRPr lang="en-US" sz="4400" dirty="0"/>
-          </a:p>
-        </p:txBody>
-      </p:sp>
-      <p:sp>
-        <p:nvSpPr>
-          <p:cNvPr id="7" name="Text 5"/>
+            <a:endParaRPr lang="en-US" sz="4000" dirty="0"/>
+          </a:p>
+        </p:txBody>
+      </p:sp>
+      <p:sp>
+        <p:nvSpPr>
+          <p:cNvPr id="5" name="Text 3"/>
           <p:cNvSpPr/>
           <p:nvPr/>
         </p:nvSpPr>
@@ -12969,7 +12966,7 @@
             <a:r>
               <a:rPr lang="en-US" sz="1600" dirty="0">
                 <a:solidFill>
-                  <a:srgbClr val="9FB2C9"/>
+                  <a:srgbClr val="8A7E72"/>
                 </a:solidFill>
                 <a:latin typeface="Calibri" pitchFamily="34" charset="0"/>
                 <a:ea typeface="Calibri" pitchFamily="34" charset="-122"/>
@@ -12983,7 +12980,7 @@
       </p:sp>
       <p:sp>
         <p:nvSpPr>
-          <p:cNvPr id="8" name="Shape 6"/>
+          <p:cNvPr id="6" name="Shape 4"/>
           <p:cNvSpPr/>
           <p:nvPr/>
         </p:nvSpPr>
@@ -12998,7 +12995,7 @@
           <a:noFill/>
           <a:ln w="9525">
             <a:solidFill>
-              <a:srgbClr val="5C708A">
+              <a:srgbClr val="A89A86">
                 <a:alpha val="60000"/>
               </a:srgbClr>
             </a:solidFill>
@@ -13008,7 +13005,7 @@
       </p:sp>
       <p:sp>
         <p:nvSpPr>
-          <p:cNvPr id="9" name="Text 7"/>
+          <p:cNvPr id="7" name="Text 5"/>
           <p:cNvSpPr/>
           <p:nvPr/>
         </p:nvSpPr>
@@ -13033,7 +13030,7 @@
             <a:r>
               <a:rPr lang="en-US" sz="900" dirty="0">
                 <a:solidFill>
-                  <a:srgbClr val="5C708A"/>
+                  <a:srgbClr val="A89A86"/>
                 </a:solidFill>
                 <a:latin typeface="Calibri" pitchFamily="34" charset="0"/>
                 <a:ea typeface="Calibri" pitchFamily="34" charset="-122"/>
@@ -13047,7 +13044,7 @@
       </p:sp>
       <p:sp>
         <p:nvSpPr>
-          <p:cNvPr id="10" name="Text 8"/>
+          <p:cNvPr id="8" name="Text 6"/>
           <p:cNvSpPr/>
           <p:nvPr/>
         </p:nvSpPr>
@@ -13072,7 +13069,7 @@
             <a:r>
               <a:rPr lang="en-US" sz="900" dirty="0">
                 <a:solidFill>
-                  <a:srgbClr val="5C708A"/>
+                  <a:srgbClr val="A89A86"/>
                 </a:solidFill>
                 <a:latin typeface="Calibri" pitchFamily="34" charset="0"/>
                 <a:ea typeface="Calibri" pitchFamily="34" charset="-122"/>
@@ -13098,7 +13095,7 @@
     <p:bg>
       <p:bgPr>
         <a:solidFill>
-          <a:srgbClr val="102844"/>
+          <a:srgbClr val="EFE7DE"/>
         </a:solidFill>
       </p:bgPr>
     </p:bg>
@@ -13143,7 +13140,7 @@
             <a:r>
               <a:rPr lang="en-US" sz="1200" b="1" spc="300" kern="0" dirty="0">
                 <a:solidFill>
-                  <a:srgbClr val="C9A961"/>
+                  <a:srgbClr val="B1937E"/>
                 </a:solidFill>
                 <a:latin typeface="Calibri" pitchFamily="34" charset="0"/>
                 <a:ea typeface="Calibri" pitchFamily="34" charset="-122"/>
@@ -13185,11 +13182,11 @@
             <a:r>
               <a:rPr lang="en-US" sz="3400" b="1" dirty="0">
                 <a:solidFill>
-                  <a:srgbClr val="EAF1FA"/>
-                </a:solidFill>
-                <a:latin typeface="Bookman Old Style" pitchFamily="34" charset="0"/>
-                <a:ea typeface="Bookman Old Style" pitchFamily="34" charset="-122"/>
-                <a:cs typeface="Bookman Old Style" pitchFamily="34" charset="-120"/>
+                  <a:srgbClr val="33302B"/>
+                </a:solidFill>
+                <a:latin typeface="Georgia" pitchFamily="34" charset="0"/>
+                <a:ea typeface="Georgia" pitchFamily="34" charset="-122"/>
+                <a:cs typeface="Georgia" pitchFamily="34" charset="-120"/>
               </a:rPr>
               <a:t>WhatsApp solto vs. portal</a:t>
             </a:r>
@@ -13214,20 +13211,20 @@
             </a:avLst>
           </a:prstGeom>
           <a:solidFill>
-            <a:srgbClr val="13283F"/>
+            <a:srgbClr val="FFFFFF"/>
           </a:solidFill>
           <a:ln w="9525">
             <a:solidFill>
-              <a:srgbClr val="9FB2C9">
+              <a:srgbClr val="8A7E72">
                 <a:alpha val="50000"/>
               </a:srgbClr>
             </a:solidFill>
             <a:prstDash val="solid"/>
           </a:ln>
           <a:effectLst>
-            <a:outerShdw sx="100000" sy="100000" kx="0" ky="0" algn="bl" rotWithShape="0" blurRad="127000" dist="38100" dir="5400000">
-              <a:srgbClr val="000000">
-                <a:alpha val="28000"/>
+            <a:outerShdw sx="100000" sy="100000" kx="0" ky="0" algn="bl" rotWithShape="0" blurRad="114300" dist="38100" dir="5400000">
+              <a:srgbClr val="7A6A55">
+                <a:alpha val="12000"/>
               </a:srgbClr>
             </a:outerShdw>
           </a:effectLst>
@@ -13260,7 +13257,7 @@
             <a:r>
               <a:rPr lang="en-US" sz="1300" b="1" spc="300" kern="0" dirty="0">
                 <a:solidFill>
-                  <a:srgbClr val="9FB2C9"/>
+                  <a:srgbClr val="8A7E72"/>
                 </a:solidFill>
                 <a:latin typeface="Calibri" pitchFamily="34" charset="0"/>
                 <a:ea typeface="Calibri" pitchFamily="34" charset="-122"/>
@@ -13302,7 +13299,7 @@
             <a:r>
               <a:rPr lang="en-US" sz="1600" b="1" dirty="0">
                 <a:solidFill>
-                  <a:srgbClr val="9FB2C9"/>
+                  <a:srgbClr val="8A7E72"/>
                 </a:solidFill>
                 <a:latin typeface="Calibri" pitchFamily="34" charset="0"/>
                 <a:ea typeface="Calibri" pitchFamily="34" charset="-122"/>
@@ -13322,7 +13319,7 @@
             <a:r>
               <a:rPr lang="en-US" sz="1500" dirty="0">
                 <a:solidFill>
-                  <a:srgbClr val="9FB2C9"/>
+                  <a:srgbClr val="8A7E72"/>
                 </a:solidFill>
                 <a:latin typeface="Calibri" pitchFamily="34" charset="0"/>
                 <a:ea typeface="Calibri" pitchFamily="34" charset="-122"/>
@@ -13342,7 +13339,7 @@
             <a:r>
               <a:rPr lang="en-US" sz="1500" dirty="0">
                 <a:solidFill>
-                  <a:srgbClr val="9FB2C9"/>
+                  <a:srgbClr val="8A7E72"/>
                 </a:solidFill>
                 <a:latin typeface="Calibri" pitchFamily="34" charset="0"/>
                 <a:ea typeface="Calibri" pitchFamily="34" charset="-122"/>
@@ -13359,7 +13356,7 @@
             <a:r>
               <a:rPr lang="en-US" sz="1400" i="1" dirty="0">
                 <a:solidFill>
-                  <a:srgbClr val="9FB2C9"/>
+                  <a:srgbClr val="8A7E72"/>
                 </a:solidFill>
                 <a:latin typeface="Calibri" pitchFamily="34" charset="0"/>
                 <a:ea typeface="Calibri" pitchFamily="34" charset="-122"/>
@@ -13388,18 +13385,18 @@
             </a:avLst>
           </a:prstGeom>
           <a:solidFill>
-            <a:srgbClr val="16314F"/>
+            <a:srgbClr val="EADFD0"/>
           </a:solidFill>
           <a:ln w="19050">
             <a:solidFill>
-              <a:srgbClr val="C9A961"/>
+              <a:srgbClr val="B1937E"/>
             </a:solidFill>
             <a:prstDash val="solid"/>
           </a:ln>
           <a:effectLst>
-            <a:outerShdw sx="100000" sy="100000" kx="0" ky="0" algn="bl" rotWithShape="0" blurRad="127000" dist="38100" dir="5400000">
-              <a:srgbClr val="000000">
-                <a:alpha val="28000"/>
+            <a:outerShdw sx="100000" sy="100000" kx="0" ky="0" algn="bl" rotWithShape="0" blurRad="114300" dist="38100" dir="5400000">
+              <a:srgbClr val="7A6A55">
+                <a:alpha val="12000"/>
               </a:srgbClr>
             </a:outerShdw>
           </a:effectLst>
@@ -13432,7 +13429,7 @@
             <a:r>
               <a:rPr lang="en-US" sz="1300" b="1" spc="300" kern="0" dirty="0">
                 <a:solidFill>
-                  <a:srgbClr val="C9A961"/>
+                  <a:srgbClr val="B1937E"/>
                 </a:solidFill>
                 <a:latin typeface="Calibri" pitchFamily="34" charset="0"/>
                 <a:ea typeface="Calibri" pitchFamily="34" charset="-122"/>
@@ -13474,7 +13471,7 @@
             <a:r>
               <a:rPr lang="en-US" sz="1600" b="1" dirty="0">
                 <a:solidFill>
-                  <a:srgbClr val="EAF1FA"/>
+                  <a:srgbClr val="33302B"/>
                 </a:solidFill>
                 <a:latin typeface="Calibri" pitchFamily="34" charset="0"/>
                 <a:ea typeface="Calibri" pitchFamily="34" charset="-122"/>
@@ -13494,7 +13491,7 @@
             <a:r>
               <a:rPr lang="en-US" sz="1500" dirty="0">
                 <a:solidFill>
-                  <a:srgbClr val="EAF1FA"/>
+                  <a:srgbClr val="33302B"/>
                 </a:solidFill>
                 <a:latin typeface="Calibri" pitchFamily="34" charset="0"/>
                 <a:ea typeface="Calibri" pitchFamily="34" charset="-122"/>
@@ -13514,7 +13511,7 @@
             <a:r>
               <a:rPr lang="en-US" sz="1500" dirty="0">
                 <a:solidFill>
-                  <a:srgbClr val="EAF1FA"/>
+                  <a:srgbClr val="33302B"/>
                 </a:solidFill>
                 <a:latin typeface="Calibri" pitchFamily="34" charset="0"/>
                 <a:ea typeface="Calibri" pitchFamily="34" charset="-122"/>
@@ -13531,7 +13528,7 @@
             <a:r>
               <a:rPr lang="en-US" sz="1400" i="1" dirty="0">
                 <a:solidFill>
-                  <a:srgbClr val="C9A961"/>
+                  <a:srgbClr val="B1937E"/>
                 </a:solidFill>
                 <a:latin typeface="Calibri" pitchFamily="34" charset="0"/>
                 <a:ea typeface="Calibri" pitchFamily="34" charset="-122"/>
@@ -13560,7 +13557,7 @@
           <a:noFill/>
           <a:ln w="9525">
             <a:solidFill>
-              <a:srgbClr val="5C708A">
+              <a:srgbClr val="A89A86">
                 <a:alpha val="60000"/>
               </a:srgbClr>
             </a:solidFill>
@@ -13595,7 +13592,7 @@
             <a:r>
               <a:rPr lang="en-US" sz="900" dirty="0">
                 <a:solidFill>
-                  <a:srgbClr val="5C708A"/>
+                  <a:srgbClr val="A89A86"/>
                 </a:solidFill>
                 <a:latin typeface="Calibri" pitchFamily="34" charset="0"/>
                 <a:ea typeface="Calibri" pitchFamily="34" charset="-122"/>
@@ -13634,7 +13631,7 @@
             <a:r>
               <a:rPr lang="en-US" sz="900" dirty="0">
                 <a:solidFill>
-                  <a:srgbClr val="5C708A"/>
+                  <a:srgbClr val="A89A86"/>
                 </a:solidFill>
                 <a:latin typeface="Calibri" pitchFamily="34" charset="0"/>
                 <a:ea typeface="Calibri" pitchFamily="34" charset="-122"/>
@@ -13660,7 +13657,7 @@
     <p:bg>
       <p:bgPr>
         <a:solidFill>
-          <a:srgbClr val="0B1D33"/>
+          <a:srgbClr val="F8F6F3"/>
         </a:solidFill>
       </p:bgPr>
     </p:bg>
@@ -13705,7 +13702,7 @@
             <a:r>
               <a:rPr lang="en-US" sz="1200" b="1" spc="300" kern="0" dirty="0">
                 <a:solidFill>
-                  <a:srgbClr val="4A9EFF"/>
+                  <a:srgbClr val="9A7B66"/>
                 </a:solidFill>
                 <a:latin typeface="Calibri" pitchFamily="34" charset="0"/>
                 <a:ea typeface="Calibri" pitchFamily="34" charset="-122"/>
@@ -13747,11 +13744,11 @@
             <a:r>
               <a:rPr lang="en-US" sz="3200" b="1" dirty="0">
                 <a:solidFill>
-                  <a:srgbClr val="EAF1FA"/>
-                </a:solidFill>
-                <a:latin typeface="Bookman Old Style" pitchFamily="34" charset="0"/>
-                <a:ea typeface="Bookman Old Style" pitchFamily="34" charset="-122"/>
-                <a:cs typeface="Bookman Old Style" pitchFamily="34" charset="-120"/>
+                  <a:srgbClr val="33302B"/>
+                </a:solidFill>
+                <a:latin typeface="Georgia" pitchFamily="34" charset="0"/>
+                <a:ea typeface="Georgia" pitchFamily="34" charset="-122"/>
+                <a:cs typeface="Georgia" pitchFamily="34" charset="-120"/>
               </a:rPr>
               <a:t>O que o teu portal deve conter</a:t>
             </a:r>
@@ -13776,13 +13773,18 @@
             </a:avLst>
           </a:prstGeom>
           <a:solidFill>
-            <a:srgbClr val="13283F"/>
+            <a:srgbClr val="FFFFFF"/>
           </a:solidFill>
-          <a:ln/>
+          <a:ln w="12700">
+            <a:solidFill>
+              <a:srgbClr val="E3D9CC"/>
+            </a:solidFill>
+            <a:prstDash val="solid"/>
+          </a:ln>
           <a:effectLst>
-            <a:outerShdw sx="100000" sy="100000" kx="0" ky="0" algn="bl" rotWithShape="0" blurRad="127000" dist="38100" dir="5400000">
-              <a:srgbClr val="000000">
-                <a:alpha val="28000"/>
+            <a:outerShdw sx="100000" sy="100000" kx="0" ky="0" algn="bl" rotWithShape="0" blurRad="114300" dist="38100" dir="5400000">
+              <a:srgbClr val="7A6A55">
+                <a:alpha val="12000"/>
               </a:srgbClr>
             </a:outerShdw>
           </a:effectLst>
@@ -13803,9 +13805,14 @@
             <a:avLst/>
           </a:prstGeom>
           <a:solidFill>
-            <a:srgbClr val="16314F"/>
+            <a:srgbClr val="EADFD0"/>
           </a:solidFill>
-          <a:ln/>
+          <a:ln w="9525">
+            <a:solidFill>
+              <a:srgbClr val="E3D9CC"/>
+            </a:solidFill>
+            <a:prstDash val="solid"/>
+          </a:ln>
         </p:spPr>
       </p:sp>
       <p:pic>
@@ -13859,11 +13866,11 @@
             <a:r>
               <a:rPr lang="en-US" sz="1800" b="1" dirty="0">
                 <a:solidFill>
-                  <a:srgbClr val="C9A961"/>
-                </a:solidFill>
-                <a:latin typeface="Bookman Old Style" pitchFamily="34" charset="0"/>
-                <a:ea typeface="Bookman Old Style" pitchFamily="34" charset="-122"/>
-                <a:cs typeface="Bookman Old Style" pitchFamily="34" charset="-120"/>
+                  <a:srgbClr val="B1937E"/>
+                </a:solidFill>
+                <a:latin typeface="Georgia" pitchFamily="34" charset="0"/>
+                <a:ea typeface="Georgia" pitchFamily="34" charset="-122"/>
+                <a:cs typeface="Georgia" pitchFamily="34" charset="-120"/>
               </a:rPr>
               <a:t>Proposta e contrato</a:t>
             </a:r>
@@ -13898,7 +13905,7 @@
             <a:r>
               <a:rPr lang="en-US" sz="1350" dirty="0">
                 <a:solidFill>
-                  <a:srgbClr val="9FB2C9"/>
+                  <a:srgbClr val="8A7E72"/>
                 </a:solidFill>
                 <a:latin typeface="Calibri" pitchFamily="34" charset="0"/>
                 <a:ea typeface="Calibri" pitchFamily="34" charset="-122"/>
@@ -13927,13 +13934,18 @@
             </a:avLst>
           </a:prstGeom>
           <a:solidFill>
-            <a:srgbClr val="13283F"/>
+            <a:srgbClr val="FFFFFF"/>
           </a:solidFill>
-          <a:ln/>
+          <a:ln w="12700">
+            <a:solidFill>
+              <a:srgbClr val="E3D9CC"/>
+            </a:solidFill>
+            <a:prstDash val="solid"/>
+          </a:ln>
           <a:effectLst>
-            <a:outerShdw sx="100000" sy="100000" kx="0" ky="0" algn="bl" rotWithShape="0" blurRad="127000" dist="38100" dir="5400000">
-              <a:srgbClr val="000000">
-                <a:alpha val="28000"/>
+            <a:outerShdw sx="100000" sy="100000" kx="0" ky="0" algn="bl" rotWithShape="0" blurRad="114300" dist="38100" dir="5400000">
+              <a:srgbClr val="7A6A55">
+                <a:alpha val="12000"/>
               </a:srgbClr>
             </a:outerShdw>
           </a:effectLst>
@@ -13954,9 +13966,14 @@
             <a:avLst/>
           </a:prstGeom>
           <a:solidFill>
-            <a:srgbClr val="16314F"/>
+            <a:srgbClr val="EADFD0"/>
           </a:solidFill>
-          <a:ln/>
+          <a:ln w="9525">
+            <a:solidFill>
+              <a:srgbClr val="E3D9CC"/>
+            </a:solidFill>
+            <a:prstDash val="solid"/>
+          </a:ln>
         </p:spPr>
       </p:sp>
       <p:pic>
@@ -14010,11 +14027,11 @@
             <a:r>
               <a:rPr lang="en-US" sz="1800" b="1" dirty="0">
                 <a:solidFill>
-                  <a:srgbClr val="C9A961"/>
-                </a:solidFill>
-                <a:latin typeface="Bookman Old Style" pitchFamily="34" charset="0"/>
-                <a:ea typeface="Bookman Old Style" pitchFamily="34" charset="-122"/>
-                <a:cs typeface="Bookman Old Style" pitchFamily="34" charset="-120"/>
+                  <a:srgbClr val="B1937E"/>
+                </a:solidFill>
+                <a:latin typeface="Georgia" pitchFamily="34" charset="0"/>
+                <a:ea typeface="Georgia" pitchFamily="34" charset="-122"/>
+                <a:cs typeface="Georgia" pitchFamily="34" charset="-120"/>
               </a:rPr>
               <a:t>A revista de pré-reunião</a:t>
             </a:r>
@@ -14049,7 +14066,7 @@
             <a:r>
               <a:rPr lang="en-US" sz="1350" dirty="0">
                 <a:solidFill>
-                  <a:srgbClr val="9FB2C9"/>
+                  <a:srgbClr val="8A7E72"/>
                 </a:solidFill>
                 <a:latin typeface="Calibri" pitchFamily="34" charset="0"/>
                 <a:ea typeface="Calibri" pitchFamily="34" charset="-122"/>
@@ -14078,13 +14095,18 @@
             </a:avLst>
           </a:prstGeom>
           <a:solidFill>
-            <a:srgbClr val="13283F"/>
+            <a:srgbClr val="FFFFFF"/>
           </a:solidFill>
-          <a:ln/>
+          <a:ln w="12700">
+            <a:solidFill>
+              <a:srgbClr val="E3D9CC"/>
+            </a:solidFill>
+            <a:prstDash val="solid"/>
+          </a:ln>
           <a:effectLst>
-            <a:outerShdw sx="100000" sy="100000" kx="0" ky="0" algn="bl" rotWithShape="0" blurRad="127000" dist="38100" dir="5400000">
-              <a:srgbClr val="000000">
-                <a:alpha val="28000"/>
+            <a:outerShdw sx="100000" sy="100000" kx="0" ky="0" algn="bl" rotWithShape="0" blurRad="114300" dist="38100" dir="5400000">
+              <a:srgbClr val="7A6A55">
+                <a:alpha val="12000"/>
               </a:srgbClr>
             </a:outerShdw>
           </a:effectLst>
@@ -14105,9 +14127,14 @@
             <a:avLst/>
           </a:prstGeom>
           <a:solidFill>
-            <a:srgbClr val="16314F"/>
+            <a:srgbClr val="EADFD0"/>
           </a:solidFill>
-          <a:ln/>
+          <a:ln w="9525">
+            <a:solidFill>
+              <a:srgbClr val="E3D9CC"/>
+            </a:solidFill>
+            <a:prstDash val="solid"/>
+          </a:ln>
         </p:spPr>
       </p:sp>
       <p:pic>
@@ -14161,11 +14188,11 @@
             <a:r>
               <a:rPr lang="en-US" sz="1800" b="1" dirty="0">
                 <a:solidFill>
-                  <a:srgbClr val="C9A961"/>
-                </a:solidFill>
-                <a:latin typeface="Bookman Old Style" pitchFamily="34" charset="0"/>
-                <a:ea typeface="Bookman Old Style" pitchFamily="34" charset="-122"/>
-                <a:cs typeface="Bookman Old Style" pitchFamily="34" charset="-120"/>
+                  <a:srgbClr val="B1937E"/>
+                </a:solidFill>
+                <a:latin typeface="Georgia" pitchFamily="34" charset="0"/>
+                <a:ea typeface="Georgia" pitchFamily="34" charset="-122"/>
+                <a:cs typeface="Georgia" pitchFamily="34" charset="-120"/>
               </a:rPr>
               <a:t>Cronograma do dia</a:t>
             </a:r>
@@ -14200,7 +14227,7 @@
             <a:r>
               <a:rPr lang="en-US" sz="1350" dirty="0">
                 <a:solidFill>
-                  <a:srgbClr val="9FB2C9"/>
+                  <a:srgbClr val="8A7E72"/>
                 </a:solidFill>
                 <a:latin typeface="Calibri" pitchFamily="34" charset="0"/>
                 <a:ea typeface="Calibri" pitchFamily="34" charset="-122"/>
@@ -14229,13 +14256,18 @@
             </a:avLst>
           </a:prstGeom>
           <a:solidFill>
-            <a:srgbClr val="13283F"/>
+            <a:srgbClr val="FFFFFF"/>
           </a:solidFill>
-          <a:ln/>
+          <a:ln w="12700">
+            <a:solidFill>
+              <a:srgbClr val="E3D9CC"/>
+            </a:solidFill>
+            <a:prstDash val="solid"/>
+          </a:ln>
           <a:effectLst>
-            <a:outerShdw sx="100000" sy="100000" kx="0" ky="0" algn="bl" rotWithShape="0" blurRad="127000" dist="38100" dir="5400000">
-              <a:srgbClr val="000000">
-                <a:alpha val="28000"/>
+            <a:outerShdw sx="100000" sy="100000" kx="0" ky="0" algn="bl" rotWithShape="0" blurRad="114300" dist="38100" dir="5400000">
+              <a:srgbClr val="7A6A55">
+                <a:alpha val="12000"/>
               </a:srgbClr>
             </a:outerShdw>
           </a:effectLst>
@@ -14256,9 +14288,14 @@
             <a:avLst/>
           </a:prstGeom>
           <a:solidFill>
-            <a:srgbClr val="16314F"/>
+            <a:srgbClr val="EADFD0"/>
           </a:solidFill>
-          <a:ln/>
+          <a:ln w="9525">
+            <a:solidFill>
+              <a:srgbClr val="E3D9CC"/>
+            </a:solidFill>
+            <a:prstDash val="solid"/>
+          </a:ln>
         </p:spPr>
       </p:sp>
       <p:pic>
@@ -14312,11 +14349,11 @@
             <a:r>
               <a:rPr lang="en-US" sz="1800" b="1" dirty="0">
                 <a:solidFill>
-                  <a:srgbClr val="C9A961"/>
-                </a:solidFill>
-                <a:latin typeface="Bookman Old Style" pitchFamily="34" charset="0"/>
-                <a:ea typeface="Bookman Old Style" pitchFamily="34" charset="-122"/>
-                <a:cs typeface="Bookman Old Style" pitchFamily="34" charset="-120"/>
+                  <a:srgbClr val="B1937E"/>
+                </a:solidFill>
+                <a:latin typeface="Georgia" pitchFamily="34" charset="0"/>
+                <a:ea typeface="Georgia" pitchFamily="34" charset="-122"/>
+                <a:cs typeface="Georgia" pitchFamily="34" charset="-120"/>
               </a:rPr>
               <a:t>Galeria e entregas</a:t>
             </a:r>
@@ -14351,7 +14388,7 @@
             <a:r>
               <a:rPr lang="en-US" sz="1350" dirty="0">
                 <a:solidFill>
-                  <a:srgbClr val="9FB2C9"/>
+                  <a:srgbClr val="8A7E72"/>
                 </a:solidFill>
                 <a:latin typeface="Calibri" pitchFamily="34" charset="0"/>
                 <a:ea typeface="Calibri" pitchFamily="34" charset="-122"/>
@@ -14380,7 +14417,7 @@
           <a:noFill/>
           <a:ln w="9525">
             <a:solidFill>
-              <a:srgbClr val="5C708A">
+              <a:srgbClr val="A89A86">
                 <a:alpha val="60000"/>
               </a:srgbClr>
             </a:solidFill>
@@ -14415,7 +14452,7 @@
             <a:r>
               <a:rPr lang="en-US" sz="900" dirty="0">
                 <a:solidFill>
-                  <a:srgbClr val="5C708A"/>
+                  <a:srgbClr val="A89A86"/>
                 </a:solidFill>
                 <a:latin typeface="Calibri" pitchFamily="34" charset="0"/>
                 <a:ea typeface="Calibri" pitchFamily="34" charset="-122"/>
@@ -14454,7 +14491,7 @@
             <a:r>
               <a:rPr lang="en-US" sz="900" dirty="0">
                 <a:solidFill>
-                  <a:srgbClr val="5C708A"/>
+                  <a:srgbClr val="A89A86"/>
                 </a:solidFill>
                 <a:latin typeface="Calibri" pitchFamily="34" charset="0"/>
                 <a:ea typeface="Calibri" pitchFamily="34" charset="-122"/>
